--- a/N분의1_발표자료.pptx
+++ b/N분의1_발표자료.pptx
@@ -506,7 +506,7 @@
           <a:p>
             <a:r>
               <a:rPr lang="en-US" dirty="0"/>
-              <a:t>밤새 혼자 발표자료를 만든 그날 밤을 떠올려 보세요. 나는 다 했는데, 잠수 탄 팀원과 똑같은 점수를 받았습니다. 저희 앱 N분의1은 이 억울함을 풉니다. 학생은 스스로 기여를 증명하고, 교수님은 감이 아니라 근거로 공정하게 평가하게 만듭니다.</a:t>
+              <a:t>안녕하세요. 저희가 만든 N분의1은 팀 프로젝트의 기여도를 기록하고, 그 근거로 평가하는 안드로이드 앱입니다. 학생은 학기 내내 자신이 한 일을 남기고, 교수님은 결과물뿐 아니라 그 과정 데이터를 근거로 공정하게 평가하실 수 있습니다. 핵심은 '감시'가 아니라 학생 스스로의 '증명'이라는 점입니다.</a:t>
             </a:r>
             <a:endParaRPr lang="en-US" dirty="0"/>
           </a:p>
@@ -594,7 +594,7 @@
           <a:p>
             <a:r>
               <a:rPr lang="en-US" dirty="0"/>
-              <a:t>무임승차가 사라지지 않는 이유는 단 하나, 근거가 없기 때문입니다. 교수님은 최종 결과물만 보시고, 유일한 장치인 학기말 동료평가는 눈치싸움으로 변질됩니다. 저희 앱 설문 기능으로 모은 데이터에서도 87퍼센트가 무임승차를 경험했다고 답했습니다. (※ 실제 발표 시 팀이 직접 조사한 응답 수·비율로 교체하세요.) 열심히 한 사람이 손해 보는 구조입니다.</a:t>
+              <a:t>팀 프로젝트 평가가 어려운 이유는 세 가지입니다. 첫째, 교수님은 최종 결과물만 보시게 되어 과정에서 누가 얼마나 기여했는지 확인하기 어렵습니다. 둘째, 유일한 장치인 학기말 동료평가는 주관적이고 근거로 남지 않습니다. 셋째, 결국 참여도와 무관하게 같은 학점이 부여됩니다. 저희 앱에는 이런 현장의 목소리를 모으는 설문 기능도 포함되어 있습니다.</a:t>
             </a:r>
             <a:endParaRPr lang="en-US" dirty="0"/>
           </a:p>
@@ -682,7 +682,7 @@
           <a:p>
             <a:r>
               <a:rPr lang="en-US" dirty="0"/>
-              <a:t>그래서 프레임을 뒤집었습니다. 감시 도구가 아닌 증명 도구입니다. 학생은 학기 중 한 일을 잔디처럼 기록하고, 팀원끼리는 익명으로 서로를 평가합니다. AI는 이 본인 기록과 동료평가, 두 근거를 교차검증해 말이 아닌 데이터로 된 평가 자료를 만듭니다. 열심히 한 만큼 인정받는 구조입니다.</a:t>
+              <a:t>작동 방식은 네 단계입니다. 먼저 학생이 학기 중 자신이 한 일을 기록합니다. 기여는 잔디와 연속기록으로 시각화됩니다. 다음으로 팀원끼리 익명으로 서로를 평가합니다. 그러면 AI가 본인 기록과 동료평가라는 두 근거를 교차검증해 리포트를 만들고, 이 정리된 근거가 교수님 대시보드에 표시됩니다. 왼쪽이 실제 학생 화면입니다.</a:t>
             </a:r>
             <a:endParaRPr lang="en-US" dirty="0"/>
           </a:p>
@@ -770,7 +770,7 @@
           <a:p>
             <a:r>
               <a:rPr lang="en-US" dirty="0"/>
-              <a:t>핵심 기능은 교차검증 플래그입니다. 본인 기록과 동료평가, 두 근거가 어긋나면 앱이 자동으로 잡아냅니다. 참여가 저조하면 빨간 카드, 기록은 많은데 평가가 낮으면 노란 카드로 교수님 대시보드에 바로 뜹니다. 다만 AI는 확정하지 않습니다. 근거만 제시하고, 최종 판단은 교수님 몫으로 남깁니다.</a:t>
+              <a:t>주요 기능은 학생 화면과 교수 화면으로 나뉩니다. 학생은 활동을 기록하고, 익명 동료평가를 하고, 발표자료나 코드 같은 산출물을 업로드합니다. 교수님은 팀별·개인별 기여도를 차트 대시보드로 한눈에 보시고, 교차검증 플래그로 무임승차나 불일치를 자동으로 감지하며, AI가 만든 기여도 리포트를 성적 근거로 활용하실 수 있습니다. 나아가 미니 LMS로 과목의 마일스톤과 제출까지 관리됩니다.</a:t>
             </a:r>
             <a:endParaRPr lang="en-US" dirty="0"/>
           </a:p>
@@ -858,7 +858,7 @@
           <a:p>
             <a:r>
               <a:rPr lang="en-US" dirty="0"/>
-              <a:t>이제 점수는 딱 일한 만큼 나뉩니다. 학생은 노력한 만큼 인정받고, 교수님은 이의제기가 들어와도 근거로 방어할 수 있습니다. 나아가 일반 팀플을 넘어 졸업작품과 중간기말 프로젝트 관리까지, 한 앱에서 이어집니다. 감시가 아닌 증명. 무임승차의 종말을 N분의1이 만들겠습니다. 감사합니다.</a:t>
+              <a:t>정리하면, N분의1은 교수님께 세 가지를 드립니다. 첫째, 팀별·개인별 기여도를 근거와 함께 보여드려 성적 부여의 근거를 확보해 드립니다. 둘째, 무임승차나 기록·평가 불일치 같은 문제를 조기에 감지해 드립니다. 셋째, 졸업작품과 중간·기말 프로젝트 일정까지 한 앱에서 관리됩니다. 감시가 아닌 증명, N분의1이었습니다. 감사합니다.</a:t>
             </a:r>
             <a:endParaRPr lang="en-US" dirty="0"/>
           </a:p>
@@ -1285,13 +1285,13 @@
               <a:buNone/>
             </a:pPr>
             <a:r>
-              <a:rPr lang="en-US" sz="2200" dirty="0">
+              <a:rPr lang="en-US" sz="2200" b="1" dirty="0">
                 <a:solidFill>
                   <a:srgbClr val="FFFFFF"/>
                 </a:solidFill>
-                <a:latin typeface="Pretendard Black" pitchFamily="34" charset="0"/>
-                <a:ea typeface="Pretendard Black" pitchFamily="34" charset="-122"/>
-                <a:cs typeface="Pretendard Black" pitchFamily="34" charset="-120"/>
+                <a:latin typeface="Pretendard" pitchFamily="34" charset="0"/>
+                <a:ea typeface="Pretendard" pitchFamily="34" charset="-122"/>
+                <a:cs typeface="Pretendard" pitchFamily="34" charset="-120"/>
               </a:rPr>
               <a:t>1/N</a:t>
             </a:r>
@@ -1328,9 +1328,9 @@
                 <a:solidFill>
                   <a:srgbClr val="C7D2FE"/>
                 </a:solidFill>
-                <a:latin typeface="Pretendard Medium" pitchFamily="34" charset="0"/>
-                <a:ea typeface="Pretendard Medium" pitchFamily="34" charset="-122"/>
-                <a:cs typeface="Pretendard Medium" pitchFamily="34" charset="-120"/>
+                <a:latin typeface="Pretendard" pitchFamily="34" charset="0"/>
+                <a:ea typeface="Pretendard" pitchFamily="34" charset="-122"/>
+                <a:cs typeface="Pretendard" pitchFamily="34" charset="-120"/>
               </a:rPr>
               <a:t>성서대학교 소프트웨어 해커톤</a:t>
             </a:r>
@@ -1363,13 +1363,13 @@
               <a:buNone/>
             </a:pPr>
             <a:r>
-              <a:rPr lang="en-US" sz="1100" spc="300" kern="0" dirty="0">
+              <a:rPr lang="en-US" sz="1100" b="1" spc="300" kern="0" dirty="0">
                 <a:solidFill>
                   <a:srgbClr val="A5B4FC"/>
                 </a:solidFill>
-                <a:latin typeface="Pretendard SemiBold" pitchFamily="34" charset="0"/>
-                <a:ea typeface="Pretendard SemiBold" pitchFamily="34" charset="-122"/>
-                <a:cs typeface="Pretendard SemiBold" pitchFamily="34" charset="-120"/>
+                <a:latin typeface="Pretendard" pitchFamily="34" charset="0"/>
+                <a:ea typeface="Pretendard" pitchFamily="34" charset="-122"/>
+                <a:cs typeface="Pretendard" pitchFamily="34" charset="-120"/>
               </a:rPr>
               <a:t>FINAL PRESENTATION</a:t>
             </a:r>
@@ -1385,8 +1385,8 @@
         </p:nvSpPr>
         <p:spPr>
           <a:xfrm>
-            <a:off x="749808" y="1920240"/>
-            <a:ext cx="7772400" cy="1783080"/>
+            <a:off x="749808" y="1874520"/>
+            <a:ext cx="7680960" cy="1097280"/>
           </a:xfrm>
           <a:prstGeom prst="rect">
             <a:avLst/>
@@ -1399,152 +1399,121 @@
           <a:lstStyle/>
           <a:p>
             <a:pPr algn="l" indent="0" marL="0">
+              <a:buNone/>
+            </a:pPr>
+            <a:r>
+              <a:rPr lang="en-US" sz="5800" b="1" spc="-50" kern="0" dirty="0">
+                <a:solidFill>
+                  <a:srgbClr val="FFFFFF"/>
+                </a:solidFill>
+                <a:latin typeface="Pretendard" pitchFamily="34" charset="0"/>
+                <a:ea typeface="Pretendard" pitchFamily="34" charset="-122"/>
+                <a:cs typeface="Pretendard" pitchFamily="34" charset="-120"/>
+              </a:rPr>
+              <a:t>N분의1</a:t>
+            </a:r>
+            <a:endParaRPr lang="en-US" sz="5800" dirty="0"/>
+          </a:p>
+        </p:txBody>
+      </p:sp>
+      <p:sp>
+        <p:nvSpPr>
+          <p:cNvPr id="7" name="Text 5"/>
+          <p:cNvSpPr/>
+          <p:nvPr/>
+        </p:nvSpPr>
+        <p:spPr>
+          <a:xfrm>
+            <a:off x="777240" y="3063240"/>
+            <a:ext cx="7680960" cy="548640"/>
+          </a:xfrm>
+          <a:prstGeom prst="rect">
+            <a:avLst/>
+          </a:prstGeom>
+          <a:noFill/>
+          <a:ln/>
+        </p:spPr>
+        <p:txBody>
+          <a:bodyPr wrap="square" lIns="0" tIns="0" rIns="0" bIns="0" rtlCol="0" anchor="t"/>
+          <a:lstStyle/>
+          <a:p>
+            <a:pPr indent="0" marL="0">
+              <a:buNone/>
+            </a:pPr>
+            <a:r>
+              <a:rPr lang="en-US" sz="2200" b="1" dirty="0">
+                <a:solidFill>
+                  <a:srgbClr val="FCD34D"/>
+                </a:solidFill>
+                <a:latin typeface="Pretendard" pitchFamily="34" charset="0"/>
+                <a:ea typeface="Pretendard" pitchFamily="34" charset="-122"/>
+                <a:cs typeface="Pretendard" pitchFamily="34" charset="-120"/>
+              </a:rPr>
+              <a:t>팀 프로젝트 기여도를 기록하고, 근거로 평가하는 앱</a:t>
+            </a:r>
+            <a:endParaRPr lang="en-US" sz="2200" dirty="0"/>
+          </a:p>
+        </p:txBody>
+      </p:sp>
+      <p:sp>
+        <p:nvSpPr>
+          <p:cNvPr id="8" name="Text 6"/>
+          <p:cNvSpPr/>
+          <p:nvPr/>
+        </p:nvSpPr>
+        <p:spPr>
+          <a:xfrm>
+            <a:off x="777240" y="3794760"/>
+            <a:ext cx="7498080" cy="1097280"/>
+          </a:xfrm>
+          <a:prstGeom prst="rect">
+            <a:avLst/>
+          </a:prstGeom>
+          <a:noFill/>
+          <a:ln/>
+        </p:spPr>
+        <p:txBody>
+          <a:bodyPr wrap="square" lIns="0" tIns="0" rIns="0" bIns="0" rtlCol="0" anchor="t"/>
+          <a:lstStyle/>
+          <a:p>
+            <a:pPr indent="0" marL="0">
               <a:lnSpc>
-                <a:spcPct val="108000"/>
+                <a:spcPct val="125000"/>
               </a:lnSpc>
               <a:buNone/>
             </a:pPr>
             <a:r>
-              <a:rPr lang="en-US" sz="4000" dirty="0">
-                <a:solidFill>
-                  <a:srgbClr val="FFFFFF"/>
-                </a:solidFill>
-                <a:latin typeface="Pretendard Black" pitchFamily="34" charset="0"/>
-                <a:ea typeface="Pretendard Black" pitchFamily="34" charset="-122"/>
-                <a:cs typeface="Pretendard Black" pitchFamily="34" charset="-120"/>
-              </a:rPr>
-              <a:t>일은 한 사람이 다 했는데,</a:t>
-            </a:r>
-            <a:endParaRPr lang="en-US" sz="4000" dirty="0"/>
-          </a:p>
-          <a:p>
-            <a:pPr algn="l" indent="0" marL="0">
+              <a:rPr lang="en-US" sz="1600" dirty="0">
+                <a:solidFill>
+                  <a:srgbClr val="C7D2FE"/>
+                </a:solidFill>
+                <a:latin typeface="Pretendard" pitchFamily="34" charset="0"/>
+                <a:ea typeface="Pretendard" pitchFamily="34" charset="-122"/>
+                <a:cs typeface="Pretendard" pitchFamily="34" charset="-120"/>
+              </a:rPr>
+              <a:t>학생은 학기 내내 자신의 기여를 남기고,</a:t>
+            </a:r>
+            <a:endParaRPr lang="en-US" sz="1600" dirty="0"/>
+          </a:p>
+          <a:p>
+            <a:pPr indent="0" marL="0">
               <a:lnSpc>
-                <a:spcPct val="108000"/>
+                <a:spcPct val="125000"/>
               </a:lnSpc>
               <a:buNone/>
             </a:pPr>
             <a:r>
-              <a:rPr lang="en-US" sz="4000" dirty="0">
-                <a:solidFill>
-                  <a:srgbClr val="FFFFFF"/>
-                </a:solidFill>
-                <a:latin typeface="Pretendard Black" pitchFamily="34" charset="0"/>
-                <a:ea typeface="Pretendard Black" pitchFamily="34" charset="-122"/>
-                <a:cs typeface="Pretendard Black" pitchFamily="34" charset="-120"/>
-              </a:rPr>
-              <a:t>점수는 똑같이 </a:t>
-            </a:r>
-            <a:pPr algn="l" indent="0" marL="0">
-              <a:lnSpc>
-                <a:spcPct val="108000"/>
-              </a:lnSpc>
-              <a:buNone/>
-            </a:pPr>
-            <a:r>
-              <a:rPr lang="en-US" sz="4000" dirty="0">
-                <a:solidFill>
-                  <a:srgbClr val="FCD34D"/>
-                </a:solidFill>
-                <a:latin typeface="Pretendard Black" pitchFamily="34" charset="0"/>
-                <a:ea typeface="Pretendard Black" pitchFamily="34" charset="-122"/>
-                <a:cs typeface="Pretendard Black" pitchFamily="34" charset="-120"/>
-              </a:rPr>
-              <a:t>N분의 1.</a:t>
-            </a:r>
-            <a:endParaRPr lang="en-US" sz="4000" dirty="0"/>
-          </a:p>
-        </p:txBody>
-      </p:sp>
-      <p:sp>
-        <p:nvSpPr>
-          <p:cNvPr id="7" name="Text 5"/>
-          <p:cNvSpPr/>
-          <p:nvPr/>
-        </p:nvSpPr>
-        <p:spPr>
-          <a:xfrm>
-            <a:off x="777240" y="3931920"/>
-            <a:ext cx="7315200" cy="548640"/>
-          </a:xfrm>
-          <a:prstGeom prst="rect">
-            <a:avLst/>
-          </a:prstGeom>
-          <a:noFill/>
-          <a:ln/>
-        </p:spPr>
-        <p:txBody>
-          <a:bodyPr wrap="square" lIns="0" tIns="0" rIns="0" bIns="0" rtlCol="0" anchor="ctr"/>
-          <a:lstStyle/>
-          <a:p>
-            <a:pPr indent="0" marL="0">
-              <a:buNone/>
-            </a:pPr>
-            <a:r>
-              <a:rPr lang="en-US" sz="2200" dirty="0">
+              <a:rPr lang="en-US" sz="1600" dirty="0">
                 <a:solidFill>
                   <a:srgbClr val="C7D2FE"/>
                 </a:solidFill>
-                <a:latin typeface="Pretendard Medium" pitchFamily="34" charset="0"/>
-                <a:ea typeface="Pretendard Medium" pitchFamily="34" charset="-122"/>
-                <a:cs typeface="Pretendard Medium" pitchFamily="34" charset="-120"/>
-              </a:rPr>
-              <a:t>감이 아닌 '근거'로 평가합니다.</a:t>
-            </a:r>
-            <a:endParaRPr lang="en-US" sz="2200" dirty="0"/>
-          </a:p>
-        </p:txBody>
-      </p:sp>
-      <p:sp>
-        <p:nvSpPr>
-          <p:cNvPr id="8" name="Text 6"/>
-          <p:cNvSpPr/>
-          <p:nvPr/>
-        </p:nvSpPr>
-        <p:spPr>
-          <a:xfrm>
-            <a:off x="777240" y="4892040"/>
-            <a:ext cx="5486400" cy="640080"/>
-          </a:xfrm>
-          <a:prstGeom prst="rect">
-            <a:avLst/>
-          </a:prstGeom>
-          <a:noFill/>
-          <a:ln/>
-        </p:spPr>
-        <p:txBody>
-          <a:bodyPr wrap="square" lIns="0" tIns="0" rIns="0" bIns="0" rtlCol="0" anchor="ctr"/>
-          <a:lstStyle/>
-          <a:p>
-            <a:pPr indent="0" marL="0">
-              <a:buNone/>
-            </a:pPr>
-            <a:r>
-              <a:rPr lang="en-US" sz="3400" dirty="0">
-                <a:solidFill>
-                  <a:srgbClr val="FFFFFF"/>
-                </a:solidFill>
-                <a:latin typeface="Pretendard Black" pitchFamily="34" charset="0"/>
-                <a:ea typeface="Pretendard Black" pitchFamily="34" charset="-122"/>
-                <a:cs typeface="Pretendard Black" pitchFamily="34" charset="-120"/>
-              </a:rPr>
-              <a:t>N분의1</a:t>
-            </a:r>
-            <a:pPr indent="0" marL="0">
-              <a:buNone/>
-            </a:pPr>
-            <a:r>
-              <a:rPr lang="en-US" sz="1500" dirty="0">
-                <a:solidFill>
-                  <a:srgbClr val="A5B4FC"/>
-                </a:solidFill>
-                <a:latin typeface="Pretendard" pitchFamily="34" charset="0"/>
-                <a:ea typeface="Pretendard" pitchFamily="34" charset="-122"/>
-                <a:cs typeface="Pretendard" pitchFamily="34" charset="-120"/>
-              </a:rPr>
-              <a:t>   엔분의일</a:t>
-            </a:r>
-            <a:endParaRPr lang="en-US" sz="3400" dirty="0"/>
+                <a:latin typeface="Pretendard" pitchFamily="34" charset="0"/>
+                <a:ea typeface="Pretendard" pitchFamily="34" charset="-122"/>
+                <a:cs typeface="Pretendard" pitchFamily="34" charset="-120"/>
+              </a:rPr>
+              <a:t>교수님은 그 데이터를 근거로 공정하게 평가합니다.</a:t>
+            </a:r>
+            <a:endParaRPr lang="en-US" sz="1600" dirty="0"/>
           </a:p>
         </p:txBody>
       </p:sp>
@@ -1556,8 +1525,8 @@
         </p:nvSpPr>
         <p:spPr>
           <a:xfrm>
-            <a:off x="795528" y="5623560"/>
-            <a:ext cx="2514600" cy="548640"/>
+            <a:off x="795528" y="5440680"/>
+            <a:ext cx="2331720" cy="566928"/>
           </a:xfrm>
           <a:prstGeom prst="roundRect">
             <a:avLst>
@@ -1578,8 +1547,8 @@
         </p:nvSpPr>
         <p:spPr>
           <a:xfrm>
-            <a:off x="795528" y="5623560"/>
-            <a:ext cx="2514600" cy="548640"/>
+            <a:off x="795528" y="5440680"/>
+            <a:ext cx="2331720" cy="566928"/>
           </a:xfrm>
           <a:prstGeom prst="rect">
             <a:avLst/>
@@ -1595,15 +1564,15 @@
               <a:buNone/>
             </a:pPr>
             <a:r>
-              <a:rPr lang="en-US" sz="1500" dirty="0">
+              <a:rPr lang="en-US" sz="1500" b="1" dirty="0">
                 <a:solidFill>
                   <a:srgbClr val="FFFFFF"/>
                 </a:solidFill>
-                <a:latin typeface="Pretendard SemiBold" pitchFamily="34" charset="0"/>
-                <a:ea typeface="Pretendard SemiBold" pitchFamily="34" charset="-122"/>
-                <a:cs typeface="Pretendard SemiBold" pitchFamily="34" charset="-120"/>
-              </a:rPr>
-              <a:t>무임승차의 종말</a:t>
+                <a:latin typeface="Pretendard" pitchFamily="34" charset="0"/>
+                <a:ea typeface="Pretendard" pitchFamily="34" charset="-122"/>
+                <a:cs typeface="Pretendard" pitchFamily="34" charset="-120"/>
+              </a:rPr>
+              <a:t>감시가 아닌, 증명</a:t>
             </a:r>
             <a:endParaRPr lang="en-US" sz="1500" dirty="0"/>
           </a:p>
@@ -1642,7 +1611,7 @@
         <p:spPr>
           <a:xfrm>
             <a:off x="548640" y="6528816"/>
-            <a:ext cx="6400800" cy="256032"/>
+            <a:ext cx="7315200" cy="256032"/>
           </a:xfrm>
           <a:prstGeom prst="rect">
             <a:avLst/>
@@ -1666,7 +1635,7 @@
                 <a:ea typeface="Pretendard" pitchFamily="34" charset="-122"/>
                 <a:cs typeface="Pretendard" pitchFamily="34" charset="-120"/>
               </a:rPr>
-              <a:t>N분의1  ·  팀 프로젝트 기여도 증명 플랫폼</a:t>
+              <a:t>N분의1  ·  팀 프로젝트 기여도 증명·관리 플랫폼</a:t>
             </a:r>
             <a:endParaRPr lang="en-US" sz="900" dirty="0"/>
           </a:p>
@@ -1752,7 +1721,7 @@
         <p:spPr>
           <a:xfrm>
             <a:off x="3566160" y="566928"/>
-            <a:ext cx="7315200" cy="310896"/>
+            <a:ext cx="8229600" cy="310896"/>
           </a:xfrm>
           <a:prstGeom prst="rect">
             <a:avLst/>
@@ -1768,13 +1737,13 @@
               <a:buNone/>
             </a:pPr>
             <a:r>
-              <a:rPr lang="en-US" sz="1100" dirty="0">
+              <a:rPr lang="en-US" sz="1100" b="1" dirty="0">
                 <a:solidFill>
                   <a:srgbClr val="DC2626"/>
                 </a:solidFill>
-                <a:latin typeface="Pretendard SemiBold" pitchFamily="34" charset="0"/>
-                <a:ea typeface="Pretendard SemiBold" pitchFamily="34" charset="-122"/>
-                <a:cs typeface="Pretendard SemiBold" pitchFamily="34" charset="-120"/>
+                <a:latin typeface="Pretendard" pitchFamily="34" charset="0"/>
+                <a:ea typeface="Pretendard" pitchFamily="34" charset="-122"/>
+                <a:cs typeface="Pretendard" pitchFamily="34" charset="-120"/>
               </a:rPr>
               <a:t>●  </a:t>
             </a:r>
@@ -1782,15 +1751,15 @@
               <a:buNone/>
             </a:pPr>
             <a:r>
-              <a:rPr lang="en-US" sz="1250" spc="100" kern="0" dirty="0">
+              <a:rPr lang="en-US" sz="1250" b="1" spc="100" kern="0" dirty="0">
                 <a:solidFill>
                   <a:srgbClr val="DC2626"/>
                 </a:solidFill>
-                <a:latin typeface="Pretendard SemiBold" pitchFamily="34" charset="0"/>
-                <a:ea typeface="Pretendard SemiBold" pitchFamily="34" charset="-122"/>
-                <a:cs typeface="Pretendard SemiBold" pitchFamily="34" charset="-120"/>
-              </a:rPr>
-              <a:t>PROBLEM · 문제</a:t>
+                <a:latin typeface="Pretendard" pitchFamily="34" charset="0"/>
+                <a:ea typeface="Pretendard" pitchFamily="34" charset="-122"/>
+                <a:cs typeface="Pretendard" pitchFamily="34" charset="-120"/>
+              </a:rPr>
+              <a:t>BACKGROUND · 개발 배경</a:t>
             </a:r>
             <a:endParaRPr lang="en-US" sz="1100" dirty="0"/>
           </a:p>
@@ -1805,7 +1774,7 @@
         <p:spPr>
           <a:xfrm>
             <a:off x="3566160" y="914400"/>
-            <a:ext cx="8001000" cy="1234440"/>
+            <a:ext cx="8001000" cy="1371600"/>
           </a:xfrm>
           <a:prstGeom prst="rect">
             <a:avLst/>
@@ -1819,93 +1788,76 @@
           <a:p>
             <a:pPr algn="l" indent="0" marL="0">
               <a:lnSpc>
-                <a:spcPct val="105000"/>
+                <a:spcPct val="103000"/>
               </a:lnSpc>
               <a:buNone/>
             </a:pPr>
             <a:r>
-              <a:rPr lang="en-US" sz="2900" dirty="0">
+              <a:rPr lang="en-US" sz="3300" b="1" spc="-30" kern="0" dirty="0">
                 <a:solidFill>
                   <a:srgbClr val="1E293B"/>
                 </a:solidFill>
-                <a:latin typeface="Pretendard Black" pitchFamily="34" charset="0"/>
-                <a:ea typeface="Pretendard Black" pitchFamily="34" charset="-122"/>
-                <a:cs typeface="Pretendard Black" pitchFamily="34" charset="-120"/>
-              </a:rPr>
-              <a:t>교수님은 </a:t>
-            </a:r>
+                <a:latin typeface="Pretendard" pitchFamily="34" charset="0"/>
+                <a:ea typeface="Pretendard" pitchFamily="34" charset="-122"/>
+                <a:cs typeface="Pretendard" pitchFamily="34" charset="-120"/>
+              </a:rPr>
+              <a:t>기여는 보이지 않고,</a:t>
+            </a:r>
+            <a:endParaRPr lang="en-US" sz="3300" dirty="0"/>
+          </a:p>
+          <a:p>
             <a:pPr algn="l" indent="0" marL="0">
               <a:lnSpc>
-                <a:spcPct val="105000"/>
+                <a:spcPct val="103000"/>
               </a:lnSpc>
               <a:buNone/>
             </a:pPr>
             <a:r>
-              <a:rPr lang="en-US" sz="2900" dirty="0">
-                <a:solidFill>
-                  <a:srgbClr val="DC2626"/>
-                </a:solidFill>
-                <a:latin typeface="Pretendard Black" pitchFamily="34" charset="0"/>
-                <a:ea typeface="Pretendard Black" pitchFamily="34" charset="-122"/>
-                <a:cs typeface="Pretendard Black" pitchFamily="34" charset="-120"/>
-              </a:rPr>
-              <a:t>결과물만</a:t>
+              <a:rPr lang="en-US" sz="3300" b="1" spc="-30" kern="0" dirty="0">
+                <a:solidFill>
+                  <a:srgbClr val="1E293B"/>
+                </a:solidFill>
+                <a:latin typeface="Pretendard" pitchFamily="34" charset="0"/>
+                <a:ea typeface="Pretendard" pitchFamily="34" charset="-122"/>
+                <a:cs typeface="Pretendard" pitchFamily="34" charset="-120"/>
+              </a:rPr>
+              <a:t>성적은 </a:t>
             </a:r>
             <a:pPr algn="l" indent="0" marL="0">
               <a:lnSpc>
-                <a:spcPct val="105000"/>
+                <a:spcPct val="103000"/>
               </a:lnSpc>
               <a:buNone/>
             </a:pPr>
             <a:r>
-              <a:rPr lang="en-US" sz="2900" dirty="0">
-                <a:solidFill>
-                  <a:srgbClr val="1E293B"/>
-                </a:solidFill>
-                <a:latin typeface="Pretendard Black" pitchFamily="34" charset="0"/>
-                <a:ea typeface="Pretendard Black" pitchFamily="34" charset="-122"/>
-                <a:cs typeface="Pretendard Black" pitchFamily="34" charset="-120"/>
-              </a:rPr>
-              <a:t> 봅니다.</a:t>
-            </a:r>
-            <a:endParaRPr lang="en-US" sz="2900" dirty="0"/>
-          </a:p>
-          <a:p>
+              <a:rPr lang="en-US" sz="3300" b="1" spc="-30" kern="0" dirty="0">
+                <a:solidFill>
+                  <a:srgbClr val="DC2626"/>
+                </a:solidFill>
+                <a:latin typeface="Pretendard" pitchFamily="34" charset="0"/>
+                <a:ea typeface="Pretendard" pitchFamily="34" charset="-122"/>
+                <a:cs typeface="Pretendard" pitchFamily="34" charset="-120"/>
+              </a:rPr>
+              <a:t>똑같이</a:t>
+            </a:r>
             <a:pPr algn="l" indent="0" marL="0">
               <a:lnSpc>
-                <a:spcPct val="105000"/>
+                <a:spcPct val="103000"/>
               </a:lnSpc>
               <a:buNone/>
             </a:pPr>
             <a:r>
-              <a:rPr lang="en-US" sz="2900" dirty="0">
+              <a:rPr lang="en-US" sz="3300" b="1" spc="-30" kern="0" dirty="0">
                 <a:solidFill>
                   <a:srgbClr val="1E293B"/>
                 </a:solidFill>
-                <a:latin typeface="Pretendard Black" pitchFamily="34" charset="0"/>
-                <a:ea typeface="Pretendard Black" pitchFamily="34" charset="-122"/>
-                <a:cs typeface="Pretendard Black" pitchFamily="34" charset="-120"/>
-              </a:rPr>
-              <a:t>누가 일했는지는 </a:t>
-            </a:r>
-            <a:pPr algn="l" indent="0" marL="0">
-              <a:lnSpc>
-                <a:spcPct val="105000"/>
-              </a:lnSpc>
-              <a:buNone/>
-            </a:pPr>
-            <a:r>
-              <a:rPr lang="en-US" sz="2900" dirty="0">
-                <a:solidFill>
-                  <a:srgbClr val="DC2626"/>
-                </a:solidFill>
-                <a:latin typeface="Pretendard Black" pitchFamily="34" charset="0"/>
-                <a:ea typeface="Pretendard Black" pitchFamily="34" charset="-122"/>
-                <a:cs typeface="Pretendard Black" pitchFamily="34" charset="-120"/>
-              </a:rPr>
-              <a:t>모릅니다.</a:t>
-            </a:r>
-            <a:endParaRPr lang="en-US" sz="2900" dirty="0"/>
+                <a:latin typeface="Pretendard" pitchFamily="34" charset="0"/>
+                <a:ea typeface="Pretendard" pitchFamily="34" charset="-122"/>
+                <a:cs typeface="Pretendard" pitchFamily="34" charset="-120"/>
+              </a:rPr>
+              <a:t> 나뉩니다</a:t>
+            </a:r>
+            <a:endParaRPr lang="en-US" sz="3300" dirty="0"/>
           </a:p>
         </p:txBody>
       </p:sp>
@@ -1934,17 +1886,17 @@
               <a:buNone/>
             </a:pPr>
             <a:r>
-              <a:rPr lang="en-US" sz="1700" dirty="0">
+              <a:rPr lang="en-US" sz="1600" b="1" dirty="0">
                 <a:solidFill>
                   <a:srgbClr val="DC2626"/>
                 </a:solidFill>
-                <a:latin typeface="Pretendard SemiBold" pitchFamily="34" charset="0"/>
-                <a:ea typeface="Pretendard SemiBold" pitchFamily="34" charset="-122"/>
-                <a:cs typeface="Pretendard SemiBold" pitchFamily="34" charset="-120"/>
-              </a:rPr>
-              <a:t>학생 10명 중 9명이 겪은 무임승차</a:t>
-            </a:r>
-            <a:endParaRPr lang="en-US" sz="1700" dirty="0"/>
+                <a:latin typeface="Pretendard" pitchFamily="34" charset="0"/>
+                <a:ea typeface="Pretendard" pitchFamily="34" charset="-122"/>
+                <a:cs typeface="Pretendard" pitchFamily="34" charset="-120"/>
+              </a:rPr>
+              <a:t>팀 프로젝트 평가가 어려운 이유</a:t>
+            </a:r>
+            <a:endParaRPr lang="en-US" sz="1600" dirty="0"/>
           </a:p>
         </p:txBody>
       </p:sp>
@@ -2046,15 +1998,15 @@
               <a:buNone/>
             </a:pPr>
             <a:r>
-              <a:rPr lang="en-US" sz="1650" dirty="0">
+              <a:rPr lang="en-US" sz="1650" b="1" dirty="0">
                 <a:solidFill>
                   <a:srgbClr val="1E293B"/>
                 </a:solidFill>
-                <a:latin typeface="Pretendard SemiBold" pitchFamily="34" charset="0"/>
-                <a:ea typeface="Pretendard SemiBold" pitchFamily="34" charset="-122"/>
-                <a:cs typeface="Pretendard SemiBold" pitchFamily="34" charset="-120"/>
-              </a:rPr>
-              <a:t>최종 결과물만 보입니다</a:t>
+                <a:latin typeface="Pretendard" pitchFamily="34" charset="0"/>
+                <a:ea typeface="Pretendard" pitchFamily="34" charset="-122"/>
+                <a:cs typeface="Pretendard" pitchFamily="34" charset="-120"/>
+              </a:rPr>
+              <a:t>결과물만 보입니다</a:t>
             </a:r>
             <a:endParaRPr lang="en-US" sz="1650" dirty="0"/>
           </a:p>
@@ -2093,7 +2045,7 @@
                 <a:ea typeface="Pretendard" pitchFamily="34" charset="-122"/>
                 <a:cs typeface="Pretendard" pitchFamily="34" charset="-120"/>
               </a:rPr>
-              <a:t>누가 실제로 기여했는지 알 수 없어요</a:t>
+              <a:t>교수님이 과정의 실제 기여를 확인하기 어렵습니다</a:t>
             </a:r>
             <a:endParaRPr lang="en-US" sz="1250" dirty="0"/>
           </a:p>
@@ -2197,15 +2149,15 @@
               <a:buNone/>
             </a:pPr>
             <a:r>
-              <a:rPr lang="en-US" sz="1650" dirty="0">
+              <a:rPr lang="en-US" sz="1650" b="1" dirty="0">
                 <a:solidFill>
                   <a:srgbClr val="1E293B"/>
                 </a:solidFill>
-                <a:latin typeface="Pretendard SemiBold" pitchFamily="34" charset="0"/>
-                <a:ea typeface="Pretendard SemiBold" pitchFamily="34" charset="-122"/>
-                <a:cs typeface="Pretendard SemiBold" pitchFamily="34" charset="-120"/>
-              </a:rPr>
-              <a:t>동료평가는 눈치·감정싸움</a:t>
+                <a:latin typeface="Pretendard" pitchFamily="34" charset="0"/>
+                <a:ea typeface="Pretendard" pitchFamily="34" charset="-122"/>
+                <a:cs typeface="Pretendard" pitchFamily="34" charset="-120"/>
+              </a:rPr>
+              <a:t>동료평가는 근거가 약합니다</a:t>
             </a:r>
             <a:endParaRPr lang="en-US" sz="1650" dirty="0"/>
           </a:p>
@@ -2244,7 +2196,7 @@
                 <a:ea typeface="Pretendard" pitchFamily="34" charset="-122"/>
                 <a:cs typeface="Pretendard" pitchFamily="34" charset="-120"/>
               </a:rPr>
-              <a:t>학기말 설문 하나로는 근거가 못 됩니다</a:t>
+              <a:t>학기말 설문 한 번은 주관적이고 기록이 남지 않아요</a:t>
             </a:r>
             <a:endParaRPr lang="en-US" sz="1250" dirty="0"/>
           </a:p>
@@ -2348,15 +2300,15 @@
               <a:buNone/>
             </a:pPr>
             <a:r>
-              <a:rPr lang="en-US" sz="1650" dirty="0">
+              <a:rPr lang="en-US" sz="1650" b="1" dirty="0">
                 <a:solidFill>
                   <a:srgbClr val="1E293B"/>
                 </a:solidFill>
-                <a:latin typeface="Pretendard SemiBold" pitchFamily="34" charset="0"/>
-                <a:ea typeface="Pretendard SemiBold" pitchFamily="34" charset="-122"/>
-                <a:cs typeface="Pretendard SemiBold" pitchFamily="34" charset="-120"/>
-              </a:rPr>
-              <a:t>이의제기에 방어할 근거가 없습니다</a:t>
+                <a:latin typeface="Pretendard" pitchFamily="34" charset="0"/>
+                <a:ea typeface="Pretendard" pitchFamily="34" charset="-122"/>
+                <a:cs typeface="Pretendard" pitchFamily="34" charset="-120"/>
+              </a:rPr>
+              <a:t>참여와 무관하게 같은 학점</a:t>
             </a:r>
             <a:endParaRPr lang="en-US" sz="1650" dirty="0"/>
           </a:p>
@@ -2395,7 +2347,7 @@
                 <a:ea typeface="Pretendard" pitchFamily="34" charset="-122"/>
                 <a:cs typeface="Pretendard" pitchFamily="34" charset="-120"/>
               </a:rPr>
-              <a:t>"왜 이 점수죠?"에 답할 자료가 없어요</a:t>
+              <a:t>열심히 한 학생과 아닌 학생이 같은 점수를 받습니다</a:t>
             </a:r>
             <a:endParaRPr lang="en-US" sz="1250" dirty="0"/>
           </a:p>
@@ -2456,153 +2408,46 @@
       </p:pic>
       <p:sp>
         <p:nvSpPr>
-          <p:cNvPr id="22" name="Shape 16"/>
-          <p:cNvSpPr/>
-          <p:nvPr/>
-        </p:nvSpPr>
-        <p:spPr>
-          <a:xfrm>
-            <a:off x="1188720" y="868680"/>
-            <a:ext cx="1783080" cy="1152144"/>
-          </a:xfrm>
-          <a:prstGeom prst="roundRect">
-            <a:avLst>
-              <a:gd name="adj" fmla="val 10317"/>
-            </a:avLst>
-          </a:prstGeom>
-          <a:solidFill>
-            <a:srgbClr val="DC2626"/>
-          </a:solidFill>
-          <a:ln/>
-          <a:effectLst>
-            <a:outerShdw sx="100000" sy="100000" kx="0" ky="0" algn="bl" rotWithShape="0" blurRad="165100" dist="63500" dir="5400000">
-              <a:srgbClr val="000000">
-                <a:alpha val="28000"/>
-              </a:srgbClr>
-            </a:outerShdw>
-          </a:effectLst>
-        </p:spPr>
+          <p:cNvPr id="22" name="Text 16"/>
+          <p:cNvSpPr/>
+          <p:nvPr/>
+        </p:nvSpPr>
+        <p:spPr>
+          <a:xfrm>
+            <a:off x="548640" y="6528816"/>
+            <a:ext cx="7315200" cy="256032"/>
+          </a:xfrm>
+          <a:prstGeom prst="rect">
+            <a:avLst/>
+          </a:prstGeom>
+          <a:noFill/>
+          <a:ln/>
+        </p:spPr>
+        <p:txBody>
+          <a:bodyPr wrap="square" lIns="0" tIns="0" rIns="0" bIns="0" rtlCol="0" anchor="ctr"/>
+          <a:lstStyle/>
+          <a:p>
+            <a:pPr indent="0" marL="0">
+              <a:buNone/>
+            </a:pPr>
+            <a:r>
+              <a:rPr lang="en-US" sz="900" dirty="0">
+                <a:solidFill>
+                  <a:srgbClr val="94A3B8"/>
+                </a:solidFill>
+                <a:latin typeface="Pretendard" pitchFamily="34" charset="0"/>
+                <a:ea typeface="Pretendard" pitchFamily="34" charset="-122"/>
+                <a:cs typeface="Pretendard" pitchFamily="34" charset="-120"/>
+              </a:rPr>
+              <a:t>N분의1  ·  팀 프로젝트 기여도 증명·관리 플랫폼</a:t>
+            </a:r>
+            <a:endParaRPr lang="en-US" sz="900" dirty="0"/>
+          </a:p>
+        </p:txBody>
       </p:sp>
       <p:sp>
         <p:nvSpPr>
           <p:cNvPr id="23" name="Text 17"/>
-          <p:cNvSpPr/>
-          <p:nvPr/>
-        </p:nvSpPr>
-        <p:spPr>
-          <a:xfrm>
-            <a:off x="1188720" y="932688"/>
-            <a:ext cx="1783080" cy="640080"/>
-          </a:xfrm>
-          <a:prstGeom prst="rect">
-            <a:avLst/>
-          </a:prstGeom>
-          <a:noFill/>
-          <a:ln/>
-        </p:spPr>
-        <p:txBody>
-          <a:bodyPr wrap="square" lIns="0" tIns="0" rIns="0" bIns="0" rtlCol="0" anchor="ctr"/>
-          <a:lstStyle/>
-          <a:p>
-            <a:pPr algn="ctr" indent="0" marL="0">
-              <a:buNone/>
-            </a:pPr>
-            <a:r>
-              <a:rPr lang="en-US" sz="3300" dirty="0">
-                <a:solidFill>
-                  <a:srgbClr val="FFFFFF"/>
-                </a:solidFill>
-                <a:latin typeface="Pretendard Black" pitchFamily="34" charset="0"/>
-                <a:ea typeface="Pretendard Black" pitchFamily="34" charset="-122"/>
-                <a:cs typeface="Pretendard Black" pitchFamily="34" charset="-120"/>
-              </a:rPr>
-              <a:t>87%</a:t>
-            </a:r>
-            <a:endParaRPr lang="en-US" sz="3300" dirty="0"/>
-          </a:p>
-        </p:txBody>
-      </p:sp>
-      <p:sp>
-        <p:nvSpPr>
-          <p:cNvPr id="24" name="Text 18"/>
-          <p:cNvSpPr/>
-          <p:nvPr/>
-        </p:nvSpPr>
-        <p:spPr>
-          <a:xfrm>
-            <a:off x="1188720" y="1517904"/>
-            <a:ext cx="1783080" cy="384048"/>
-          </a:xfrm>
-          <a:prstGeom prst="rect">
-            <a:avLst/>
-          </a:prstGeom>
-          <a:noFill/>
-          <a:ln/>
-        </p:spPr>
-        <p:txBody>
-          <a:bodyPr wrap="square" lIns="0" tIns="0" rIns="0" bIns="0" rtlCol="0" anchor="ctr"/>
-          <a:lstStyle/>
-          <a:p>
-            <a:pPr algn="ctr" indent="0" marL="0">
-              <a:buNone/>
-            </a:pPr>
-            <a:r>
-              <a:rPr lang="en-US" sz="1200" dirty="0">
-                <a:solidFill>
-                  <a:srgbClr val="FFFFFF"/>
-                </a:solidFill>
-                <a:latin typeface="Pretendard Medium" pitchFamily="34" charset="0"/>
-                <a:ea typeface="Pretendard Medium" pitchFamily="34" charset="-122"/>
-                <a:cs typeface="Pretendard Medium" pitchFamily="34" charset="-120"/>
-              </a:rPr>
-              <a:t>무임승차 경험</a:t>
-            </a:r>
-            <a:endParaRPr lang="en-US" sz="1200" dirty="0"/>
-          </a:p>
-        </p:txBody>
-      </p:sp>
-      <p:sp>
-        <p:nvSpPr>
-          <p:cNvPr id="25" name="Text 19"/>
-          <p:cNvSpPr/>
-          <p:nvPr/>
-        </p:nvSpPr>
-        <p:spPr>
-          <a:xfrm>
-            <a:off x="548640" y="6528816"/>
-            <a:ext cx="6400800" cy="256032"/>
-          </a:xfrm>
-          <a:prstGeom prst="rect">
-            <a:avLst/>
-          </a:prstGeom>
-          <a:noFill/>
-          <a:ln/>
-        </p:spPr>
-        <p:txBody>
-          <a:bodyPr wrap="square" lIns="0" tIns="0" rIns="0" bIns="0" rtlCol="0" anchor="ctr"/>
-          <a:lstStyle/>
-          <a:p>
-            <a:pPr indent="0" marL="0">
-              <a:buNone/>
-            </a:pPr>
-            <a:r>
-              <a:rPr lang="en-US" sz="900" dirty="0">
-                <a:solidFill>
-                  <a:srgbClr val="94A3B8"/>
-                </a:solidFill>
-                <a:latin typeface="Pretendard" pitchFamily="34" charset="0"/>
-                <a:ea typeface="Pretendard" pitchFamily="34" charset="-122"/>
-                <a:cs typeface="Pretendard" pitchFamily="34" charset="-120"/>
-              </a:rPr>
-              <a:t>N분의1  ·  팀 프로젝트 기여도 증명 플랫폼</a:t>
-            </a:r>
-            <a:endParaRPr lang="en-US" sz="900" dirty="0"/>
-          </a:p>
-        </p:txBody>
-      </p:sp>
-      <p:sp>
-        <p:nvSpPr>
-          <p:cNvPr id="26" name="Text 20"/>
           <p:cNvSpPr/>
           <p:nvPr/>
         </p:nvSpPr>
@@ -2680,7 +2525,7 @@
         <p:spPr>
           <a:xfrm>
             <a:off x="3566160" y="566928"/>
-            <a:ext cx="7315200" cy="310896"/>
+            <a:ext cx="8229600" cy="310896"/>
           </a:xfrm>
           <a:prstGeom prst="rect">
             <a:avLst/>
@@ -2696,13 +2541,13 @@
               <a:buNone/>
             </a:pPr>
             <a:r>
-              <a:rPr lang="en-US" sz="1100" dirty="0">
+              <a:rPr lang="en-US" sz="1100" b="1" dirty="0">
                 <a:solidFill>
                   <a:srgbClr val="4F46E5"/>
                 </a:solidFill>
-                <a:latin typeface="Pretendard SemiBold" pitchFamily="34" charset="0"/>
-                <a:ea typeface="Pretendard SemiBold" pitchFamily="34" charset="-122"/>
-                <a:cs typeface="Pretendard SemiBold" pitchFamily="34" charset="-120"/>
+                <a:latin typeface="Pretendard" pitchFamily="34" charset="0"/>
+                <a:ea typeface="Pretendard" pitchFamily="34" charset="-122"/>
+                <a:cs typeface="Pretendard" pitchFamily="34" charset="-120"/>
               </a:rPr>
               <a:t>●  </a:t>
             </a:r>
@@ -2710,15 +2555,15 @@
               <a:buNone/>
             </a:pPr>
             <a:r>
-              <a:rPr lang="en-US" sz="1250" spc="100" kern="0" dirty="0">
+              <a:rPr lang="en-US" sz="1250" b="1" spc="100" kern="0" dirty="0">
                 <a:solidFill>
                   <a:srgbClr val="4F46E5"/>
                 </a:solidFill>
-                <a:latin typeface="Pretendard SemiBold" pitchFamily="34" charset="0"/>
-                <a:ea typeface="Pretendard SemiBold" pitchFamily="34" charset="-122"/>
-                <a:cs typeface="Pretendard SemiBold" pitchFamily="34" charset="-120"/>
-              </a:rPr>
-              <a:t>SOLUTION · 해결</a:t>
+                <a:latin typeface="Pretendard" pitchFamily="34" charset="0"/>
+                <a:ea typeface="Pretendard" pitchFamily="34" charset="-122"/>
+                <a:cs typeface="Pretendard" pitchFamily="34" charset="-120"/>
+              </a:rPr>
+              <a:t>HOW IT WORKS · 작동 방식</a:t>
             </a:r>
             <a:endParaRPr lang="en-US" sz="1100" dirty="0"/>
           </a:p>
@@ -2733,7 +2578,7 @@
         <p:spPr>
           <a:xfrm>
             <a:off x="3566160" y="914400"/>
-            <a:ext cx="8001000" cy="1234440"/>
+            <a:ext cx="8001000" cy="1371600"/>
           </a:xfrm>
           <a:prstGeom prst="rect">
             <a:avLst/>
@@ -2747,76 +2592,76 @@
           <a:p>
             <a:pPr algn="l" indent="0" marL="0">
               <a:lnSpc>
-                <a:spcPct val="105000"/>
+                <a:spcPct val="103000"/>
               </a:lnSpc>
               <a:buNone/>
             </a:pPr>
             <a:r>
-              <a:rPr lang="en-US" sz="2900" dirty="0">
+              <a:rPr lang="en-US" sz="3300" b="1" spc="-30" kern="0" dirty="0">
                 <a:solidFill>
                   <a:srgbClr val="1E293B"/>
                 </a:solidFill>
-                <a:latin typeface="Pretendard Black" pitchFamily="34" charset="0"/>
-                <a:ea typeface="Pretendard Black" pitchFamily="34" charset="-122"/>
-                <a:cs typeface="Pretendard Black" pitchFamily="34" charset="-120"/>
-              </a:rPr>
-              <a:t>학기 내내 쌓인 기록이,</a:t>
-            </a:r>
-            <a:endParaRPr lang="en-US" sz="2900" dirty="0"/>
+                <a:latin typeface="Pretendard" pitchFamily="34" charset="0"/>
+                <a:ea typeface="Pretendard" pitchFamily="34" charset="-122"/>
+                <a:cs typeface="Pretendard" pitchFamily="34" charset="-120"/>
+              </a:rPr>
+              <a:t>학기 중 쌓인 기록이,</a:t>
+            </a:r>
+            <a:endParaRPr lang="en-US" sz="3300" dirty="0"/>
           </a:p>
           <a:p>
             <a:pPr algn="l" indent="0" marL="0">
               <a:lnSpc>
-                <a:spcPct val="105000"/>
+                <a:spcPct val="103000"/>
               </a:lnSpc>
               <a:buNone/>
             </a:pPr>
             <a:r>
-              <a:rPr lang="en-US" sz="2900" dirty="0">
+              <a:rPr lang="en-US" sz="3300" b="1" spc="-30" kern="0" dirty="0">
                 <a:solidFill>
                   <a:srgbClr val="1E293B"/>
                 </a:solidFill>
-                <a:latin typeface="Pretendard Black" pitchFamily="34" charset="0"/>
-                <a:ea typeface="Pretendard Black" pitchFamily="34" charset="-122"/>
-                <a:cs typeface="Pretendard Black" pitchFamily="34" charset="-120"/>
-              </a:rPr>
-              <a:t>학기말 평가의 </a:t>
+                <a:latin typeface="Pretendard" pitchFamily="34" charset="0"/>
+                <a:ea typeface="Pretendard" pitchFamily="34" charset="-122"/>
+                <a:cs typeface="Pretendard" pitchFamily="34" charset="-120"/>
+              </a:rPr>
+              <a:t>평가의 </a:t>
             </a:r>
             <a:pPr algn="l" indent="0" marL="0">
               <a:lnSpc>
-                <a:spcPct val="105000"/>
+                <a:spcPct val="103000"/>
               </a:lnSpc>
               <a:buNone/>
             </a:pPr>
             <a:r>
-              <a:rPr lang="en-US" sz="2900" dirty="0">
+              <a:rPr lang="en-US" sz="3300" b="1" spc="-30" kern="0" dirty="0">
                 <a:solidFill>
                   <a:srgbClr val="4F46E5"/>
                 </a:solidFill>
-                <a:latin typeface="Pretendard Black" pitchFamily="34" charset="0"/>
-                <a:ea typeface="Pretendard Black" pitchFamily="34" charset="-122"/>
-                <a:cs typeface="Pretendard Black" pitchFamily="34" charset="-120"/>
+                <a:latin typeface="Pretendard" pitchFamily="34" charset="0"/>
+                <a:ea typeface="Pretendard" pitchFamily="34" charset="-122"/>
+                <a:cs typeface="Pretendard" pitchFamily="34" charset="-120"/>
               </a:rPr>
               <a:t>근거</a:t>
             </a:r>
             <a:pPr algn="l" indent="0" marL="0">
               <a:lnSpc>
-                <a:spcPct val="105000"/>
+                <a:spcPct val="103000"/>
               </a:lnSpc>
               <a:buNone/>
             </a:pPr>
             <a:r>
-              <a:rPr lang="en-US" sz="2900" dirty="0">
+              <a:rPr lang="en-US" sz="3300" b="1" spc="-30" kern="0" dirty="0">
                 <a:solidFill>
                   <a:srgbClr val="1E293B"/>
                 </a:solidFill>
-                <a:latin typeface="Pretendard Black" pitchFamily="34" charset="0"/>
-                <a:ea typeface="Pretendard Black" pitchFamily="34" charset="-122"/>
-                <a:cs typeface="Pretendard Black" pitchFamily="34" charset="-120"/>
-              </a:rPr>
-              <a:t>가 됩니다.</a:t>
-            </a:r>
-            <a:endParaRPr lang="en-US" sz="2900" dirty="0"/>
+                <a:latin typeface="Pretendard" pitchFamily="34" charset="0"/>
+                <a:ea typeface="Pretendard" pitchFamily="34" charset="-122"/>
+                <a:cs typeface="Pretendard" pitchFamily="34" charset="-120"/>
+              </a:rPr>
+              <a:t>가 됩니다</a:t>
+            </a:r>
+            <a:endParaRPr lang="en-US" sz="3300" dirty="0"/>
           </a:p>
         </p:txBody>
       </p:sp>
@@ -2845,17 +2690,17 @@
               <a:buNone/>
             </a:pPr>
             <a:r>
-              <a:rPr lang="en-US" sz="1700" dirty="0">
+              <a:rPr lang="en-US" sz="1500" b="1" dirty="0">
                 <a:solidFill>
                   <a:srgbClr val="4F46E5"/>
                 </a:solidFill>
-                <a:latin typeface="Pretendard SemiBold" pitchFamily="34" charset="0"/>
-                <a:ea typeface="Pretendard SemiBold" pitchFamily="34" charset="-122"/>
-                <a:cs typeface="Pretendard SemiBold" pitchFamily="34" charset="-120"/>
-              </a:rPr>
-              <a:t>감시가 아니라, 증명.</a:t>
-            </a:r>
-            <a:endParaRPr lang="en-US" sz="1700" dirty="0"/>
+                <a:latin typeface="Pretendard" pitchFamily="34" charset="0"/>
+                <a:ea typeface="Pretendard" pitchFamily="34" charset="-122"/>
+                <a:cs typeface="Pretendard" pitchFamily="34" charset="-120"/>
+              </a:rPr>
+              <a:t>학생 기록 → 동료평가 → AI 검증 → 교수 대시보드</a:t>
+            </a:r>
+            <a:endParaRPr lang="en-US" sz="1500" dirty="0"/>
           </a:p>
         </p:txBody>
       </p:sp>
@@ -2957,15 +2802,15 @@
               <a:buNone/>
             </a:pPr>
             <a:r>
-              <a:rPr lang="en-US" sz="1650" dirty="0">
+              <a:rPr lang="en-US" sz="1650" b="1" dirty="0">
                 <a:solidFill>
                   <a:srgbClr val="1E293B"/>
                 </a:solidFill>
-                <a:latin typeface="Pretendard SemiBold" pitchFamily="34" charset="0"/>
-                <a:ea typeface="Pretendard SemiBold" pitchFamily="34" charset="-122"/>
-                <a:cs typeface="Pretendard SemiBold" pitchFamily="34" charset="-120"/>
-              </a:rPr>
-              <a:t>학생 — 매일 한 일을 기록</a:t>
+                <a:latin typeface="Pretendard" pitchFamily="34" charset="0"/>
+                <a:ea typeface="Pretendard" pitchFamily="34" charset="-122"/>
+                <a:cs typeface="Pretendard" pitchFamily="34" charset="-120"/>
+              </a:rPr>
+              <a:t>학생이 활동을 기록합니다</a:t>
             </a:r>
             <a:endParaRPr lang="en-US" sz="1650" dirty="0"/>
           </a:p>
@@ -3004,7 +2849,7 @@
                 <a:ea typeface="Pretendard" pitchFamily="34" charset="-122"/>
                 <a:cs typeface="Pretendard" pitchFamily="34" charset="-120"/>
               </a:rPr>
-              <a:t>기여가 잔디·연속기록으로 쌓여요</a:t>
+              <a:t>무슨 일을 얼마나 했는지 — 잔디·연속기록으로 시각화</a:t>
             </a:r>
             <a:endParaRPr lang="en-US" sz="1250" dirty="0"/>
           </a:p>
@@ -3108,15 +2953,15 @@
               <a:buNone/>
             </a:pPr>
             <a:r>
-              <a:rPr lang="en-US" sz="1650" dirty="0">
+              <a:rPr lang="en-US" sz="1650" b="1" dirty="0">
                 <a:solidFill>
                   <a:srgbClr val="1E293B"/>
                 </a:solidFill>
-                <a:latin typeface="Pretendard SemiBold" pitchFamily="34" charset="0"/>
-                <a:ea typeface="Pretendard SemiBold" pitchFamily="34" charset="-122"/>
-                <a:cs typeface="Pretendard SemiBold" pitchFamily="34" charset="-120"/>
-              </a:rPr>
-              <a:t>팀 — 익명으로 서로 평가</a:t>
+                <a:latin typeface="Pretendard" pitchFamily="34" charset="0"/>
+                <a:ea typeface="Pretendard" pitchFamily="34" charset="-122"/>
+                <a:cs typeface="Pretendard" pitchFamily="34" charset="-120"/>
+              </a:rPr>
+              <a:t>팀원끼리 익명으로 평가합니다</a:t>
             </a:r>
             <a:endParaRPr lang="en-US" sz="1650" dirty="0"/>
           </a:p>
@@ -3155,7 +3000,7 @@
                 <a:ea typeface="Pretendard" pitchFamily="34" charset="-122"/>
                 <a:cs typeface="Pretendard" pitchFamily="34" charset="-120"/>
               </a:rPr>
-              <a:t>감정싸움 없이 솔직하게</a:t>
+              <a:t>기여도·책임감·협업·소통 4개 항목</a:t>
             </a:r>
             <a:endParaRPr lang="en-US" sz="1250" dirty="0"/>
           </a:p>
@@ -3259,15 +3104,15 @@
               <a:buNone/>
             </a:pPr>
             <a:r>
-              <a:rPr lang="en-US" sz="1650" dirty="0">
+              <a:rPr lang="en-US" sz="1650" b="1" dirty="0">
                 <a:solidFill>
                   <a:srgbClr val="1E293B"/>
                 </a:solidFill>
-                <a:latin typeface="Pretendard SemiBold" pitchFamily="34" charset="0"/>
-                <a:ea typeface="Pretendard SemiBold" pitchFamily="34" charset="-122"/>
-                <a:cs typeface="Pretendard SemiBold" pitchFamily="34" charset="-120"/>
-              </a:rPr>
-              <a:t>AI — 두 근거를 교차검증</a:t>
+                <a:latin typeface="Pretendard" pitchFamily="34" charset="0"/>
+                <a:ea typeface="Pretendard" pitchFamily="34" charset="-122"/>
+                <a:cs typeface="Pretendard" pitchFamily="34" charset="-120"/>
+              </a:rPr>
+              <a:t>AI가 교차검증해 리포트를 만듭니다</a:t>
             </a:r>
             <a:endParaRPr lang="en-US" sz="1650" dirty="0"/>
           </a:p>
@@ -3306,7 +3151,7 @@
                 <a:ea typeface="Pretendard" pitchFamily="34" charset="-122"/>
                 <a:cs typeface="Pretendard" pitchFamily="34" charset="-120"/>
               </a:rPr>
-              <a:t>본인 기록 vs 동료평가 대조</a:t>
+              <a:t>본인 기록과 동료평가를 대조해 근거 문서 생성</a:t>
             </a:r>
             <a:endParaRPr lang="en-US" sz="1250" dirty="0"/>
           </a:p>
@@ -3359,15 +3204,15 @@
               <a:buNone/>
             </a:pPr>
             <a:r>
-              <a:rPr lang="en-US" sz="1450" dirty="0">
+              <a:rPr lang="en-US" sz="1450" b="1" dirty="0">
                 <a:solidFill>
                   <a:srgbClr val="FFFFFF"/>
                 </a:solidFill>
-                <a:latin typeface="Pretendard SemiBold" pitchFamily="34" charset="0"/>
-                <a:ea typeface="Pretendard SemiBold" pitchFamily="34" charset="-122"/>
-                <a:cs typeface="Pretendard SemiBold" pitchFamily="34" charset="-120"/>
-              </a:rPr>
-              <a:t>공정한 평가의 '근거'가 완성됩니다</a:t>
+                <a:latin typeface="Pretendard" pitchFamily="34" charset="0"/>
+                <a:ea typeface="Pretendard" pitchFamily="34" charset="-122"/>
+                <a:cs typeface="Pretendard" pitchFamily="34" charset="-120"/>
+              </a:rPr>
+              <a:t>정리된 근거가 교수님 대시보드에 표시됩니다</a:t>
             </a:r>
             <a:endParaRPr lang="en-US" sz="1450" dirty="0"/>
           </a:p>
@@ -3435,7 +3280,7 @@
         <p:spPr>
           <a:xfrm>
             <a:off x="548640" y="6528816"/>
-            <a:ext cx="6400800" cy="256032"/>
+            <a:ext cx="7315200" cy="256032"/>
           </a:xfrm>
           <a:prstGeom prst="rect">
             <a:avLst/>
@@ -3459,7 +3304,7 @@
                 <a:ea typeface="Pretendard" pitchFamily="34" charset="-122"/>
                 <a:cs typeface="Pretendard" pitchFamily="34" charset="-120"/>
               </a:rPr>
-              <a:t>N분의1  ·  팀 프로젝트 기여도 증명 플랫폼</a:t>
+              <a:t>N분의1  ·  팀 프로젝트 기여도 증명·관리 플랫폼</a:t>
             </a:r>
             <a:endParaRPr lang="en-US" sz="900" dirty="0"/>
           </a:p>
@@ -3545,7 +3390,7 @@
         <p:spPr>
           <a:xfrm>
             <a:off x="3566160" y="566928"/>
-            <a:ext cx="7315200" cy="310896"/>
+            <a:ext cx="8229600" cy="310896"/>
           </a:xfrm>
           <a:prstGeom prst="rect">
             <a:avLst/>
@@ -3561,13 +3406,13 @@
               <a:buNone/>
             </a:pPr>
             <a:r>
-              <a:rPr lang="en-US" sz="1100" dirty="0">
+              <a:rPr lang="en-US" sz="1100" b="1" dirty="0">
                 <a:solidFill>
                   <a:srgbClr val="4F46E5"/>
                 </a:solidFill>
-                <a:latin typeface="Pretendard SemiBold" pitchFamily="34" charset="0"/>
-                <a:ea typeface="Pretendard SemiBold" pitchFamily="34" charset="-122"/>
-                <a:cs typeface="Pretendard SemiBold" pitchFamily="34" charset="-120"/>
+                <a:latin typeface="Pretendard" pitchFamily="34" charset="0"/>
+                <a:ea typeface="Pretendard" pitchFamily="34" charset="-122"/>
+                <a:cs typeface="Pretendard" pitchFamily="34" charset="-120"/>
               </a:rPr>
               <a:t>●  </a:t>
             </a:r>
@@ -3575,15 +3420,15 @@
               <a:buNone/>
             </a:pPr>
             <a:r>
-              <a:rPr lang="en-US" sz="1250" spc="100" kern="0" dirty="0">
+              <a:rPr lang="en-US" sz="1250" b="1" spc="100" kern="0" dirty="0">
                 <a:solidFill>
                   <a:srgbClr val="4F46E5"/>
                 </a:solidFill>
-                <a:latin typeface="Pretendard SemiBold" pitchFamily="34" charset="0"/>
-                <a:ea typeface="Pretendard SemiBold" pitchFamily="34" charset="-122"/>
-                <a:cs typeface="Pretendard SemiBold" pitchFamily="34" charset="-120"/>
-              </a:rPr>
-              <a:t>KEY FEATURE · 핵심 기능</a:t>
+                <a:latin typeface="Pretendard" pitchFamily="34" charset="0"/>
+                <a:ea typeface="Pretendard" pitchFamily="34" charset="-122"/>
+                <a:cs typeface="Pretendard" pitchFamily="34" charset="-120"/>
+              </a:rPr>
+              <a:t>FEATURES · 주요 기능</a:t>
             </a:r>
             <a:endParaRPr lang="en-US" sz="1100" dirty="0"/>
           </a:p>
@@ -3598,7 +3443,7 @@
         <p:spPr>
           <a:xfrm>
             <a:off x="3566160" y="914400"/>
-            <a:ext cx="8001000" cy="1234440"/>
+            <a:ext cx="8001000" cy="1371600"/>
           </a:xfrm>
           <a:prstGeom prst="rect">
             <a:avLst/>
@@ -3612,115 +3457,76 @@
           <a:p>
             <a:pPr algn="l" indent="0" marL="0">
               <a:lnSpc>
-                <a:spcPct val="105000"/>
+                <a:spcPct val="103000"/>
               </a:lnSpc>
               <a:buNone/>
             </a:pPr>
             <a:r>
-              <a:rPr lang="en-US" sz="2900" dirty="0">
+              <a:rPr lang="en-US" sz="3200" b="1" spc="-30" kern="0" dirty="0">
                 <a:solidFill>
                   <a:srgbClr val="1E293B"/>
                 </a:solidFill>
-                <a:latin typeface="Pretendard Black" pitchFamily="34" charset="0"/>
-                <a:ea typeface="Pretendard Black" pitchFamily="34" charset="-122"/>
-                <a:cs typeface="Pretendard Black" pitchFamily="34" charset="-120"/>
-              </a:rPr>
-              <a:t>무임승차를 앱이 먼저 찾아,</a:t>
-            </a:r>
-            <a:endParaRPr lang="en-US" sz="2900" dirty="0"/>
+                <a:latin typeface="Pretendard" pitchFamily="34" charset="0"/>
+                <a:ea typeface="Pretendard" pitchFamily="34" charset="-122"/>
+                <a:cs typeface="Pretendard" pitchFamily="34" charset="-120"/>
+              </a:rPr>
+              <a:t>학생의 기록부터</a:t>
+            </a:r>
+            <a:endParaRPr lang="en-US" sz="3200" dirty="0"/>
           </a:p>
           <a:p>
             <a:pPr algn="l" indent="0" marL="0">
               <a:lnSpc>
-                <a:spcPct val="105000"/>
+                <a:spcPct val="103000"/>
               </a:lnSpc>
               <a:buNone/>
             </a:pPr>
             <a:r>
-              <a:rPr lang="en-US" sz="2900" dirty="0">
-                <a:solidFill>
-                  <a:srgbClr val="DC2626"/>
-                </a:solidFill>
-                <a:latin typeface="Pretendard Black" pitchFamily="34" charset="0"/>
-                <a:ea typeface="Pretendard Black" pitchFamily="34" charset="-122"/>
-                <a:cs typeface="Pretendard Black" pitchFamily="34" charset="-120"/>
-              </a:rPr>
-              <a:t>빨간 카드</a:t>
+              <a:rPr lang="en-US" sz="3200" b="1" spc="-30" kern="0" dirty="0">
+                <a:solidFill>
+                  <a:srgbClr val="4F46E5"/>
+                </a:solidFill>
+                <a:latin typeface="Pretendard" pitchFamily="34" charset="0"/>
+                <a:ea typeface="Pretendard" pitchFamily="34" charset="-122"/>
+                <a:cs typeface="Pretendard" pitchFamily="34" charset="-120"/>
+              </a:rPr>
+              <a:t>교수의 평가까지</a:t>
             </a:r>
             <a:pPr algn="l" indent="0" marL="0">
               <a:lnSpc>
-                <a:spcPct val="105000"/>
+                <a:spcPct val="103000"/>
               </a:lnSpc>
               <a:buNone/>
             </a:pPr>
             <a:r>
-              <a:rPr lang="en-US" sz="2900" dirty="0">
+              <a:rPr lang="en-US" sz="3200" b="1" spc="-30" kern="0" dirty="0">
                 <a:solidFill>
                   <a:srgbClr val="1E293B"/>
                 </a:solidFill>
-                <a:latin typeface="Pretendard Black" pitchFamily="34" charset="0"/>
-                <a:ea typeface="Pretendard Black" pitchFamily="34" charset="-122"/>
-                <a:cs typeface="Pretendard Black" pitchFamily="34" charset="-120"/>
-              </a:rPr>
-              <a:t>로 알립니다.</a:t>
-            </a:r>
-            <a:endParaRPr lang="en-US" sz="2900" dirty="0"/>
-          </a:p>
-        </p:txBody>
-      </p:sp>
-      <p:sp>
-        <p:nvSpPr>
-          <p:cNvPr id="4" name="Text 2"/>
-          <p:cNvSpPr/>
-          <p:nvPr/>
-        </p:nvSpPr>
-        <p:spPr>
-          <a:xfrm>
-            <a:off x="3566160" y="2212848"/>
-            <a:ext cx="8001000" cy="457200"/>
-          </a:xfrm>
-          <a:prstGeom prst="rect">
-            <a:avLst/>
-          </a:prstGeom>
-          <a:noFill/>
-          <a:ln/>
-        </p:spPr>
-        <p:txBody>
-          <a:bodyPr wrap="square" lIns="0" tIns="0" rIns="0" bIns="0" rtlCol="0" anchor="ctr"/>
-          <a:lstStyle/>
-          <a:p>
-            <a:pPr indent="0" marL="0">
-              <a:buNone/>
-            </a:pPr>
-            <a:r>
-              <a:rPr lang="en-US" sz="1700" dirty="0">
-                <a:solidFill>
-                  <a:srgbClr val="4F46E5"/>
-                </a:solidFill>
-                <a:latin typeface="Pretendard SemiBold" pitchFamily="34" charset="0"/>
-                <a:ea typeface="Pretendard SemiBold" pitchFamily="34" charset="-122"/>
-                <a:cs typeface="Pretendard SemiBold" pitchFamily="34" charset="-120"/>
-              </a:rPr>
-              <a:t>교차검증 플래그</a:t>
-            </a:r>
-            <a:endParaRPr lang="en-US" sz="1700" dirty="0"/>
-          </a:p>
-        </p:txBody>
-      </p:sp>
-      <p:sp>
-        <p:nvSpPr>
-          <p:cNvPr id="5" name="Shape 3"/>
-          <p:cNvSpPr/>
-          <p:nvPr/>
-        </p:nvSpPr>
-        <p:spPr>
-          <a:xfrm>
-            <a:off x="3566160" y="2743200"/>
-            <a:ext cx="8001000" cy="914400"/>
+                <a:latin typeface="Pretendard" pitchFamily="34" charset="0"/>
+                <a:ea typeface="Pretendard" pitchFamily="34" charset="-122"/>
+                <a:cs typeface="Pretendard" pitchFamily="34" charset="-120"/>
+              </a:rPr>
+              <a:t>, 한 앱에서</a:t>
+            </a:r>
+            <a:endParaRPr lang="en-US" sz="3200" dirty="0"/>
+          </a:p>
+        </p:txBody>
+      </p:sp>
+      <p:sp>
+        <p:nvSpPr>
+          <p:cNvPr id="4" name="Shape 2"/>
+          <p:cNvSpPr/>
+          <p:nvPr/>
+        </p:nvSpPr>
+        <p:spPr>
+          <a:xfrm>
+            <a:off x="3566160" y="2286000"/>
+            <a:ext cx="8001000" cy="1700784"/>
           </a:xfrm>
           <a:prstGeom prst="roundRect">
             <a:avLst>
-              <a:gd name="adj" fmla="val 10000"/>
+              <a:gd name="adj" fmla="val 5376"/>
             </a:avLst>
           </a:prstGeom>
           <a:solidFill>
@@ -3738,27 +3544,27 @@
       </p:sp>
       <p:sp>
         <p:nvSpPr>
-          <p:cNvPr id="6" name="Shape 4"/>
-          <p:cNvSpPr/>
-          <p:nvPr/>
-        </p:nvSpPr>
-        <p:spPr>
-          <a:xfrm>
-            <a:off x="3803904" y="2926080"/>
-            <a:ext cx="548640" cy="548640"/>
+          <p:cNvPr id="5" name="Shape 3"/>
+          <p:cNvSpPr/>
+          <p:nvPr/>
+        </p:nvSpPr>
+        <p:spPr>
+          <a:xfrm>
+            <a:off x="3822192" y="2523744"/>
+            <a:ext cx="512064" cy="512064"/>
           </a:xfrm>
           <a:prstGeom prst="ellipse">
             <a:avLst/>
           </a:prstGeom>
           <a:solidFill>
-            <a:srgbClr val="FEE2E2"/>
+            <a:srgbClr val="EEF0FF"/>
           </a:solidFill>
           <a:ln/>
         </p:spPr>
       </p:sp>
       <p:pic>
         <p:nvPicPr>
-          <p:cNvPr id="7" name="Image 0" descr="preencoded.png">    </p:cNvPr>
+          <p:cNvPr id="6" name="Image 0" descr="preencoded.png">    </p:cNvPr>
           <p:cNvPicPr>
             <a:picLocks noChangeAspect="1"/>
           </p:cNvPicPr>
@@ -3772,8 +3578,8 @@
         </p:blipFill>
         <p:spPr>
           <a:xfrm>
-            <a:off x="3941064" y="3063240"/>
-            <a:ext cx="274320" cy="274320"/>
+            <a:off x="3950208" y="2651760"/>
+            <a:ext cx="256032" cy="256032"/>
           </a:xfrm>
           <a:prstGeom prst="rect">
             <a:avLst/>
@@ -3782,69 +3588,73 @@
       </p:pic>
       <p:sp>
         <p:nvSpPr>
+          <p:cNvPr id="7" name="Text 4"/>
+          <p:cNvSpPr/>
+          <p:nvPr/>
+        </p:nvSpPr>
+        <p:spPr>
+          <a:xfrm>
+            <a:off x="4535424" y="2487168"/>
+            <a:ext cx="6720840" cy="457200"/>
+          </a:xfrm>
+          <a:prstGeom prst="rect">
+            <a:avLst/>
+          </a:prstGeom>
+          <a:noFill/>
+          <a:ln/>
+        </p:spPr>
+        <p:txBody>
+          <a:bodyPr wrap="square" lIns="0" tIns="0" rIns="0" bIns="0" rtlCol="0" anchor="ctr"/>
+          <a:lstStyle/>
+          <a:p>
+            <a:pPr indent="0" marL="0">
+              <a:buNone/>
+            </a:pPr>
+            <a:r>
+              <a:rPr lang="en-US" sz="1600" b="1" dirty="0">
+                <a:solidFill>
+                  <a:srgbClr val="1E293B"/>
+                </a:solidFill>
+                <a:latin typeface="Pretendard" pitchFamily="34" charset="0"/>
+                <a:ea typeface="Pretendard" pitchFamily="34" charset="-122"/>
+                <a:cs typeface="Pretendard" pitchFamily="34" charset="-120"/>
+              </a:rPr>
+              <a:t>학생 화면</a:t>
+            </a:r>
+            <a:endParaRPr lang="en-US" sz="1600" dirty="0"/>
+          </a:p>
+        </p:txBody>
+      </p:sp>
+      <p:sp>
+        <p:nvSpPr>
           <p:cNvPr id="8" name="Text 5"/>
           <p:cNvSpPr/>
           <p:nvPr/>
         </p:nvSpPr>
         <p:spPr>
           <a:xfrm>
-            <a:off x="4626864" y="2871216"/>
-            <a:ext cx="6665976" cy="438912"/>
-          </a:xfrm>
-          <a:prstGeom prst="rect">
-            <a:avLst/>
-          </a:prstGeom>
-          <a:noFill/>
-          <a:ln/>
-        </p:spPr>
-        <p:txBody>
-          <a:bodyPr wrap="square" lIns="0" tIns="0" rIns="0" bIns="0" rtlCol="0" anchor="ctr"/>
-          <a:lstStyle/>
-          <a:p>
-            <a:pPr indent="0" marL="0">
-              <a:buNone/>
-            </a:pPr>
-            <a:r>
-              <a:rPr lang="en-US" sz="1650" dirty="0">
-                <a:solidFill>
-                  <a:srgbClr val="1E293B"/>
-                </a:solidFill>
-                <a:latin typeface="Pretendard SemiBold" pitchFamily="34" charset="0"/>
-                <a:ea typeface="Pretendard SemiBold" pitchFamily="34" charset="-122"/>
-                <a:cs typeface="Pretendard SemiBold" pitchFamily="34" charset="-120"/>
-              </a:rPr>
-              <a:t>참여 저조 → 무임승차 의심</a:t>
-            </a:r>
-            <a:endParaRPr lang="en-US" sz="1650" dirty="0"/>
-          </a:p>
-        </p:txBody>
-      </p:sp>
-      <p:sp>
-        <p:nvSpPr>
-          <p:cNvPr id="9" name="Text 6"/>
-          <p:cNvSpPr/>
-          <p:nvPr/>
-        </p:nvSpPr>
-        <p:spPr>
-          <a:xfrm>
-            <a:off x="4626864" y="3108960"/>
-            <a:ext cx="6665976" cy="402336"/>
-          </a:xfrm>
-          <a:prstGeom prst="rect">
-            <a:avLst/>
-          </a:prstGeom>
-          <a:noFill/>
-          <a:ln/>
-        </p:spPr>
-        <p:txBody>
-          <a:bodyPr wrap="square" lIns="0" tIns="0" rIns="0" bIns="0" rtlCol="0" anchor="ctr"/>
-          <a:lstStyle/>
-          <a:p>
-            <a:pPr indent="0" marL="0">
-              <a:buNone/>
-            </a:pPr>
-            <a:r>
-              <a:rPr lang="en-US" sz="1250" dirty="0">
+            <a:off x="3886200" y="3072384"/>
+            <a:ext cx="7360920" cy="786384"/>
+          </a:xfrm>
+          <a:prstGeom prst="rect">
+            <a:avLst/>
+          </a:prstGeom>
+          <a:noFill/>
+          <a:ln/>
+        </p:spPr>
+        <p:txBody>
+          <a:bodyPr wrap="square" lIns="0" tIns="0" rIns="0" bIns="0" rtlCol="0" anchor="t"/>
+          <a:lstStyle/>
+          <a:p>
+            <a:pPr marL="177800" indent="-177800">
+              <a:spcAft>
+                <a:spcPts val="400"/>
+              </a:spcAft>
+              <a:buSzPct val="100000"/>
+              <a:buChar char="•"/>
+            </a:pPr>
+            <a:r>
+              <a:rPr lang="en-US" sz="1300" dirty="0">
                 <a:solidFill>
                   <a:srgbClr val="64748B"/>
                 </a:solidFill>
@@ -3852,26 +3662,47 @@
                 <a:ea typeface="Pretendard" pitchFamily="34" charset="-122"/>
                 <a:cs typeface="Pretendard" pitchFamily="34" charset="-120"/>
               </a:rPr>
-              <a:t>기록·평가가 모두 낮은 팀원 자동 감지</a:t>
-            </a:r>
-            <a:endParaRPr lang="en-US" sz="1250" dirty="0"/>
-          </a:p>
-        </p:txBody>
-      </p:sp>
-      <p:sp>
-        <p:nvSpPr>
-          <p:cNvPr id="10" name="Shape 7"/>
-          <p:cNvSpPr/>
-          <p:nvPr/>
-        </p:nvSpPr>
-        <p:spPr>
-          <a:xfrm>
-            <a:off x="3566160" y="3840480"/>
-            <a:ext cx="8001000" cy="914400"/>
+              <a:t>활동 기록 — 기여 잔디·연속기록으로 시각화</a:t>
+            </a:r>
+            <a:endParaRPr lang="en-US" sz="1300" dirty="0"/>
+          </a:p>
+          <a:p>
+            <a:pPr marL="177800" indent="-177800">
+              <a:spcAft>
+                <a:spcPts val="400"/>
+              </a:spcAft>
+              <a:buSzPct val="100000"/>
+              <a:buChar char="•"/>
+            </a:pPr>
+            <a:r>
+              <a:rPr lang="en-US" sz="1300" dirty="0">
+                <a:solidFill>
+                  <a:srgbClr val="64748B"/>
+                </a:solidFill>
+                <a:latin typeface="Pretendard" pitchFamily="34" charset="0"/>
+                <a:ea typeface="Pretendard" pitchFamily="34" charset="-122"/>
+                <a:cs typeface="Pretendard" pitchFamily="34" charset="-120"/>
+              </a:rPr>
+              <a:t>익명 동료평가 · 산출물(발표자료·코드) 업로드</a:t>
+            </a:r>
+            <a:endParaRPr lang="en-US" sz="1300" dirty="0"/>
+          </a:p>
+        </p:txBody>
+      </p:sp>
+      <p:sp>
+        <p:nvSpPr>
+          <p:cNvPr id="9" name="Shape 6"/>
+          <p:cNvSpPr/>
+          <p:nvPr/>
+        </p:nvSpPr>
+        <p:spPr>
+          <a:xfrm>
+            <a:off x="3566160" y="4114800"/>
+            <a:ext cx="8001000" cy="2121408"/>
           </a:xfrm>
           <a:prstGeom prst="roundRect">
             <a:avLst>
-              <a:gd name="adj" fmla="val 10000"/>
+              <a:gd name="adj" fmla="val 4310"/>
             </a:avLst>
           </a:prstGeom>
           <a:solidFill>
@@ -3889,27 +3720,27 @@
       </p:sp>
       <p:sp>
         <p:nvSpPr>
-          <p:cNvPr id="11" name="Shape 8"/>
-          <p:cNvSpPr/>
-          <p:nvPr/>
-        </p:nvSpPr>
-        <p:spPr>
-          <a:xfrm>
-            <a:off x="3803904" y="4023360"/>
-            <a:ext cx="548640" cy="548640"/>
+          <p:cNvPr id="10" name="Shape 7"/>
+          <p:cNvSpPr/>
+          <p:nvPr/>
+        </p:nvSpPr>
+        <p:spPr>
+          <a:xfrm>
+            <a:off x="3822192" y="4352544"/>
+            <a:ext cx="512064" cy="512064"/>
           </a:xfrm>
           <a:prstGeom prst="ellipse">
             <a:avLst/>
           </a:prstGeom>
           <a:solidFill>
-            <a:srgbClr val="FEF3C7"/>
+            <a:srgbClr val="EEF0FF"/>
           </a:solidFill>
           <a:ln/>
         </p:spPr>
       </p:sp>
       <p:pic>
         <p:nvPicPr>
-          <p:cNvPr id="12" name="Image 1" descr="preencoded.png">    </p:cNvPr>
+          <p:cNvPr id="11" name="Image 1" descr="preencoded.png">    </p:cNvPr>
           <p:cNvPicPr>
             <a:picLocks noChangeAspect="1"/>
           </p:cNvPicPr>
@@ -3923,8 +3754,8 @@
         </p:blipFill>
         <p:spPr>
           <a:xfrm>
-            <a:off x="3941064" y="4160520"/>
-            <a:ext cx="274320" cy="274320"/>
+            <a:off x="3950208" y="4480560"/>
+            <a:ext cx="256032" cy="256032"/>
           </a:xfrm>
           <a:prstGeom prst="rect">
             <a:avLst/>
@@ -3933,69 +3764,73 @@
       </p:pic>
       <p:sp>
         <p:nvSpPr>
+          <p:cNvPr id="12" name="Text 8"/>
+          <p:cNvSpPr/>
+          <p:nvPr/>
+        </p:nvSpPr>
+        <p:spPr>
+          <a:xfrm>
+            <a:off x="4535424" y="4315968"/>
+            <a:ext cx="6720840" cy="457200"/>
+          </a:xfrm>
+          <a:prstGeom prst="rect">
+            <a:avLst/>
+          </a:prstGeom>
+          <a:noFill/>
+          <a:ln/>
+        </p:spPr>
+        <p:txBody>
+          <a:bodyPr wrap="square" lIns="0" tIns="0" rIns="0" bIns="0" rtlCol="0" anchor="ctr"/>
+          <a:lstStyle/>
+          <a:p>
+            <a:pPr indent="0" marL="0">
+              <a:buNone/>
+            </a:pPr>
+            <a:r>
+              <a:rPr lang="en-US" sz="1600" b="1" dirty="0">
+                <a:solidFill>
+                  <a:srgbClr val="1E293B"/>
+                </a:solidFill>
+                <a:latin typeface="Pretendard" pitchFamily="34" charset="0"/>
+                <a:ea typeface="Pretendard" pitchFamily="34" charset="-122"/>
+                <a:cs typeface="Pretendard" pitchFamily="34" charset="-120"/>
+              </a:rPr>
+              <a:t>교수 화면</a:t>
+            </a:r>
+            <a:endParaRPr lang="en-US" sz="1600" dirty="0"/>
+          </a:p>
+        </p:txBody>
+      </p:sp>
+      <p:sp>
+        <p:nvSpPr>
           <p:cNvPr id="13" name="Text 9"/>
           <p:cNvSpPr/>
           <p:nvPr/>
         </p:nvSpPr>
         <p:spPr>
           <a:xfrm>
-            <a:off x="4626864" y="3968496"/>
-            <a:ext cx="6665976" cy="438912"/>
-          </a:xfrm>
-          <a:prstGeom prst="rect">
-            <a:avLst/>
-          </a:prstGeom>
-          <a:noFill/>
-          <a:ln/>
-        </p:spPr>
-        <p:txBody>
-          <a:bodyPr wrap="square" lIns="0" tIns="0" rIns="0" bIns="0" rtlCol="0" anchor="ctr"/>
-          <a:lstStyle/>
-          <a:p>
-            <a:pPr indent="0" marL="0">
-              <a:buNone/>
-            </a:pPr>
-            <a:r>
-              <a:rPr lang="en-US" sz="1650" dirty="0">
-                <a:solidFill>
-                  <a:srgbClr val="1E293B"/>
-                </a:solidFill>
-                <a:latin typeface="Pretendard SemiBold" pitchFamily="34" charset="0"/>
-                <a:ea typeface="Pretendard SemiBold" pitchFamily="34" charset="-122"/>
-                <a:cs typeface="Pretendard SemiBold" pitchFamily="34" charset="-120"/>
-              </a:rPr>
-              <a:t>기록·평가 불일치</a:t>
-            </a:r>
-            <a:endParaRPr lang="en-US" sz="1650" dirty="0"/>
-          </a:p>
-        </p:txBody>
-      </p:sp>
-      <p:sp>
-        <p:nvSpPr>
-          <p:cNvPr id="14" name="Text 10"/>
-          <p:cNvSpPr/>
-          <p:nvPr/>
-        </p:nvSpPr>
-        <p:spPr>
-          <a:xfrm>
-            <a:off x="4626864" y="4206240"/>
-            <a:ext cx="6665976" cy="402336"/>
-          </a:xfrm>
-          <a:prstGeom prst="rect">
-            <a:avLst/>
-          </a:prstGeom>
-          <a:noFill/>
-          <a:ln/>
-        </p:spPr>
-        <p:txBody>
-          <a:bodyPr wrap="square" lIns="0" tIns="0" rIns="0" bIns="0" rtlCol="0" anchor="ctr"/>
-          <a:lstStyle/>
-          <a:p>
-            <a:pPr indent="0" marL="0">
-              <a:buNone/>
-            </a:pPr>
-            <a:r>
-              <a:rPr lang="en-US" sz="1250" dirty="0">
+            <a:off x="3886200" y="4901184"/>
+            <a:ext cx="7360920" cy="1207008"/>
+          </a:xfrm>
+          <a:prstGeom prst="rect">
+            <a:avLst/>
+          </a:prstGeom>
+          <a:noFill/>
+          <a:ln/>
+        </p:spPr>
+        <p:txBody>
+          <a:bodyPr wrap="square" lIns="0" tIns="0" rIns="0" bIns="0" rtlCol="0" anchor="t"/>
+          <a:lstStyle/>
+          <a:p>
+            <a:pPr marL="177800" indent="-177800">
+              <a:spcAft>
+                <a:spcPts val="400"/>
+              </a:spcAft>
+              <a:buSzPct val="100000"/>
+              <a:buChar char="•"/>
+            </a:pPr>
+            <a:r>
+              <a:rPr lang="en-US" sz="1300" dirty="0">
                 <a:solidFill>
                   <a:srgbClr val="64748B"/>
                 </a:solidFill>
@@ -4003,64 +3838,107 @@
                 <a:ea typeface="Pretendard" pitchFamily="34" charset="-122"/>
                 <a:cs typeface="Pretendard" pitchFamily="34" charset="-120"/>
               </a:rPr>
-              <a:t>기록은 많은데 평가가 낮은 경우 등</a:t>
-            </a:r>
-            <a:endParaRPr lang="en-US" sz="1250" dirty="0"/>
-          </a:p>
-        </p:txBody>
-      </p:sp>
-      <p:sp>
-        <p:nvSpPr>
-          <p:cNvPr id="15" name="Shape 11"/>
-          <p:cNvSpPr/>
-          <p:nvPr/>
-        </p:nvSpPr>
-        <p:spPr>
-          <a:xfrm>
-            <a:off x="3566160" y="4937760"/>
-            <a:ext cx="8001000" cy="914400"/>
+              <a:t>팀·개인별 기여도 대시보드 (차트로 한눈에)</a:t>
+            </a:r>
+            <a:endParaRPr lang="en-US" sz="1300" dirty="0"/>
+          </a:p>
+          <a:p>
+            <a:pPr marL="177800" indent="-177800">
+              <a:spcAft>
+                <a:spcPts val="400"/>
+              </a:spcAft>
+              <a:buSzPct val="100000"/>
+              <a:buChar char="•"/>
+            </a:pPr>
+            <a:r>
+              <a:rPr lang="en-US" sz="1300" dirty="0">
+                <a:solidFill>
+                  <a:srgbClr val="64748B"/>
+                </a:solidFill>
+                <a:latin typeface="Pretendard" pitchFamily="34" charset="0"/>
+                <a:ea typeface="Pretendard" pitchFamily="34" charset="-122"/>
+                <a:cs typeface="Pretendard" pitchFamily="34" charset="-120"/>
+              </a:rPr>
+              <a:t>교차검증 플래그 — 무임승차·불일치 자동 감지</a:t>
+            </a:r>
+            <a:endParaRPr lang="en-US" sz="1300" dirty="0"/>
+          </a:p>
+          <a:p>
+            <a:pPr marL="177800" indent="-177800">
+              <a:spcAft>
+                <a:spcPts val="400"/>
+              </a:spcAft>
+              <a:buSzPct val="100000"/>
+              <a:buChar char="•"/>
+            </a:pPr>
+            <a:r>
+              <a:rPr lang="en-US" sz="1300" dirty="0">
+                <a:solidFill>
+                  <a:srgbClr val="64748B"/>
+                </a:solidFill>
+                <a:latin typeface="Pretendard" pitchFamily="34" charset="0"/>
+                <a:ea typeface="Pretendard" pitchFamily="34" charset="-122"/>
+                <a:cs typeface="Pretendard" pitchFamily="34" charset="-120"/>
+              </a:rPr>
+              <a:t>AI 기여도 리포트 자동 생성 (성적 근거)</a:t>
+            </a:r>
+            <a:endParaRPr lang="en-US" sz="1300" dirty="0"/>
+          </a:p>
+          <a:p>
+            <a:pPr marL="177800" indent="-177800">
+              <a:spcAft>
+                <a:spcPts val="400"/>
+              </a:spcAft>
+              <a:buSzPct val="100000"/>
+              <a:buChar char="•"/>
+            </a:pPr>
+            <a:r>
+              <a:rPr lang="en-US" sz="1300" dirty="0">
+                <a:solidFill>
+                  <a:srgbClr val="64748B"/>
+                </a:solidFill>
+                <a:latin typeface="Pretendard" pitchFamily="34" charset="0"/>
+                <a:ea typeface="Pretendard" pitchFamily="34" charset="-122"/>
+                <a:cs typeface="Pretendard" pitchFamily="34" charset="-120"/>
+              </a:rPr>
+              <a:t>미니 LMS — 과목·마일스톤·제출 관리</a:t>
+            </a:r>
+            <a:endParaRPr lang="en-US" sz="1300" dirty="0"/>
+          </a:p>
+        </p:txBody>
+      </p:sp>
+      <p:sp>
+        <p:nvSpPr>
+          <p:cNvPr id="14" name="Shape 10"/>
+          <p:cNvSpPr/>
+          <p:nvPr/>
+        </p:nvSpPr>
+        <p:spPr>
+          <a:xfrm>
+            <a:off x="566928" y="502920"/>
+            <a:ext cx="2715672" cy="5806440"/>
           </a:xfrm>
           <a:prstGeom prst="roundRect">
             <a:avLst>
-              <a:gd name="adj" fmla="val 10000"/>
+              <a:gd name="adj" fmla="val 12795"/>
             </a:avLst>
           </a:prstGeom>
           <a:solidFill>
-            <a:srgbClr val="FFFFFF"/>
+            <a:srgbClr val="0B0B11"/>
           </a:solidFill>
           <a:ln/>
           <a:effectLst>
-            <a:outerShdw sx="100000" sy="100000" kx="0" ky="0" algn="bl" rotWithShape="0" blurRad="101600" dist="25400" dir="5400000">
+            <a:outerShdw sx="100000" sy="100000" kx="0" ky="0" algn="bl" rotWithShape="0" blurRad="165100" dist="63500" dir="5400000">
               <a:srgbClr val="000000">
-                <a:alpha val="10000"/>
+                <a:alpha val="28000"/>
               </a:srgbClr>
             </a:outerShdw>
           </a:effectLst>
         </p:spPr>
       </p:sp>
-      <p:sp>
-        <p:nvSpPr>
-          <p:cNvPr id="16" name="Shape 12"/>
-          <p:cNvSpPr/>
-          <p:nvPr/>
-        </p:nvSpPr>
-        <p:spPr>
-          <a:xfrm>
-            <a:off x="3803904" y="5120640"/>
-            <a:ext cx="548640" cy="548640"/>
-          </a:xfrm>
-          <a:prstGeom prst="ellipse">
-            <a:avLst/>
-          </a:prstGeom>
-          <a:solidFill>
-            <a:srgbClr val="EEF0FF"/>
-          </a:solidFill>
-          <a:ln/>
-        </p:spPr>
-      </p:sp>
       <p:pic>
         <p:nvPicPr>
-          <p:cNvPr id="17" name="Image 2" descr="preencoded.png">    </p:cNvPr>
+          <p:cNvPr id="15" name="Image 2" descr="C:/Users/HP15~1/AppData/Local/Temp/claude/C--Users-HP-15-Desktop-Hackathon/e11a162a-fd90-4cff-922b-c82073c29db3/scratchpad/deck/assets/dev_prof.png">    </p:cNvPr>
           <p:cNvPicPr>
             <a:picLocks noChangeAspect="1"/>
           </p:cNvPicPr>
@@ -4074,215 +3952,9 @@
         </p:blipFill>
         <p:spPr>
           <a:xfrm>
-            <a:off x="3941064" y="5257800"/>
-            <a:ext cx="274320" cy="274320"/>
-          </a:xfrm>
-          <a:prstGeom prst="rect">
-            <a:avLst/>
-          </a:prstGeom>
-        </p:spPr>
-      </p:pic>
-      <p:sp>
-        <p:nvSpPr>
-          <p:cNvPr id="18" name="Text 13"/>
-          <p:cNvSpPr/>
-          <p:nvPr/>
-        </p:nvSpPr>
-        <p:spPr>
-          <a:xfrm>
-            <a:off x="4626864" y="5065776"/>
-            <a:ext cx="6665976" cy="438912"/>
-          </a:xfrm>
-          <a:prstGeom prst="rect">
-            <a:avLst/>
-          </a:prstGeom>
-          <a:noFill/>
-          <a:ln/>
-        </p:spPr>
-        <p:txBody>
-          <a:bodyPr wrap="square" lIns="0" tIns="0" rIns="0" bIns="0" rtlCol="0" anchor="ctr"/>
-          <a:lstStyle/>
-          <a:p>
-            <a:pPr indent="0" marL="0">
-              <a:buNone/>
-            </a:pPr>
-            <a:r>
-              <a:rPr lang="en-US" sz="1650" dirty="0">
-                <a:solidFill>
-                  <a:srgbClr val="1E293B"/>
-                </a:solidFill>
-                <a:latin typeface="Pretendard SemiBold" pitchFamily="34" charset="0"/>
-                <a:ea typeface="Pretendard SemiBold" pitchFamily="34" charset="-122"/>
-                <a:cs typeface="Pretendard SemiBold" pitchFamily="34" charset="-120"/>
-              </a:rPr>
-              <a:t>AI 기여도 리포트</a:t>
-            </a:r>
-            <a:endParaRPr lang="en-US" sz="1650" dirty="0"/>
-          </a:p>
-        </p:txBody>
-      </p:sp>
-      <p:sp>
-        <p:nvSpPr>
-          <p:cNvPr id="19" name="Text 14"/>
-          <p:cNvSpPr/>
-          <p:nvPr/>
-        </p:nvSpPr>
-        <p:spPr>
-          <a:xfrm>
-            <a:off x="4626864" y="5303520"/>
-            <a:ext cx="6665976" cy="402336"/>
-          </a:xfrm>
-          <a:prstGeom prst="rect">
-            <a:avLst/>
-          </a:prstGeom>
-          <a:noFill/>
-          <a:ln/>
-        </p:spPr>
-        <p:txBody>
-          <a:bodyPr wrap="square" lIns="0" tIns="0" rIns="0" bIns="0" rtlCol="0" anchor="ctr"/>
-          <a:lstStyle/>
-          <a:p>
-            <a:pPr indent="0" marL="0">
-              <a:buNone/>
-            </a:pPr>
-            <a:r>
-              <a:rPr lang="en-US" sz="1250" dirty="0">
-                <a:solidFill>
-                  <a:srgbClr val="64748B"/>
-                </a:solidFill>
-                <a:latin typeface="Pretendard" pitchFamily="34" charset="0"/>
-                <a:ea typeface="Pretendard" pitchFamily="34" charset="-122"/>
-                <a:cs typeface="Pretendard" pitchFamily="34" charset="-120"/>
-              </a:rPr>
-              <a:t>팀별 근거 문서를 자동 생성</a:t>
-            </a:r>
-            <a:endParaRPr lang="en-US" sz="1250" dirty="0"/>
-          </a:p>
-        </p:txBody>
-      </p:sp>
-      <p:sp>
-        <p:nvSpPr>
-          <p:cNvPr id="20" name="Shape 15"/>
-          <p:cNvSpPr/>
-          <p:nvPr/>
-        </p:nvSpPr>
-        <p:spPr>
-          <a:xfrm>
-            <a:off x="3566160" y="6071616"/>
-            <a:ext cx="8001000" cy="475488"/>
-          </a:xfrm>
-          <a:prstGeom prst="roundRect">
-            <a:avLst>
-              <a:gd name="adj" fmla="val 19231"/>
-            </a:avLst>
-          </a:prstGeom>
-          <a:solidFill>
-            <a:srgbClr val="EEF2F7"/>
-          </a:solidFill>
-          <a:ln/>
-        </p:spPr>
-      </p:sp>
-      <p:sp>
-        <p:nvSpPr>
-          <p:cNvPr id="21" name="Text 16"/>
-          <p:cNvSpPr/>
-          <p:nvPr/>
-        </p:nvSpPr>
-        <p:spPr>
-          <a:xfrm>
-            <a:off x="3703320" y="6071616"/>
-            <a:ext cx="7726680" cy="475488"/>
-          </a:xfrm>
-          <a:prstGeom prst="rect">
-            <a:avLst/>
-          </a:prstGeom>
-          <a:noFill/>
-          <a:ln/>
-        </p:spPr>
-        <p:txBody>
-          <a:bodyPr wrap="square" lIns="0" tIns="0" rIns="0" bIns="0" rtlCol="0" anchor="ctr"/>
-          <a:lstStyle/>
-          <a:p>
-            <a:pPr indent="0" marL="0">
-              <a:buNone/>
-            </a:pPr>
-            <a:r>
-              <a:rPr lang="en-US" sz="1250" dirty="0">
-                <a:solidFill>
-                  <a:srgbClr val="1E293B"/>
-                </a:solidFill>
-                <a:latin typeface="Pretendard SemiBold" pitchFamily="34" charset="0"/>
-                <a:ea typeface="Pretendard SemiBold" pitchFamily="34" charset="-122"/>
-                <a:cs typeface="Pretendard SemiBold" pitchFamily="34" charset="-120"/>
-              </a:rPr>
-              <a:t>AI는 '판단'하지 않습니다.  </a:t>
-            </a:r>
-            <a:pPr indent="0" marL="0">
-              <a:buNone/>
-            </a:pPr>
-            <a:r>
-              <a:rPr lang="en-US" sz="1250" dirty="0">
-                <a:solidFill>
-                  <a:srgbClr val="64748B"/>
-                </a:solidFill>
-                <a:latin typeface="Pretendard" pitchFamily="34" charset="0"/>
-                <a:ea typeface="Pretendard" pitchFamily="34" charset="-122"/>
-                <a:cs typeface="Pretendard" pitchFamily="34" charset="-120"/>
-              </a:rPr>
-              <a:t>근거만 제시하고, 최종 결정은 교수님 몫입니다.</a:t>
-            </a:r>
-            <a:endParaRPr lang="en-US" sz="1250" dirty="0"/>
-          </a:p>
-        </p:txBody>
-      </p:sp>
-      <p:sp>
-        <p:nvSpPr>
-          <p:cNvPr id="22" name="Shape 17"/>
-          <p:cNvSpPr/>
-          <p:nvPr/>
-        </p:nvSpPr>
-        <p:spPr>
-          <a:xfrm>
             <a:off x="566928" y="502920"/>
             <a:ext cx="2715672" cy="5806440"/>
           </a:xfrm>
-          <a:prstGeom prst="roundRect">
-            <a:avLst>
-              <a:gd name="adj" fmla="val 12795"/>
-            </a:avLst>
-          </a:prstGeom>
-          <a:solidFill>
-            <a:srgbClr val="0B0B11"/>
-          </a:solidFill>
-          <a:ln/>
-          <a:effectLst>
-            <a:outerShdw sx="100000" sy="100000" kx="0" ky="0" algn="bl" rotWithShape="0" blurRad="165100" dist="63500" dir="5400000">
-              <a:srgbClr val="000000">
-                <a:alpha val="28000"/>
-              </a:srgbClr>
-            </a:outerShdw>
-          </a:effectLst>
-        </p:spPr>
-      </p:sp>
-      <p:pic>
-        <p:nvPicPr>
-          <p:cNvPr id="23" name="Image 3" descr="C:/Users/HP15~1/AppData/Local/Temp/claude/C--Users-HP-15-Desktop-Hackathon/e11a162a-fd90-4cff-922b-c82073c29db3/scratchpad/deck/assets/dev_prof.png">    </p:cNvPr>
-          <p:cNvPicPr>
-            <a:picLocks noChangeAspect="1"/>
-          </p:cNvPicPr>
-          <p:nvPr/>
-        </p:nvPicPr>
-        <p:blipFill>
-          <a:blip r:embed="rId4"/>
-          <a:stretch>
-            <a:fillRect/>
-          </a:stretch>
-        </p:blipFill>
-        <p:spPr>
-          <a:xfrm>
-            <a:off x="566928" y="502920"/>
-            <a:ext cx="2715672" cy="5806440"/>
-          </a:xfrm>
           <a:prstGeom prst="rect">
             <a:avLst/>
           </a:prstGeom>
@@ -4290,14 +3962,14 @@
       </p:pic>
       <p:sp>
         <p:nvSpPr>
-          <p:cNvPr id="24" name="Text 18"/>
+          <p:cNvPr id="16" name="Text 11"/>
           <p:cNvSpPr/>
           <p:nvPr/>
         </p:nvSpPr>
         <p:spPr>
           <a:xfrm>
             <a:off x="548640" y="6528816"/>
-            <a:ext cx="6400800" cy="256032"/>
+            <a:ext cx="7315200" cy="256032"/>
           </a:xfrm>
           <a:prstGeom prst="rect">
             <a:avLst/>
@@ -4321,7 +3993,7 @@
                 <a:ea typeface="Pretendard" pitchFamily="34" charset="-122"/>
                 <a:cs typeface="Pretendard" pitchFamily="34" charset="-120"/>
               </a:rPr>
-              <a:t>N분의1  ·  팀 프로젝트 기여도 증명 플랫폼</a:t>
+              <a:t>N분의1  ·  팀 프로젝트 기여도 증명·관리 플랫폼</a:t>
             </a:r>
             <a:endParaRPr lang="en-US" sz="900" dirty="0"/>
           </a:p>
@@ -4329,7 +4001,7 @@
       </p:sp>
       <p:sp>
         <p:nvSpPr>
-          <p:cNvPr id="25" name="Text 19"/>
+          <p:cNvPr id="17" name="Text 12"/>
           <p:cNvSpPr/>
           <p:nvPr/>
         </p:nvSpPr>
@@ -4414,7 +4086,7 @@
         <p:spPr>
           <a:xfrm>
             <a:off x="3566160" y="603504"/>
-            <a:ext cx="7315200" cy="310896"/>
+            <a:ext cx="8229600" cy="310896"/>
           </a:xfrm>
           <a:prstGeom prst="rect">
             <a:avLst/>
@@ -4430,13 +4102,13 @@
               <a:buNone/>
             </a:pPr>
             <a:r>
-              <a:rPr lang="en-US" sz="1100" dirty="0">
+              <a:rPr lang="en-US" sz="1100" b="1" dirty="0">
                 <a:solidFill>
                   <a:srgbClr val="C7D2FE"/>
                 </a:solidFill>
-                <a:latin typeface="Pretendard SemiBold" pitchFamily="34" charset="0"/>
-                <a:ea typeface="Pretendard SemiBold" pitchFamily="34" charset="-122"/>
-                <a:cs typeface="Pretendard SemiBold" pitchFamily="34" charset="-120"/>
+                <a:latin typeface="Pretendard" pitchFamily="34" charset="0"/>
+                <a:ea typeface="Pretendard" pitchFamily="34" charset="-122"/>
+                <a:cs typeface="Pretendard" pitchFamily="34" charset="-120"/>
               </a:rPr>
               <a:t>●  </a:t>
             </a:r>
@@ -4444,15 +4116,15 @@
               <a:buNone/>
             </a:pPr>
             <a:r>
-              <a:rPr lang="en-US" sz="1250" spc="100" kern="0" dirty="0">
+              <a:rPr lang="en-US" sz="1250" b="1" spc="100" kern="0" dirty="0">
                 <a:solidFill>
                   <a:srgbClr val="C7D2FE"/>
                 </a:solidFill>
-                <a:latin typeface="Pretendard SemiBold" pitchFamily="34" charset="0"/>
-                <a:ea typeface="Pretendard SemiBold" pitchFamily="34" charset="-122"/>
-                <a:cs typeface="Pretendard SemiBold" pitchFamily="34" charset="-120"/>
-              </a:rPr>
-              <a:t>IMPACT · 기대 효과</a:t>
+                <a:latin typeface="Pretendard" pitchFamily="34" charset="0"/>
+                <a:ea typeface="Pretendard" pitchFamily="34" charset="-122"/>
+                <a:cs typeface="Pretendard" pitchFamily="34" charset="-120"/>
+              </a:rPr>
+              <a:t>FOR PROFESSORS · 교수님께</a:t>
             </a:r>
             <a:endParaRPr lang="en-US" sz="1100" dirty="0"/>
           </a:p>
@@ -4481,57 +4153,57 @@
           <a:p>
             <a:pPr algn="l" indent="0" marL="0">
               <a:lnSpc>
-                <a:spcPct val="106000"/>
+                <a:spcPct val="103000"/>
               </a:lnSpc>
               <a:buNone/>
             </a:pPr>
             <a:r>
-              <a:rPr lang="en-US" sz="3300" dirty="0">
+              <a:rPr lang="en-US" sz="3300" b="1" spc="-30" kern="0" dirty="0">
                 <a:solidFill>
                   <a:srgbClr val="FFFFFF"/>
                 </a:solidFill>
-                <a:latin typeface="Pretendard Black" pitchFamily="34" charset="0"/>
-                <a:ea typeface="Pretendard Black" pitchFamily="34" charset="-122"/>
-                <a:cs typeface="Pretendard Black" pitchFamily="34" charset="-120"/>
-              </a:rPr>
-              <a:t>점수는 N분의 1,</a:t>
+                <a:latin typeface="Pretendard" pitchFamily="34" charset="0"/>
+                <a:ea typeface="Pretendard" pitchFamily="34" charset="-122"/>
+                <a:cs typeface="Pretendard" pitchFamily="34" charset="-120"/>
+              </a:rPr>
+              <a:t>근거를 바탕으로,</a:t>
             </a:r>
             <a:endParaRPr lang="en-US" sz="3300" dirty="0"/>
           </a:p>
           <a:p>
             <a:pPr algn="l" indent="0" marL="0">
               <a:lnSpc>
-                <a:spcPct val="106000"/>
+                <a:spcPct val="103000"/>
               </a:lnSpc>
               <a:buNone/>
             </a:pPr>
             <a:r>
-              <a:rPr lang="en-US" sz="3300" dirty="0">
-                <a:solidFill>
-                  <a:srgbClr val="FFFFFF"/>
-                </a:solidFill>
-                <a:latin typeface="Pretendard Black" pitchFamily="34" charset="0"/>
-                <a:ea typeface="Pretendard Black" pitchFamily="34" charset="-122"/>
-                <a:cs typeface="Pretendard Black" pitchFamily="34" charset="-120"/>
-              </a:rPr>
-              <a:t>이제 </a:t>
+              <a:rPr lang="en-US" sz="3300" b="1" spc="-30" kern="0" dirty="0">
+                <a:solidFill>
+                  <a:srgbClr val="FCD34D"/>
+                </a:solidFill>
+                <a:latin typeface="Pretendard" pitchFamily="34" charset="0"/>
+                <a:ea typeface="Pretendard" pitchFamily="34" charset="-122"/>
+                <a:cs typeface="Pretendard" pitchFamily="34" charset="-120"/>
+              </a:rPr>
+              <a:t>더 공정한 평가</a:t>
             </a:r>
             <a:pPr algn="l" indent="0" marL="0">
               <a:lnSpc>
-                <a:spcPct val="106000"/>
+                <a:spcPct val="103000"/>
               </a:lnSpc>
               <a:buNone/>
             </a:pPr>
             <a:r>
-              <a:rPr lang="en-US" sz="3300" dirty="0">
-                <a:solidFill>
-                  <a:srgbClr val="FCD34D"/>
-                </a:solidFill>
-                <a:latin typeface="Pretendard Black" pitchFamily="34" charset="0"/>
-                <a:ea typeface="Pretendard Black" pitchFamily="34" charset="-122"/>
-                <a:cs typeface="Pretendard Black" pitchFamily="34" charset="-120"/>
-              </a:rPr>
-              <a:t>딱 일한 만큼.</a:t>
+              <a:rPr lang="en-US" sz="3300" b="1" spc="-30" kern="0" dirty="0">
+                <a:solidFill>
+                  <a:srgbClr val="FFFFFF"/>
+                </a:solidFill>
+                <a:latin typeface="Pretendard" pitchFamily="34" charset="0"/>
+                <a:ea typeface="Pretendard" pitchFamily="34" charset="-122"/>
+                <a:cs typeface="Pretendard" pitchFamily="34" charset="-120"/>
+              </a:rPr>
+              <a:t>를</a:t>
             </a:r>
             <a:endParaRPr lang="en-US" sz="3300" dirty="0"/>
           </a:p>
@@ -4566,11 +4238,11 @@
                 <a:solidFill>
                   <a:srgbClr val="C7D2FE"/>
                 </a:solidFill>
-                <a:latin typeface="Pretendard Medium" pitchFamily="34" charset="0"/>
-                <a:ea typeface="Pretendard Medium" pitchFamily="34" charset="-122"/>
-                <a:cs typeface="Pretendard Medium" pitchFamily="34" charset="-120"/>
-              </a:rPr>
-              <a:t>일반 팀플에서 졸업작품까지 — 공정한 팀플의 시작</a:t>
+                <a:latin typeface="Pretendard" pitchFamily="34" charset="0"/>
+                <a:ea typeface="Pretendard" pitchFamily="34" charset="-122"/>
+                <a:cs typeface="Pretendard" pitchFamily="34" charset="-120"/>
+              </a:rPr>
+              <a:t>N분의1이 교수님께 드리는 것</a:t>
             </a:r>
             <a:endParaRPr lang="en-US" sz="1550" dirty="0"/>
           </a:p>
@@ -4651,7 +4323,7 @@
         <p:spPr>
           <a:xfrm>
             <a:off x="4553712" y="2880360"/>
-            <a:ext cx="1371600" cy="877824"/>
+            <a:ext cx="2468880" cy="877824"/>
           </a:xfrm>
           <a:prstGeom prst="rect">
             <a:avLst/>
@@ -4667,17 +4339,17 @@
               <a:buNone/>
             </a:pPr>
             <a:r>
-              <a:rPr lang="en-US" sz="1550" dirty="0">
+              <a:rPr lang="en-US" sz="1450" b="1" dirty="0">
                 <a:solidFill>
                   <a:srgbClr val="C7D2FE"/>
                 </a:solidFill>
-                <a:latin typeface="Pretendard SemiBold" pitchFamily="34" charset="0"/>
-                <a:ea typeface="Pretendard SemiBold" pitchFamily="34" charset="-122"/>
-                <a:cs typeface="Pretendard SemiBold" pitchFamily="34" charset="-120"/>
-              </a:rPr>
-              <a:t>학생</a:t>
-            </a:r>
-            <a:endParaRPr lang="en-US" sz="1550" dirty="0"/>
+                <a:latin typeface="Pretendard" pitchFamily="34" charset="0"/>
+                <a:ea typeface="Pretendard" pitchFamily="34" charset="-122"/>
+                <a:cs typeface="Pretendard" pitchFamily="34" charset="-120"/>
+              </a:rPr>
+              <a:t>기여도를 한눈에</a:t>
+            </a:r>
+            <a:endParaRPr lang="en-US" sz="1450" dirty="0"/>
           </a:p>
         </p:txBody>
       </p:sp>
@@ -4689,8 +4361,8 @@
         </p:nvSpPr>
         <p:spPr>
           <a:xfrm>
-            <a:off x="5852160" y="2880360"/>
-            <a:ext cx="5486400" cy="877824"/>
+            <a:off x="6766560" y="2880360"/>
+            <a:ext cx="4572000" cy="877824"/>
           </a:xfrm>
           <a:prstGeom prst="rect">
             <a:avLst/>
@@ -4706,17 +4378,17 @@
               <a:buNone/>
             </a:pPr>
             <a:r>
-              <a:rPr lang="en-US" sz="1500" dirty="0">
+              <a:rPr lang="en-US" sz="1350" dirty="0">
                 <a:solidFill>
                   <a:srgbClr val="FFFFFF"/>
                 </a:solidFill>
-                <a:latin typeface="Pretendard Medium" pitchFamily="34" charset="0"/>
-                <a:ea typeface="Pretendard Medium" pitchFamily="34" charset="-122"/>
-                <a:cs typeface="Pretendard Medium" pitchFamily="34" charset="-120"/>
-              </a:rPr>
-              <a:t>노력한 만큼 인정받습니다</a:t>
-            </a:r>
-            <a:endParaRPr lang="en-US" sz="1500" dirty="0"/>
+                <a:latin typeface="Pretendard" pitchFamily="34" charset="0"/>
+                <a:ea typeface="Pretendard" pitchFamily="34" charset="-122"/>
+                <a:cs typeface="Pretendard" pitchFamily="34" charset="-120"/>
+              </a:rPr>
+              <a:t>팀·개인별 근거와 함께 → 성적 부여 근거 확보</a:t>
+            </a:r>
+            <a:endParaRPr lang="en-US" sz="1350" dirty="0"/>
           </a:p>
         </p:txBody>
       </p:sp>
@@ -4795,7 +4467,7 @@
         <p:spPr>
           <a:xfrm>
             <a:off x="4553712" y="3941064"/>
-            <a:ext cx="1371600" cy="877824"/>
+            <a:ext cx="2468880" cy="877824"/>
           </a:xfrm>
           <a:prstGeom prst="rect">
             <a:avLst/>
@@ -4811,17 +4483,17 @@
               <a:buNone/>
             </a:pPr>
             <a:r>
-              <a:rPr lang="en-US" sz="1550" dirty="0">
+              <a:rPr lang="en-US" sz="1450" b="1" dirty="0">
                 <a:solidFill>
                   <a:srgbClr val="C7D2FE"/>
                 </a:solidFill>
-                <a:latin typeface="Pretendard SemiBold" pitchFamily="34" charset="0"/>
-                <a:ea typeface="Pretendard SemiBold" pitchFamily="34" charset="-122"/>
-                <a:cs typeface="Pretendard SemiBold" pitchFamily="34" charset="-120"/>
-              </a:rPr>
-              <a:t>교수님</a:t>
-            </a:r>
-            <a:endParaRPr lang="en-US" sz="1550" dirty="0"/>
+                <a:latin typeface="Pretendard" pitchFamily="34" charset="0"/>
+                <a:ea typeface="Pretendard" pitchFamily="34" charset="-122"/>
+                <a:cs typeface="Pretendard" pitchFamily="34" charset="-120"/>
+              </a:rPr>
+              <a:t>문제를 조기에</a:t>
+            </a:r>
+            <a:endParaRPr lang="en-US" sz="1450" dirty="0"/>
           </a:p>
         </p:txBody>
       </p:sp>
@@ -4833,8 +4505,8 @@
         </p:nvSpPr>
         <p:spPr>
           <a:xfrm>
-            <a:off x="5852160" y="3941064"/>
-            <a:ext cx="5486400" cy="877824"/>
+            <a:off x="6766560" y="3941064"/>
+            <a:ext cx="4572000" cy="877824"/>
           </a:xfrm>
           <a:prstGeom prst="rect">
             <a:avLst/>
@@ -4850,17 +4522,17 @@
               <a:buNone/>
             </a:pPr>
             <a:r>
-              <a:rPr lang="en-US" sz="1500" dirty="0">
+              <a:rPr lang="en-US" sz="1350" dirty="0">
                 <a:solidFill>
                   <a:srgbClr val="FFFFFF"/>
                 </a:solidFill>
-                <a:latin typeface="Pretendard Medium" pitchFamily="34" charset="0"/>
-                <a:ea typeface="Pretendard Medium" pitchFamily="34" charset="-122"/>
-                <a:cs typeface="Pretendard Medium" pitchFamily="34" charset="-120"/>
-              </a:rPr>
-              <a:t>이의제기에도 근거로 방어합니다</a:t>
-            </a:r>
-            <a:endParaRPr lang="en-US" sz="1500" dirty="0"/>
+                <a:latin typeface="Pretendard" pitchFamily="34" charset="0"/>
+                <a:ea typeface="Pretendard" pitchFamily="34" charset="-122"/>
+                <a:cs typeface="Pretendard" pitchFamily="34" charset="-120"/>
+              </a:rPr>
+              <a:t>무임승차·기록평가 불일치를 자동 감지</a:t>
+            </a:r>
+            <a:endParaRPr lang="en-US" sz="1350" dirty="0"/>
           </a:p>
         </p:txBody>
       </p:sp>
@@ -4939,7 +4611,7 @@
         <p:spPr>
           <a:xfrm>
             <a:off x="4553712" y="5001768"/>
-            <a:ext cx="1371600" cy="877824"/>
+            <a:ext cx="2468880" cy="877824"/>
           </a:xfrm>
           <a:prstGeom prst="rect">
             <a:avLst/>
@@ -4955,17 +4627,17 @@
               <a:buNone/>
             </a:pPr>
             <a:r>
-              <a:rPr lang="en-US" sz="1550" dirty="0">
+              <a:rPr lang="en-US" sz="1450" b="1" dirty="0">
                 <a:solidFill>
                   <a:srgbClr val="C7D2FE"/>
                 </a:solidFill>
-                <a:latin typeface="Pretendard SemiBold" pitchFamily="34" charset="0"/>
-                <a:ea typeface="Pretendard SemiBold" pitchFamily="34" charset="-122"/>
-                <a:cs typeface="Pretendard SemiBold" pitchFamily="34" charset="-120"/>
-              </a:rPr>
-              <a:t>확장</a:t>
-            </a:r>
-            <a:endParaRPr lang="en-US" sz="1550" dirty="0"/>
+                <a:latin typeface="Pretendard" pitchFamily="34" charset="0"/>
+                <a:ea typeface="Pretendard" pitchFamily="34" charset="-122"/>
+                <a:cs typeface="Pretendard" pitchFamily="34" charset="-120"/>
+              </a:rPr>
+              <a:t>일정까지 통합</a:t>
+            </a:r>
+            <a:endParaRPr lang="en-US" sz="1450" dirty="0"/>
           </a:p>
         </p:txBody>
       </p:sp>
@@ -4977,8 +4649,8 @@
         </p:nvSpPr>
         <p:spPr>
           <a:xfrm>
-            <a:off x="5852160" y="5001768"/>
-            <a:ext cx="5486400" cy="877824"/>
+            <a:off x="6766560" y="5001768"/>
+            <a:ext cx="4572000" cy="877824"/>
           </a:xfrm>
           <a:prstGeom prst="rect">
             <a:avLst/>
@@ -4994,17 +4666,17 @@
               <a:buNone/>
             </a:pPr>
             <a:r>
-              <a:rPr lang="en-US" sz="1500" dirty="0">
+              <a:rPr lang="en-US" sz="1350" dirty="0">
                 <a:solidFill>
                   <a:srgbClr val="FFFFFF"/>
                 </a:solidFill>
-                <a:latin typeface="Pretendard Medium" pitchFamily="34" charset="0"/>
-                <a:ea typeface="Pretendard Medium" pitchFamily="34" charset="-122"/>
-                <a:cs typeface="Pretendard Medium" pitchFamily="34" charset="-120"/>
-              </a:rPr>
-              <a:t>캡스톤 · 중간 · 기말 관리까지</a:t>
-            </a:r>
-            <a:endParaRPr lang="en-US" sz="1500" dirty="0"/>
+                <a:latin typeface="Pretendard" pitchFamily="34" charset="0"/>
+                <a:ea typeface="Pretendard" pitchFamily="34" charset="-122"/>
+                <a:cs typeface="Pretendard" pitchFamily="34" charset="-120"/>
+              </a:rPr>
+              <a:t>졸업작품 · 중간 · 기말 프로젝트 관리</a:t>
+            </a:r>
+            <a:endParaRPr lang="en-US" sz="1350" dirty="0"/>
           </a:p>
         </p:txBody>
       </p:sp>
@@ -5033,15 +4705,15 @@
               <a:buNone/>
             </a:pPr>
             <a:r>
-              <a:rPr lang="en-US" sz="1800" dirty="0">
+              <a:rPr lang="en-US" sz="1800" b="1" dirty="0">
                 <a:solidFill>
                   <a:srgbClr val="FFFFFF"/>
                 </a:solidFill>
-                <a:latin typeface="Pretendard ExtraBold" pitchFamily="34" charset="0"/>
-                <a:ea typeface="Pretendard ExtraBold" pitchFamily="34" charset="-122"/>
-                <a:cs typeface="Pretendard ExtraBold" pitchFamily="34" charset="-120"/>
-              </a:rPr>
-              <a:t>감시가 아닌 증명 — 무임승차의 종말.</a:t>
+                <a:latin typeface="Pretendard" pitchFamily="34" charset="0"/>
+                <a:ea typeface="Pretendard" pitchFamily="34" charset="-122"/>
+                <a:cs typeface="Pretendard" pitchFamily="34" charset="-120"/>
+              </a:rPr>
+              <a:t>감시가 아닌 증명 — N분의1</a:t>
             </a:r>
             <a:endParaRPr lang="en-US" sz="1800" dirty="0"/>
           </a:p>
@@ -5080,7 +4752,7 @@
         <p:spPr>
           <a:xfrm>
             <a:off x="548640" y="6528816"/>
-            <a:ext cx="6400800" cy="256032"/>
+            <a:ext cx="7315200" cy="256032"/>
           </a:xfrm>
           <a:prstGeom prst="rect">
             <a:avLst/>
@@ -5104,7 +4776,7 @@
                 <a:ea typeface="Pretendard" pitchFamily="34" charset="-122"/>
                 <a:cs typeface="Pretendard" pitchFamily="34" charset="-120"/>
               </a:rPr>
-              <a:t>N분의1  ·  팀 프로젝트 기여도 증명 플랫폼</a:t>
+              <a:t>N분의1  ·  팀 프로젝트 기여도 증명·관리 플랫폼</a:t>
             </a:r>
             <a:endParaRPr lang="en-US" sz="900" dirty="0"/>
           </a:p>

--- a/N분의1_발표자료.pptx
+++ b/N분의1_발표자료.pptx
@@ -506,7 +506,7 @@
           <a:p>
             <a:r>
               <a:rPr lang="en-US" dirty="0"/>
-              <a:t>안녕하세요. 저희가 만든 N분의1은 팀 프로젝트의 기여도를 기록하고, 그 근거로 평가하는 안드로이드 앱입니다. 학생은 학기 내내 자신이 한 일을 남기고, 교수님은 결과물뿐 아니라 그 과정 데이터를 근거로 공정하게 평가하실 수 있습니다. 핵심은 '감시'가 아니라 학생 스스로의 '증명'이라는 점입니다.</a:t>
+              <a:t>안녕하세요, 팀 N분의1입니다. 저희가 만든 N분의1은 팀 프로젝트의 기여도를 증명하고 관리하는 안드로이드 앱입니다. 학생은 학기 내내 자신의 기여를 증명하고, 교수님은 그 데이터를 근거로 공정하게 평가하실 수 있습니다. 핵심은 감시가 아니라 학생 스스로의 증명입니다.</a:t>
             </a:r>
             <a:endParaRPr lang="en-US" dirty="0"/>
           </a:p>
@@ -594,7 +594,7 @@
           <a:p>
             <a:r>
               <a:rPr lang="en-US" dirty="0"/>
-              <a:t>팀 프로젝트 평가가 어려운 이유는 세 가지입니다. 첫째, 교수님은 최종 결과물만 보시게 되어 과정에서 누가 얼마나 기여했는지 확인하기 어렵습니다. 둘째, 유일한 장치인 학기말 동료평가는 주관적이고 근거로 남지 않습니다. 셋째, 결국 참여도와 무관하게 같은 학점이 부여됩니다. 저희 앱에는 이런 현장의 목소리를 모으는 설문 기능도 포함되어 있습니다.</a:t>
+              <a:t>팀 프로젝트 평가가 늘 불공정한 이유는 세 가지입니다. 첫째, 교수님은 최종 결과물만 보시게 되어 과정의 실제 기여를 확인하기 어렵습니다. 둘째, 유일한 장치인 학기말 동료평가는 주관적이고 근거로 남지 않습니다. 셋째, 결국 참여도와 무관하게 같은 학점이 부여됩니다. 왼쪽은 저희 앱의 설문 기능으로, 이런 현장의 목소리도 데이터로 모을 수 있습니다.</a:t>
             </a:r>
             <a:endParaRPr lang="en-US" dirty="0"/>
           </a:p>
@@ -682,7 +682,7 @@
           <a:p>
             <a:r>
               <a:rPr lang="en-US" dirty="0"/>
-              <a:t>작동 방식은 네 단계입니다. 먼저 학생이 학기 중 자신이 한 일을 기록합니다. 기여는 잔디와 연속기록으로 시각화됩니다. 다음으로 팀원끼리 익명으로 서로를 평가합니다. 그러면 AI가 본인 기록과 동료평가라는 두 근거를 교차검증해 리포트를 만들고, 이 정리된 근거가 교수님 대시보드에 표시됩니다. 왼쪽이 실제 학생 화면입니다.</a:t>
+              <a:t>작동 방식은 네 단계입니다. 1단계, 학생이 활동과 소요시간을 기록하면 잔디로 시각화됩니다. 2단계, 팀원끼리 기여도·책임감·협업·소통 네 항목을 익명으로 평가합니다. 3단계, AI가 본인 기록과 동료평가를 교차검증해 분석합니다. 4단계, 정리된 근거와 플래그가 교수님 대시보드에 표시됩니다. 말이 아닌 데이터로 기여가 증명되는 구조입니다.</a:t>
             </a:r>
             <a:endParaRPr lang="en-US" dirty="0"/>
           </a:p>
@@ -770,7 +770,7 @@
           <a:p>
             <a:r>
               <a:rPr lang="en-US" dirty="0"/>
-              <a:t>주요 기능은 학생 화면과 교수 화면으로 나뉩니다. 학생은 활동을 기록하고, 익명 동료평가를 하고, 발표자료나 코드 같은 산출물을 업로드합니다. 교수님은 팀별·개인별 기여도를 차트 대시보드로 한눈에 보시고, 교차검증 플래그로 무임승차나 불일치를 자동으로 감지하며, AI가 만든 기여도 리포트를 성적 근거로 활용하실 수 있습니다. 나아가 미니 LMS로 과목의 마일스톤과 제출까지 관리됩니다.</a:t>
+              <a:t>핵심 기능은 교차검증 플래그입니다. 기록과 평가가 어긋나면 무임승차나 불일치를 앱이 먼저 자동으로 잡아냅니다. 왼쪽 화면이 실제 분석 화면인데, 도윤 학생은 기록은 많은데 평가가 낮아 불일치로, 서연 학생은 반대로 기록 누락 가능성으로 표시됩니다. 이 외에 기여도 대시보드, AI 리포트, 잔디 기반 활동 기록과 미니 LMS까지 제공합니다. Kotlin과 Compose, Claude AI로 만들었습니다.</a:t>
             </a:r>
             <a:endParaRPr lang="en-US" dirty="0"/>
           </a:p>
@@ -858,7 +858,7 @@
           <a:p>
             <a:r>
               <a:rPr lang="en-US" dirty="0"/>
-              <a:t>정리하면, N분의1은 교수님께 세 가지를 드립니다. 첫째, 팀별·개인별 기여도를 근거와 함께 보여드려 성적 부여의 근거를 확보해 드립니다. 둘째, 무임승차나 기록·평가 불일치 같은 문제를 조기에 감지해 드립니다. 셋째, 졸업작품과 중간·기말 프로젝트 일정까지 한 앱에서 관리됩니다. 감시가 아닌 증명, N분의1이었습니다. 감사합니다.</a:t>
+              <a:t>정리하면, N분의1은 일반 팀플부터 중간·기말 프로젝트, 졸업작품까지 모든 팀 프로젝트에 적용됩니다. 학생은 노력한 만큼 인정받고, 교수님은 이의제기가 들어와도 근거로 방어할 수 있습니다. 감시가 아닌 증명, 팀 N분의1이었습니다. 감사합니다.</a:t>
             </a:r>
             <a:endParaRPr lang="en-US" dirty="0"/>
           </a:p>
@@ -1246,12 +1246,12 @@
         </p:nvSpPr>
         <p:spPr>
           <a:xfrm>
-            <a:off x="685800" y="621792"/>
-            <a:ext cx="868680" cy="868680"/>
+            <a:off x="731520" y="658368"/>
+            <a:ext cx="841248" cy="841248"/>
           </a:xfrm>
           <a:prstGeom prst="roundRect">
             <a:avLst>
-              <a:gd name="adj" fmla="val 23158"/>
+              <a:gd name="adj" fmla="val 23913"/>
             </a:avLst>
           </a:prstGeom>
           <a:solidFill>
@@ -1268,8 +1268,8 @@
         </p:nvSpPr>
         <p:spPr>
           <a:xfrm>
-            <a:off x="685800" y="621792"/>
-            <a:ext cx="868680" cy="868680"/>
+            <a:off x="731520" y="658368"/>
+            <a:ext cx="841248" cy="841248"/>
           </a:xfrm>
           <a:prstGeom prst="rect">
             <a:avLst/>
@@ -1285,7 +1285,7 @@
               <a:buNone/>
             </a:pPr>
             <a:r>
-              <a:rPr lang="en-US" sz="2200" b="1" dirty="0">
+              <a:rPr lang="en-US" sz="2100" b="1" dirty="0">
                 <a:solidFill>
                   <a:srgbClr val="FFFFFF"/>
                 </a:solidFill>
@@ -1295,7 +1295,7 @@
               </a:rPr>
               <a:t>1/N</a:t>
             </a:r>
-            <a:endParaRPr lang="en-US" sz="2200" dirty="0"/>
+            <a:endParaRPr lang="en-US" sz="2100" dirty="0"/>
           </a:p>
         </p:txBody>
       </p:sp>
@@ -1307,8 +1307,8 @@
         </p:nvSpPr>
         <p:spPr>
           <a:xfrm>
-            <a:off x="1737360" y="640080"/>
-            <a:ext cx="5486400" cy="420624"/>
+            <a:off x="1783080" y="786384"/>
+            <a:ext cx="6400800" cy="566928"/>
           </a:xfrm>
           <a:prstGeom prst="rect">
             <a:avLst/>
@@ -1324,7 +1324,7 @@
               <a:buNone/>
             </a:pPr>
             <a:r>
-              <a:rPr lang="en-US" sz="1400" dirty="0">
+              <a:rPr lang="en-US" sz="1300" b="1" spc="50" kern="0" dirty="0">
                 <a:solidFill>
                   <a:srgbClr val="C7D2FE"/>
                 </a:solidFill>
@@ -1332,9 +1332,9 @@
                 <a:ea typeface="Pretendard" pitchFamily="34" charset="-122"/>
                 <a:cs typeface="Pretendard" pitchFamily="34" charset="-120"/>
               </a:rPr>
-              <a:t>성서대학교 소프트웨어 해커톤</a:t>
-            </a:r>
-            <a:endParaRPr lang="en-US" sz="1400" dirty="0"/>
+              <a:t>성서대학교 소프트웨어학과  ·  2026 SW 해커톤</a:t>
+            </a:r>
+            <a:endParaRPr lang="en-US" sz="1300" dirty="0"/>
           </a:p>
         </p:txBody>
       </p:sp>
@@ -1346,34 +1346,34 @@
         </p:nvSpPr>
         <p:spPr>
           <a:xfrm>
-            <a:off x="1737360" y="1042416"/>
-            <a:ext cx="5486400" cy="402336"/>
-          </a:xfrm>
-          <a:prstGeom prst="rect">
-            <a:avLst/>
-          </a:prstGeom>
-          <a:noFill/>
-          <a:ln/>
-        </p:spPr>
-        <p:txBody>
-          <a:bodyPr wrap="square" lIns="0" tIns="0" rIns="0" bIns="0" rtlCol="0" anchor="ctr"/>
+            <a:off x="749808" y="1828800"/>
+            <a:ext cx="7680960" cy="1143000"/>
+          </a:xfrm>
+          <a:prstGeom prst="rect">
+            <a:avLst/>
+          </a:prstGeom>
+          <a:noFill/>
+          <a:ln/>
+        </p:spPr>
+        <p:txBody>
+          <a:bodyPr wrap="square" lIns="0" tIns="0" rIns="0" bIns="0" rtlCol="0" anchor="t"/>
           <a:lstStyle/>
           <a:p>
             <a:pPr indent="0" marL="0">
               <a:buNone/>
             </a:pPr>
             <a:r>
-              <a:rPr lang="en-US" sz="1100" b="1" spc="300" kern="0" dirty="0">
-                <a:solidFill>
-                  <a:srgbClr val="A5B4FC"/>
-                </a:solidFill>
-                <a:latin typeface="Pretendard" pitchFamily="34" charset="0"/>
-                <a:ea typeface="Pretendard" pitchFamily="34" charset="-122"/>
-                <a:cs typeface="Pretendard" pitchFamily="34" charset="-120"/>
-              </a:rPr>
-              <a:t>FINAL PRESENTATION</a:t>
-            </a:r>
-            <a:endParaRPr lang="en-US" sz="1100" dirty="0"/>
+              <a:rPr lang="en-US" sz="6000" b="1" spc="-50" kern="0" dirty="0">
+                <a:solidFill>
+                  <a:srgbClr val="FFFFFF"/>
+                </a:solidFill>
+                <a:latin typeface="Pretendard" pitchFamily="34" charset="0"/>
+                <a:ea typeface="Pretendard" pitchFamily="34" charset="-122"/>
+                <a:cs typeface="Pretendard" pitchFamily="34" charset="-120"/>
+              </a:rPr>
+              <a:t>N분의1</a:t>
+            </a:r>
+            <a:endParaRPr lang="en-US" sz="6000" dirty="0"/>
           </a:p>
         </p:txBody>
       </p:sp>
@@ -1385,8 +1385,8 @@
         </p:nvSpPr>
         <p:spPr>
           <a:xfrm>
-            <a:off x="749808" y="1874520"/>
-            <a:ext cx="7680960" cy="1097280"/>
+            <a:off x="777240" y="3035808"/>
+            <a:ext cx="7680960" cy="548640"/>
           </a:xfrm>
           <a:prstGeom prst="rect">
             <a:avLst/>
@@ -1398,21 +1398,21 @@
           <a:bodyPr wrap="square" lIns="0" tIns="0" rIns="0" bIns="0" rtlCol="0" anchor="t"/>
           <a:lstStyle/>
           <a:p>
-            <a:pPr algn="l" indent="0" marL="0">
-              <a:buNone/>
-            </a:pPr>
-            <a:r>
-              <a:rPr lang="en-US" sz="5800" b="1" spc="-50" kern="0" dirty="0">
-                <a:solidFill>
-                  <a:srgbClr val="FFFFFF"/>
-                </a:solidFill>
-                <a:latin typeface="Pretendard" pitchFamily="34" charset="0"/>
-                <a:ea typeface="Pretendard" pitchFamily="34" charset="-122"/>
-                <a:cs typeface="Pretendard" pitchFamily="34" charset="-120"/>
-              </a:rPr>
-              <a:t>N분의1</a:t>
-            </a:r>
-            <a:endParaRPr lang="en-US" sz="5800" dirty="0"/>
+            <a:pPr indent="0" marL="0">
+              <a:buNone/>
+            </a:pPr>
+            <a:r>
+              <a:rPr lang="en-US" sz="2100" b="1" dirty="0">
+                <a:solidFill>
+                  <a:srgbClr val="FCD34D"/>
+                </a:solidFill>
+                <a:latin typeface="Pretendard" pitchFamily="34" charset="0"/>
+                <a:ea typeface="Pretendard" pitchFamily="34" charset="-122"/>
+                <a:cs typeface="Pretendard" pitchFamily="34" charset="-120"/>
+              </a:rPr>
+              <a:t>팀 프로젝트 기여도 증명·관리 플랫폼</a:t>
+            </a:r>
+            <a:endParaRPr lang="en-US" sz="2100" dirty="0"/>
           </a:p>
         </p:txBody>
       </p:sp>
@@ -1424,47 +1424,8 @@
         </p:nvSpPr>
         <p:spPr>
           <a:xfrm>
-            <a:off x="777240" y="3063240"/>
-            <a:ext cx="7680960" cy="548640"/>
-          </a:xfrm>
-          <a:prstGeom prst="rect">
-            <a:avLst/>
-          </a:prstGeom>
-          <a:noFill/>
-          <a:ln/>
-        </p:spPr>
-        <p:txBody>
-          <a:bodyPr wrap="square" lIns="0" tIns="0" rIns="0" bIns="0" rtlCol="0" anchor="t"/>
-          <a:lstStyle/>
-          <a:p>
-            <a:pPr indent="0" marL="0">
-              <a:buNone/>
-            </a:pPr>
-            <a:r>
-              <a:rPr lang="en-US" sz="2200" b="1" dirty="0">
-                <a:solidFill>
-                  <a:srgbClr val="FCD34D"/>
-                </a:solidFill>
-                <a:latin typeface="Pretendard" pitchFamily="34" charset="0"/>
-                <a:ea typeface="Pretendard" pitchFamily="34" charset="-122"/>
-                <a:cs typeface="Pretendard" pitchFamily="34" charset="-120"/>
-              </a:rPr>
-              <a:t>팀 프로젝트 기여도를 기록하고, 근거로 평가하는 앱</a:t>
-            </a:r>
-            <a:endParaRPr lang="en-US" sz="2200" dirty="0"/>
-          </a:p>
-        </p:txBody>
-      </p:sp>
-      <p:sp>
-        <p:nvSpPr>
-          <p:cNvPr id="8" name="Text 6"/>
-          <p:cNvSpPr/>
-          <p:nvPr/>
-        </p:nvSpPr>
-        <p:spPr>
-          <a:xfrm>
-            <a:off x="777240" y="3794760"/>
-            <a:ext cx="7498080" cy="1097280"/>
+            <a:off x="777240" y="3767328"/>
+            <a:ext cx="7589520" cy="822960"/>
           </a:xfrm>
           <a:prstGeom prst="rect">
             <a:avLst/>
@@ -1478,12 +1439,12 @@
           <a:p>
             <a:pPr indent="0" marL="0">
               <a:lnSpc>
-                <a:spcPct val="125000"/>
+                <a:spcPct val="130000"/>
               </a:lnSpc>
               <a:buNone/>
             </a:pPr>
             <a:r>
-              <a:rPr lang="en-US" sz="1600" dirty="0">
+              <a:rPr lang="en-US" sz="1500" dirty="0">
                 <a:solidFill>
                   <a:srgbClr val="C7D2FE"/>
                 </a:solidFill>
@@ -1491,42 +1452,22 @@
                 <a:ea typeface="Pretendard" pitchFamily="34" charset="-122"/>
                 <a:cs typeface="Pretendard" pitchFamily="34" charset="-120"/>
               </a:rPr>
-              <a:t>학생은 학기 내내 자신의 기여를 남기고,</a:t>
-            </a:r>
-            <a:endParaRPr lang="en-US" sz="1600" dirty="0"/>
-          </a:p>
-          <a:p>
-            <a:pPr indent="0" marL="0">
-              <a:lnSpc>
-                <a:spcPct val="125000"/>
-              </a:lnSpc>
-              <a:buNone/>
-            </a:pPr>
-            <a:r>
-              <a:rPr lang="en-US" sz="1600" dirty="0">
-                <a:solidFill>
-                  <a:srgbClr val="C7D2FE"/>
-                </a:solidFill>
-                <a:latin typeface="Pretendard" pitchFamily="34" charset="0"/>
-                <a:ea typeface="Pretendard" pitchFamily="34" charset="-122"/>
-                <a:cs typeface="Pretendard" pitchFamily="34" charset="-120"/>
-              </a:rPr>
-              <a:t>교수님은 그 데이터를 근거로 공정하게 평가합니다.</a:t>
-            </a:r>
-            <a:endParaRPr lang="en-US" sz="1600" dirty="0"/>
-          </a:p>
-        </p:txBody>
-      </p:sp>
-      <p:sp>
-        <p:nvSpPr>
-          <p:cNvPr id="9" name="Shape 7"/>
-          <p:cNvSpPr/>
-          <p:nvPr/>
-        </p:nvSpPr>
-        <p:spPr>
-          <a:xfrm>
-            <a:off x="795528" y="5440680"/>
-            <a:ext cx="2331720" cy="566928"/>
+              <a:t>학생은 학기 내내 기여를 '증명'하고, 교수님은 그 데이터를 '근거'로 공정하게 평가합니다.</a:t>
+            </a:r>
+            <a:endParaRPr lang="en-US" sz="1500" dirty="0"/>
+          </a:p>
+        </p:txBody>
+      </p:sp>
+      <p:sp>
+        <p:nvSpPr>
+          <p:cNvPr id="8" name="Shape 6"/>
+          <p:cNvSpPr/>
+          <p:nvPr/>
+        </p:nvSpPr>
+        <p:spPr>
+          <a:xfrm>
+            <a:off x="795528" y="4892040"/>
+            <a:ext cx="2286000" cy="530352"/>
           </a:xfrm>
           <a:prstGeom prst="roundRect">
             <a:avLst>
@@ -1541,30 +1482,83 @@
       </p:sp>
       <p:sp>
         <p:nvSpPr>
+          <p:cNvPr id="9" name="Text 7"/>
+          <p:cNvSpPr/>
+          <p:nvPr/>
+        </p:nvSpPr>
+        <p:spPr>
+          <a:xfrm>
+            <a:off x="795528" y="4892040"/>
+            <a:ext cx="2286000" cy="530352"/>
+          </a:xfrm>
+          <a:prstGeom prst="rect">
+            <a:avLst/>
+          </a:prstGeom>
+          <a:noFill/>
+          <a:ln/>
+        </p:spPr>
+        <p:txBody>
+          <a:bodyPr wrap="square" lIns="0" tIns="0" rIns="0" bIns="0" rtlCol="0" anchor="ctr"/>
+          <a:lstStyle/>
+          <a:p>
+            <a:pPr algn="ctr" indent="0" marL="0">
+              <a:buNone/>
+            </a:pPr>
+            <a:r>
+              <a:rPr lang="en-US" sz="1400" b="1" dirty="0">
+                <a:solidFill>
+                  <a:srgbClr val="FFFFFF"/>
+                </a:solidFill>
+                <a:latin typeface="Pretendard" pitchFamily="34" charset="0"/>
+                <a:ea typeface="Pretendard" pitchFamily="34" charset="-122"/>
+                <a:cs typeface="Pretendard" pitchFamily="34" charset="-120"/>
+              </a:rPr>
+              <a:t>감시가 아닌, 증명</a:t>
+            </a:r>
+            <a:endParaRPr lang="en-US" sz="1400" dirty="0"/>
+          </a:p>
+        </p:txBody>
+      </p:sp>
+      <p:sp>
+        <p:nvSpPr>
           <p:cNvPr id="10" name="Text 8"/>
           <p:cNvSpPr/>
           <p:nvPr/>
         </p:nvSpPr>
         <p:spPr>
           <a:xfrm>
-            <a:off x="795528" y="5440680"/>
-            <a:ext cx="2331720" cy="566928"/>
-          </a:xfrm>
-          <a:prstGeom prst="rect">
-            <a:avLst/>
-          </a:prstGeom>
-          <a:noFill/>
-          <a:ln/>
-        </p:spPr>
-        <p:txBody>
-          <a:bodyPr wrap="square" lIns="0" tIns="0" rIns="0" bIns="0" rtlCol="0" anchor="ctr"/>
-          <a:lstStyle/>
-          <a:p>
-            <a:pPr algn="ctr" indent="0" marL="0">
-              <a:buNone/>
-            </a:pPr>
-            <a:r>
-              <a:rPr lang="en-US" sz="1500" b="1" dirty="0">
+            <a:off x="777240" y="5806440"/>
+            <a:ext cx="8229600" cy="365760"/>
+          </a:xfrm>
+          <a:prstGeom prst="rect">
+            <a:avLst/>
+          </a:prstGeom>
+          <a:noFill/>
+          <a:ln/>
+        </p:spPr>
+        <p:txBody>
+          <a:bodyPr wrap="square" lIns="0" tIns="0" rIns="0" bIns="0" rtlCol="0" anchor="ctr"/>
+          <a:lstStyle/>
+          <a:p>
+            <a:pPr indent="0" marL="0">
+              <a:buNone/>
+            </a:pPr>
+            <a:r>
+              <a:rPr lang="en-US" sz="1250" b="1" spc="100" kern="0" dirty="0">
+                <a:solidFill>
+                  <a:srgbClr val="A5B4FC"/>
+                </a:solidFill>
+                <a:latin typeface="Pretendard" pitchFamily="34" charset="0"/>
+                <a:ea typeface="Pretendard" pitchFamily="34" charset="-122"/>
+                <a:cs typeface="Pretendard" pitchFamily="34" charset="-120"/>
+              </a:rPr>
+              <a:t>TEAM  N분의1     </a:t>
+            </a:r>
+            <a:pPr indent="0" marL="0">
+              <a:buNone/>
+            </a:pPr>
+            <a:r>
+              <a:rPr lang="en-US" sz="1250" b="1" dirty="0">
                 <a:solidFill>
                   <a:srgbClr val="FFFFFF"/>
                 </a:solidFill>
@@ -1572,15 +1566,85 @@
                 <a:ea typeface="Pretendard" pitchFamily="34" charset="-122"/>
                 <a:cs typeface="Pretendard" pitchFamily="34" charset="-120"/>
               </a:rPr>
-              <a:t>감시가 아닌, 증명</a:t>
-            </a:r>
-            <a:endParaRPr lang="en-US" sz="1500" dirty="0"/>
+              <a:t>소이 </a:t>
+            </a:r>
+            <a:pPr indent="0" marL="0">
+              <a:buNone/>
+            </a:pPr>
+            <a:r>
+              <a:rPr lang="en-US" sz="1250" dirty="0">
+                <a:solidFill>
+                  <a:srgbClr val="C7D2FE"/>
+                </a:solidFill>
+                <a:latin typeface="Pretendard" pitchFamily="34" charset="0"/>
+                <a:ea typeface="Pretendard" pitchFamily="34" charset="-122"/>
+                <a:cs typeface="Pretendard" pitchFamily="34" charset="-120"/>
+              </a:rPr>
+              <a:t>팀장·기획      </a:t>
+            </a:r>
+            <a:pPr indent="0" marL="0">
+              <a:buNone/>
+            </a:pPr>
+            <a:r>
+              <a:rPr lang="en-US" sz="1250" b="1" dirty="0">
+                <a:solidFill>
+                  <a:srgbClr val="FFFFFF"/>
+                </a:solidFill>
+                <a:latin typeface="Pretendard" pitchFamily="34" charset="0"/>
+                <a:ea typeface="Pretendard" pitchFamily="34" charset="-122"/>
+                <a:cs typeface="Pretendard" pitchFamily="34" charset="-120"/>
+              </a:rPr>
+              <a:t>지민 </a:t>
+            </a:r>
+            <a:pPr indent="0" marL="0">
+              <a:buNone/>
+            </a:pPr>
+            <a:r>
+              <a:rPr lang="en-US" sz="1250" dirty="0">
+                <a:solidFill>
+                  <a:srgbClr val="C7D2FE"/>
+                </a:solidFill>
+                <a:latin typeface="Pretendard" pitchFamily="34" charset="0"/>
+                <a:ea typeface="Pretendard" pitchFamily="34" charset="-122"/>
+                <a:cs typeface="Pretendard" pitchFamily="34" charset="-120"/>
+              </a:rPr>
+              <a:t>개발      </a:t>
+            </a:r>
+            <a:pPr indent="0" marL="0">
+              <a:buNone/>
+            </a:pPr>
+            <a:r>
+              <a:rPr lang="en-US" sz="1250" b="1" dirty="0">
+                <a:solidFill>
+                  <a:srgbClr val="FFFFFF"/>
+                </a:solidFill>
+                <a:latin typeface="Pretendard" pitchFamily="34" charset="0"/>
+                <a:ea typeface="Pretendard" pitchFamily="34" charset="-122"/>
+                <a:cs typeface="Pretendard" pitchFamily="34" charset="-120"/>
+              </a:rPr>
+              <a:t>시훈 </a:t>
+            </a:r>
+            <a:pPr indent="0" marL="0">
+              <a:buNone/>
+            </a:pPr>
+            <a:r>
+              <a:rPr lang="en-US" sz="1250" dirty="0">
+                <a:solidFill>
+                  <a:srgbClr val="C7D2FE"/>
+                </a:solidFill>
+                <a:latin typeface="Pretendard" pitchFamily="34" charset="0"/>
+                <a:ea typeface="Pretendard" pitchFamily="34" charset="-122"/>
+                <a:cs typeface="Pretendard" pitchFamily="34" charset="-120"/>
+              </a:rPr>
+              <a:t>시연</a:t>
+            </a:r>
+            <a:endParaRPr lang="en-US" sz="1250" dirty="0"/>
           </a:p>
         </p:txBody>
       </p:sp>
       <p:pic>
         <p:nvPicPr>
-          <p:cNvPr id="11" name="Image 0" descr="C:/Users/HP15~1/AppData/Local/Temp/claude/C--Users-HP-15-Desktop-Hackathon/e11a162a-fd90-4cff-922b-c82073c29db3/scratchpad/deck/assets/dev_login.png">    </p:cNvPr>
+          <p:cNvPr id="11" name="Image 0" descr="C:/Users/HP15~1/AppData/Local/Temp/claude/C--Users-HP-15-Desktop-Hackathon/e11a162a-fd90-4cff-922b-c82073c29db3/scratchpad/deck/assets/dev_home.png">    </p:cNvPr>
           <p:cNvPicPr>
             <a:picLocks noChangeAspect="1"/>
           </p:cNvPicPr>
@@ -1594,8 +1658,8 @@
         </p:blipFill>
         <p:spPr>
           <a:xfrm>
-            <a:off x="8869680" y="457200"/>
-            <a:ext cx="2672906" cy="5715000"/>
+            <a:off x="8915400" y="566928"/>
+            <a:ext cx="2608756" cy="5577840"/>
           </a:xfrm>
           <a:prstGeom prst="rect">
             <a:avLst/>
@@ -1721,7 +1785,7 @@
         <p:spPr>
           <a:xfrm>
             <a:off x="3566160" y="566928"/>
-            <a:ext cx="8229600" cy="310896"/>
+            <a:ext cx="9144000" cy="310896"/>
           </a:xfrm>
           <a:prstGeom prst="rect">
             <a:avLst/>
@@ -1886,7 +1950,7 @@
               <a:buNone/>
             </a:pPr>
             <a:r>
-              <a:rPr lang="en-US" sz="1600" b="1" dirty="0">
+              <a:rPr lang="en-US" sz="1550" b="1" dirty="0">
                 <a:solidFill>
                   <a:srgbClr val="DC2626"/>
                 </a:solidFill>
@@ -1894,9 +1958,9 @@
                 <a:ea typeface="Pretendard" pitchFamily="34" charset="-122"/>
                 <a:cs typeface="Pretendard" pitchFamily="34" charset="-120"/>
               </a:rPr>
-              <a:t>팀 프로젝트 평가가 어려운 이유</a:t>
-            </a:r>
-            <a:endParaRPr lang="en-US" sz="1600" dirty="0"/>
+              <a:t>팀 프로젝트 평가가 늘 불공정한 3가지 이유</a:t>
+            </a:r>
+            <a:endParaRPr lang="en-US" sz="1550" dirty="0"/>
           </a:p>
         </p:txBody>
       </p:sp>
@@ -1937,8 +2001,8 @@
         </p:nvSpPr>
         <p:spPr>
           <a:xfrm>
-            <a:off x="3803904" y="2962656"/>
-            <a:ext cx="548640" cy="548640"/>
+            <a:off x="3785616" y="2971800"/>
+            <a:ext cx="530352" cy="530352"/>
           </a:xfrm>
           <a:prstGeom prst="ellipse">
             <a:avLst/>
@@ -1965,8 +2029,8 @@
         </p:blipFill>
         <p:spPr>
           <a:xfrm>
-            <a:off x="3941064" y="3099816"/>
-            <a:ext cx="274320" cy="274320"/>
+            <a:off x="3918204" y="3104388"/>
+            <a:ext cx="265176" cy="265176"/>
           </a:xfrm>
           <a:prstGeom prst="rect">
             <a:avLst/>
@@ -1981,8 +2045,8 @@
         </p:nvSpPr>
         <p:spPr>
           <a:xfrm>
-            <a:off x="4626864" y="2871216"/>
-            <a:ext cx="6665976" cy="438912"/>
+            <a:off x="4553712" y="2862072"/>
+            <a:ext cx="6739128" cy="402336"/>
           </a:xfrm>
           <a:prstGeom prst="rect">
             <a:avLst/>
@@ -1998,7 +2062,7 @@
               <a:buNone/>
             </a:pPr>
             <a:r>
-              <a:rPr lang="en-US" sz="1650" b="1" dirty="0">
+              <a:rPr lang="en-US" sz="1550" b="1" dirty="0">
                 <a:solidFill>
                   <a:srgbClr val="1E293B"/>
                 </a:solidFill>
@@ -2008,7 +2072,7 @@
               </a:rPr>
               <a:t>결과물만 보입니다</a:t>
             </a:r>
-            <a:endParaRPr lang="en-US" sz="1650" dirty="0"/>
+            <a:endParaRPr lang="en-US" sz="1550" dirty="0"/>
           </a:p>
         </p:txBody>
       </p:sp>
@@ -2020,8 +2084,8 @@
         </p:nvSpPr>
         <p:spPr>
           <a:xfrm>
-            <a:off x="4626864" y="3182112"/>
-            <a:ext cx="6665976" cy="402336"/>
+            <a:off x="4553712" y="3236976"/>
+            <a:ext cx="6739128" cy="365760"/>
           </a:xfrm>
           <a:prstGeom prst="rect">
             <a:avLst/>
@@ -2037,7 +2101,7 @@
               <a:buNone/>
             </a:pPr>
             <a:r>
-              <a:rPr lang="en-US" sz="1250" dirty="0">
+              <a:rPr lang="en-US" sz="1200" dirty="0">
                 <a:solidFill>
                   <a:srgbClr val="64748B"/>
                 </a:solidFill>
@@ -2047,7 +2111,7 @@
               </a:rPr>
               <a:t>교수님이 과정의 실제 기여를 확인하기 어렵습니다</a:t>
             </a:r>
-            <a:endParaRPr lang="en-US" sz="1250" dirty="0"/>
+            <a:endParaRPr lang="en-US" sz="1200" dirty="0"/>
           </a:p>
         </p:txBody>
       </p:sp>
@@ -2088,8 +2152,8 @@
         </p:nvSpPr>
         <p:spPr>
           <a:xfrm>
-            <a:off x="3803904" y="4169664"/>
-            <a:ext cx="548640" cy="548640"/>
+            <a:off x="3785616" y="4178808"/>
+            <a:ext cx="530352" cy="530352"/>
           </a:xfrm>
           <a:prstGeom prst="ellipse">
             <a:avLst/>
@@ -2116,8 +2180,8 @@
         </p:blipFill>
         <p:spPr>
           <a:xfrm>
-            <a:off x="3941064" y="4306824"/>
-            <a:ext cx="274320" cy="274320"/>
+            <a:off x="3918204" y="4311396"/>
+            <a:ext cx="265176" cy="265176"/>
           </a:xfrm>
           <a:prstGeom prst="rect">
             <a:avLst/>
@@ -2132,8 +2196,8 @@
         </p:nvSpPr>
         <p:spPr>
           <a:xfrm>
-            <a:off x="4626864" y="4078224"/>
-            <a:ext cx="6665976" cy="438912"/>
+            <a:off x="4553712" y="4069080"/>
+            <a:ext cx="6739128" cy="402336"/>
           </a:xfrm>
           <a:prstGeom prst="rect">
             <a:avLst/>
@@ -2149,7 +2213,7 @@
               <a:buNone/>
             </a:pPr>
             <a:r>
-              <a:rPr lang="en-US" sz="1650" b="1" dirty="0">
+              <a:rPr lang="en-US" sz="1550" b="1" dirty="0">
                 <a:solidFill>
                   <a:srgbClr val="1E293B"/>
                 </a:solidFill>
@@ -2159,7 +2223,7 @@
               </a:rPr>
               <a:t>동료평가는 근거가 약합니다</a:t>
             </a:r>
-            <a:endParaRPr lang="en-US" sz="1650" dirty="0"/>
+            <a:endParaRPr lang="en-US" sz="1550" dirty="0"/>
           </a:p>
         </p:txBody>
       </p:sp>
@@ -2171,8 +2235,8 @@
         </p:nvSpPr>
         <p:spPr>
           <a:xfrm>
-            <a:off x="4626864" y="4389120"/>
-            <a:ext cx="6665976" cy="402336"/>
+            <a:off x="4553712" y="4443984"/>
+            <a:ext cx="6739128" cy="365760"/>
           </a:xfrm>
           <a:prstGeom prst="rect">
             <a:avLst/>
@@ -2188,7 +2252,7 @@
               <a:buNone/>
             </a:pPr>
             <a:r>
-              <a:rPr lang="en-US" sz="1250" dirty="0">
+              <a:rPr lang="en-US" sz="1200" dirty="0">
                 <a:solidFill>
                   <a:srgbClr val="64748B"/>
                 </a:solidFill>
@@ -2198,7 +2262,7 @@
               </a:rPr>
               <a:t>학기말 설문 한 번은 주관적이고 기록이 남지 않아요</a:t>
             </a:r>
-            <a:endParaRPr lang="en-US" sz="1250" dirty="0"/>
+            <a:endParaRPr lang="en-US" sz="1200" dirty="0"/>
           </a:p>
         </p:txBody>
       </p:sp>
@@ -2239,8 +2303,8 @@
         </p:nvSpPr>
         <p:spPr>
           <a:xfrm>
-            <a:off x="3803904" y="5376672"/>
-            <a:ext cx="548640" cy="548640"/>
+            <a:off x="3785616" y="5385816"/>
+            <a:ext cx="530352" cy="530352"/>
           </a:xfrm>
           <a:prstGeom prst="ellipse">
             <a:avLst/>
@@ -2267,8 +2331,8 @@
         </p:blipFill>
         <p:spPr>
           <a:xfrm>
-            <a:off x="3941064" y="5513832"/>
-            <a:ext cx="274320" cy="274320"/>
+            <a:off x="3918204" y="5518404"/>
+            <a:ext cx="265176" cy="265176"/>
           </a:xfrm>
           <a:prstGeom prst="rect">
             <a:avLst/>
@@ -2283,8 +2347,8 @@
         </p:nvSpPr>
         <p:spPr>
           <a:xfrm>
-            <a:off x="4626864" y="5285232"/>
-            <a:ext cx="6665976" cy="438912"/>
+            <a:off x="4553712" y="5276088"/>
+            <a:ext cx="6739128" cy="402336"/>
           </a:xfrm>
           <a:prstGeom prst="rect">
             <a:avLst/>
@@ -2300,7 +2364,7 @@
               <a:buNone/>
             </a:pPr>
             <a:r>
-              <a:rPr lang="en-US" sz="1650" b="1" dirty="0">
+              <a:rPr lang="en-US" sz="1550" b="1" dirty="0">
                 <a:solidFill>
                   <a:srgbClr val="1E293B"/>
                 </a:solidFill>
@@ -2310,7 +2374,7 @@
               </a:rPr>
               <a:t>참여와 무관하게 같은 학점</a:t>
             </a:r>
-            <a:endParaRPr lang="en-US" sz="1650" dirty="0"/>
+            <a:endParaRPr lang="en-US" sz="1550" dirty="0"/>
           </a:p>
         </p:txBody>
       </p:sp>
@@ -2322,8 +2386,8 @@
         </p:nvSpPr>
         <p:spPr>
           <a:xfrm>
-            <a:off x="4626864" y="5596128"/>
-            <a:ext cx="6665976" cy="402336"/>
+            <a:off x="4553712" y="5650992"/>
+            <a:ext cx="6739128" cy="365760"/>
           </a:xfrm>
           <a:prstGeom prst="rect">
             <a:avLst/>
@@ -2339,7 +2403,7 @@
               <a:buNone/>
             </a:pPr>
             <a:r>
-              <a:rPr lang="en-US" sz="1250" dirty="0">
+              <a:rPr lang="en-US" sz="1200" dirty="0">
                 <a:solidFill>
                   <a:srgbClr val="64748B"/>
                 </a:solidFill>
@@ -2349,7 +2413,7 @@
               </a:rPr>
               <a:t>열심히 한 학생과 아닌 학생이 같은 점수를 받습니다</a:t>
             </a:r>
-            <a:endParaRPr lang="en-US" sz="1250" dirty="0"/>
+            <a:endParaRPr lang="en-US" sz="1200" dirty="0"/>
           </a:p>
         </p:txBody>
       </p:sp>
@@ -2524,8 +2588,8 @@
         </p:nvSpPr>
         <p:spPr>
           <a:xfrm>
-            <a:off x="3566160" y="566928"/>
-            <a:ext cx="8229600" cy="310896"/>
+            <a:off x="566928" y="548640"/>
+            <a:ext cx="9144000" cy="310896"/>
           </a:xfrm>
           <a:prstGeom prst="rect">
             <a:avLst/>
@@ -2577,8 +2641,8 @@
         </p:nvSpPr>
         <p:spPr>
           <a:xfrm>
-            <a:off x="3566160" y="914400"/>
-            <a:ext cx="8001000" cy="1371600"/>
+            <a:off x="566928" y="914400"/>
+            <a:ext cx="11064240" cy="1371600"/>
           </a:xfrm>
           <a:prstGeom prst="rect">
             <a:avLst/>
@@ -2597,7 +2661,7 @@
               <a:buNone/>
             </a:pPr>
             <a:r>
-              <a:rPr lang="en-US" sz="3300" b="1" spc="-30" kern="0" dirty="0">
+              <a:rPr lang="en-US" sz="3100" b="1" spc="-30" kern="0" dirty="0">
                 <a:solidFill>
                   <a:srgbClr val="1E293B"/>
                 </a:solidFill>
@@ -2605,11 +2669,8 @@
                 <a:ea typeface="Pretendard" pitchFamily="34" charset="-122"/>
                 <a:cs typeface="Pretendard" pitchFamily="34" charset="-120"/>
               </a:rPr>
-              <a:t>학기 중 쌓인 기록이,</a:t>
-            </a:r>
-            <a:endParaRPr lang="en-US" sz="3300" dirty="0"/>
-          </a:p>
-          <a:p>
+              <a:t>학기 중 기록이 </a:t>
+            </a:r>
             <a:pPr algn="l" indent="0" marL="0">
               <a:lnSpc>
                 <a:spcPct val="103000"/>
@@ -2617,15 +2678,15 @@
               <a:buNone/>
             </a:pPr>
             <a:r>
-              <a:rPr lang="en-US" sz="3300" b="1" spc="-30" kern="0" dirty="0">
-                <a:solidFill>
-                  <a:srgbClr val="1E293B"/>
-                </a:solidFill>
-                <a:latin typeface="Pretendard" pitchFamily="34" charset="0"/>
-                <a:ea typeface="Pretendard" pitchFamily="34" charset="-122"/>
-                <a:cs typeface="Pretendard" pitchFamily="34" charset="-120"/>
-              </a:rPr>
-              <a:t>평가의 </a:t>
+              <a:rPr lang="en-US" sz="3100" b="1" spc="-30" kern="0" dirty="0">
+                <a:solidFill>
+                  <a:srgbClr val="4F46E5"/>
+                </a:solidFill>
+                <a:latin typeface="Pretendard" pitchFamily="34" charset="0"/>
+                <a:ea typeface="Pretendard" pitchFamily="34" charset="-122"/>
+                <a:cs typeface="Pretendard" pitchFamily="34" charset="-120"/>
+              </a:rPr>
+              <a:t>학기말 평가의 근거</a:t>
             </a:r>
             <a:pPr algn="l" indent="0" marL="0">
               <a:lnSpc>
@@ -2634,24 +2695,7 @@
               <a:buNone/>
             </a:pPr>
             <a:r>
-              <a:rPr lang="en-US" sz="3300" b="1" spc="-30" kern="0" dirty="0">
-                <a:solidFill>
-                  <a:srgbClr val="4F46E5"/>
-                </a:solidFill>
-                <a:latin typeface="Pretendard" pitchFamily="34" charset="0"/>
-                <a:ea typeface="Pretendard" pitchFamily="34" charset="-122"/>
-                <a:cs typeface="Pretendard" pitchFamily="34" charset="-120"/>
-              </a:rPr>
-              <a:t>근거</a:t>
-            </a:r>
-            <a:pPr algn="l" indent="0" marL="0">
-              <a:lnSpc>
-                <a:spcPct val="103000"/>
-              </a:lnSpc>
-              <a:buNone/>
-            </a:pPr>
-            <a:r>
-              <a:rPr lang="en-US" sz="3300" b="1" spc="-30" kern="0" dirty="0">
+              <a:rPr lang="en-US" sz="3100" b="1" spc="-30" kern="0" dirty="0">
                 <a:solidFill>
                   <a:srgbClr val="1E293B"/>
                 </a:solidFill>
@@ -2661,7 +2705,7 @@
               </a:rPr>
               <a:t>가 됩니다</a:t>
             </a:r>
-            <a:endParaRPr lang="en-US" sz="3300" dirty="0"/>
+            <a:endParaRPr lang="en-US" sz="3100" dirty="0"/>
           </a:p>
         </p:txBody>
       </p:sp>
@@ -2673,8 +2717,8 @@
         </p:nvSpPr>
         <p:spPr>
           <a:xfrm>
-            <a:off x="3566160" y="2212848"/>
-            <a:ext cx="8001000" cy="457200"/>
+            <a:off x="585216" y="1572768"/>
+            <a:ext cx="10058400" cy="402336"/>
           </a:xfrm>
           <a:prstGeom prst="rect">
             <a:avLst/>
@@ -2690,15 +2734,15 @@
               <a:buNone/>
             </a:pPr>
             <a:r>
-              <a:rPr lang="en-US" sz="1500" b="1" dirty="0">
-                <a:solidFill>
-                  <a:srgbClr val="4F46E5"/>
-                </a:solidFill>
-                <a:latin typeface="Pretendard" pitchFamily="34" charset="0"/>
-                <a:ea typeface="Pretendard" pitchFamily="34" charset="-122"/>
-                <a:cs typeface="Pretendard" pitchFamily="34" charset="-120"/>
-              </a:rPr>
-              <a:t>학생 기록 → 동료평가 → AI 검증 → 교수 대시보드</a:t>
+              <a:rPr lang="en-US" sz="1500" dirty="0">
+                <a:solidFill>
+                  <a:srgbClr val="64748B"/>
+                </a:solidFill>
+                <a:latin typeface="Pretendard" pitchFamily="34" charset="0"/>
+                <a:ea typeface="Pretendard" pitchFamily="34" charset="-122"/>
+                <a:cs typeface="Pretendard" pitchFamily="34" charset="-120"/>
+              </a:rPr>
+              <a:t>네 단계로, 말이 아닌 데이터가 쌓입니다</a:t>
             </a:r>
             <a:endParaRPr lang="en-US" sz="1500" dirty="0"/>
           </a:p>
@@ -2712,12 +2756,12 @@
         </p:nvSpPr>
         <p:spPr>
           <a:xfrm>
-            <a:off x="3566160" y="2743200"/>
-            <a:ext cx="8001000" cy="914400"/>
+            <a:off x="566928" y="2880360"/>
+            <a:ext cx="2450592" cy="2514600"/>
           </a:xfrm>
           <a:prstGeom prst="roundRect">
             <a:avLst>
-              <a:gd name="adj" fmla="val 10000"/>
+              <a:gd name="adj" fmla="val 3731"/>
             </a:avLst>
           </a:prstGeom>
           <a:solidFill>
@@ -2735,27 +2779,66 @@
       </p:sp>
       <p:sp>
         <p:nvSpPr>
-          <p:cNvPr id="6" name="Shape 4"/>
-          <p:cNvSpPr/>
-          <p:nvPr/>
-        </p:nvSpPr>
-        <p:spPr>
-          <a:xfrm>
-            <a:off x="3803904" y="2926080"/>
-            <a:ext cx="548640" cy="548640"/>
+          <p:cNvPr id="6" name="Text 4"/>
+          <p:cNvSpPr/>
+          <p:nvPr/>
+        </p:nvSpPr>
+        <p:spPr>
+          <a:xfrm>
+            <a:off x="749808" y="3081528"/>
+            <a:ext cx="914400" cy="365760"/>
+          </a:xfrm>
+          <a:prstGeom prst="rect">
+            <a:avLst/>
+          </a:prstGeom>
+          <a:noFill/>
+          <a:ln/>
+        </p:spPr>
+        <p:txBody>
+          <a:bodyPr wrap="square" lIns="0" tIns="0" rIns="0" bIns="0" rtlCol="0" anchor="ctr"/>
+          <a:lstStyle/>
+          <a:p>
+            <a:pPr indent="0" marL="0">
+              <a:buNone/>
+            </a:pPr>
+            <a:r>
+              <a:rPr lang="en-US" sz="1500" b="1" dirty="0">
+                <a:solidFill>
+                  <a:srgbClr val="6366F1"/>
+                </a:solidFill>
+                <a:latin typeface="Pretendard" pitchFamily="34" charset="0"/>
+                <a:ea typeface="Pretendard" pitchFamily="34" charset="-122"/>
+                <a:cs typeface="Pretendard" pitchFamily="34" charset="-120"/>
+              </a:rPr>
+              <a:t>01</a:t>
+            </a:r>
+            <a:endParaRPr lang="en-US" sz="1500" dirty="0"/>
+          </a:p>
+        </p:txBody>
+      </p:sp>
+      <p:sp>
+        <p:nvSpPr>
+          <p:cNvPr id="7" name="Shape 5"/>
+          <p:cNvSpPr/>
+          <p:nvPr/>
+        </p:nvSpPr>
+        <p:spPr>
+          <a:xfrm>
+            <a:off x="1380744" y="3520440"/>
+            <a:ext cx="822960" cy="822960"/>
           </a:xfrm>
           <a:prstGeom prst="ellipse">
             <a:avLst/>
           </a:prstGeom>
           <a:solidFill>
-            <a:srgbClr val="EEF0FF"/>
+            <a:srgbClr val="4F46E5"/>
           </a:solidFill>
           <a:ln/>
         </p:spPr>
       </p:sp>
       <p:pic>
         <p:nvPicPr>
-          <p:cNvPr id="7" name="Image 0" descr="preencoded.png">    </p:cNvPr>
+          <p:cNvPr id="8" name="Image 0" descr="preencoded.png">    </p:cNvPr>
           <p:cNvPicPr>
             <a:picLocks noChangeAspect="1"/>
           </p:cNvPicPr>
@@ -2769,8 +2852,8 @@
         </p:blipFill>
         <p:spPr>
           <a:xfrm>
-            <a:off x="3941064" y="3063240"/>
-            <a:ext cx="274320" cy="274320"/>
+            <a:off x="1586484" y="3726180"/>
+            <a:ext cx="411480" cy="411480"/>
           </a:xfrm>
           <a:prstGeom prst="rect">
             <a:avLst/>
@@ -2779,30 +2862,30 @@
       </p:pic>
       <p:sp>
         <p:nvSpPr>
-          <p:cNvPr id="8" name="Text 5"/>
-          <p:cNvSpPr/>
-          <p:nvPr/>
-        </p:nvSpPr>
-        <p:spPr>
-          <a:xfrm>
-            <a:off x="4626864" y="2871216"/>
-            <a:ext cx="6665976" cy="438912"/>
-          </a:xfrm>
-          <a:prstGeom prst="rect">
-            <a:avLst/>
-          </a:prstGeom>
-          <a:noFill/>
-          <a:ln/>
-        </p:spPr>
-        <p:txBody>
-          <a:bodyPr wrap="square" lIns="0" tIns="0" rIns="0" bIns="0" rtlCol="0" anchor="ctr"/>
-          <a:lstStyle/>
-          <a:p>
-            <a:pPr indent="0" marL="0">
-              <a:buNone/>
-            </a:pPr>
-            <a:r>
-              <a:rPr lang="en-US" sz="1650" b="1" dirty="0">
+          <p:cNvPr id="9" name="Text 6"/>
+          <p:cNvSpPr/>
+          <p:nvPr/>
+        </p:nvSpPr>
+        <p:spPr>
+          <a:xfrm>
+            <a:off x="566928" y="4453128"/>
+            <a:ext cx="2450592" cy="365760"/>
+          </a:xfrm>
+          <a:prstGeom prst="rect">
+            <a:avLst/>
+          </a:prstGeom>
+          <a:noFill/>
+          <a:ln/>
+        </p:spPr>
+        <p:txBody>
+          <a:bodyPr wrap="square" lIns="0" tIns="0" rIns="0" bIns="0" rtlCol="0" anchor="ctr"/>
+          <a:lstStyle/>
+          <a:p>
+            <a:pPr algn="ctr" indent="0" marL="0">
+              <a:buNone/>
+            </a:pPr>
+            <a:r>
+              <a:rPr lang="en-US" sz="1500" b="1" dirty="0">
                 <a:solidFill>
                   <a:srgbClr val="1E293B"/>
                 </a:solidFill>
@@ -2810,38 +2893,41 @@
                 <a:ea typeface="Pretendard" pitchFamily="34" charset="-122"/>
                 <a:cs typeface="Pretendard" pitchFamily="34" charset="-120"/>
               </a:rPr>
-              <a:t>학생이 활동을 기록합니다</a:t>
-            </a:r>
-            <a:endParaRPr lang="en-US" sz="1650" dirty="0"/>
-          </a:p>
-        </p:txBody>
-      </p:sp>
-      <p:sp>
-        <p:nvSpPr>
-          <p:cNvPr id="9" name="Text 6"/>
-          <p:cNvSpPr/>
-          <p:nvPr/>
-        </p:nvSpPr>
-        <p:spPr>
-          <a:xfrm>
-            <a:off x="4626864" y="3108960"/>
-            <a:ext cx="6665976" cy="402336"/>
-          </a:xfrm>
-          <a:prstGeom prst="rect">
-            <a:avLst/>
-          </a:prstGeom>
-          <a:noFill/>
-          <a:ln/>
-        </p:spPr>
-        <p:txBody>
-          <a:bodyPr wrap="square" lIns="0" tIns="0" rIns="0" bIns="0" rtlCol="0" anchor="ctr"/>
-          <a:lstStyle/>
-          <a:p>
-            <a:pPr indent="0" marL="0">
-              <a:buNone/>
-            </a:pPr>
-            <a:r>
-              <a:rPr lang="en-US" sz="1250" dirty="0">
+              <a:t>학생 기록</a:t>
+            </a:r>
+            <a:endParaRPr lang="en-US" sz="1500" dirty="0"/>
+          </a:p>
+        </p:txBody>
+      </p:sp>
+      <p:sp>
+        <p:nvSpPr>
+          <p:cNvPr id="10" name="Text 7"/>
+          <p:cNvSpPr/>
+          <p:nvPr/>
+        </p:nvSpPr>
+        <p:spPr>
+          <a:xfrm>
+            <a:off x="658368" y="4818888"/>
+            <a:ext cx="2267712" cy="512064"/>
+          </a:xfrm>
+          <a:prstGeom prst="rect">
+            <a:avLst/>
+          </a:prstGeom>
+          <a:noFill/>
+          <a:ln/>
+        </p:spPr>
+        <p:txBody>
+          <a:bodyPr wrap="square" lIns="0" tIns="0" rIns="0" bIns="0" rtlCol="0" anchor="ctr"/>
+          <a:lstStyle/>
+          <a:p>
+            <a:pPr algn="ctr" indent="0" marL="0">
+              <a:lnSpc>
+                <a:spcPct val="110000"/>
+              </a:lnSpc>
+              <a:buNone/>
+            </a:pPr>
+            <a:r>
+              <a:rPr lang="en-US" sz="1100" dirty="0">
                 <a:solidFill>
                   <a:srgbClr val="64748B"/>
                 </a:solidFill>
@@ -2849,26 +2935,85 @@
                 <a:ea typeface="Pretendard" pitchFamily="34" charset="-122"/>
                 <a:cs typeface="Pretendard" pitchFamily="34" charset="-120"/>
               </a:rPr>
-              <a:t>무슨 일을 얼마나 했는지 — 잔디·연속기록으로 시각화</a:t>
-            </a:r>
-            <a:endParaRPr lang="en-US" sz="1250" dirty="0"/>
-          </a:p>
-        </p:txBody>
-      </p:sp>
-      <p:sp>
-        <p:nvSpPr>
-          <p:cNvPr id="10" name="Shape 7"/>
-          <p:cNvSpPr/>
-          <p:nvPr/>
-        </p:nvSpPr>
-        <p:spPr>
-          <a:xfrm>
-            <a:off x="3566160" y="3840480"/>
-            <a:ext cx="8001000" cy="914400"/>
+              <a:t>활동·소요시간을</a:t>
+            </a:r>
+            <a:endParaRPr lang="en-US" sz="1100" dirty="0"/>
+          </a:p>
+          <a:p>
+            <a:pPr algn="ctr" indent="0" marL="0">
+              <a:lnSpc>
+                <a:spcPct val="110000"/>
+              </a:lnSpc>
+              <a:buNone/>
+            </a:pPr>
+            <a:r>
+              <a:rPr lang="en-US" sz="1100" dirty="0">
+                <a:solidFill>
+                  <a:srgbClr val="64748B"/>
+                </a:solidFill>
+                <a:latin typeface="Pretendard" pitchFamily="34" charset="0"/>
+                <a:ea typeface="Pretendard" pitchFamily="34" charset="-122"/>
+                <a:cs typeface="Pretendard" pitchFamily="34" charset="-120"/>
+              </a:rPr>
+              <a:t>잔디로 시각화</a:t>
+            </a:r>
+            <a:endParaRPr lang="en-US" sz="1100" dirty="0"/>
+          </a:p>
+        </p:txBody>
+      </p:sp>
+      <p:sp>
+        <p:nvSpPr>
+          <p:cNvPr id="11" name="Text 8"/>
+          <p:cNvSpPr/>
+          <p:nvPr/>
+        </p:nvSpPr>
+        <p:spPr>
+          <a:xfrm>
+            <a:off x="2971800" y="2880360"/>
+            <a:ext cx="548640" cy="2514600"/>
+          </a:xfrm>
+          <a:prstGeom prst="rect">
+            <a:avLst/>
+          </a:prstGeom>
+          <a:noFill/>
+          <a:ln/>
+        </p:spPr>
+        <p:txBody>
+          <a:bodyPr wrap="square" lIns="0" tIns="0" rIns="0" bIns="0" rtlCol="0" anchor="ctr"/>
+          <a:lstStyle/>
+          <a:p>
+            <a:pPr algn="ctr" indent="0" marL="0">
+              <a:buNone/>
+            </a:pPr>
+            <a:r>
+              <a:rPr lang="en-US" sz="3400" b="1" dirty="0">
+                <a:solidFill>
+                  <a:srgbClr val="6366F1"/>
+                </a:solidFill>
+                <a:latin typeface="Pretendard" pitchFamily="34" charset="0"/>
+                <a:ea typeface="Pretendard" pitchFamily="34" charset="-122"/>
+                <a:cs typeface="Pretendard" pitchFamily="34" charset="-120"/>
+              </a:rPr>
+              <a:t>›</a:t>
+            </a:r>
+            <a:endParaRPr lang="en-US" sz="3400" dirty="0"/>
+          </a:p>
+        </p:txBody>
+      </p:sp>
+      <p:sp>
+        <p:nvSpPr>
+          <p:cNvPr id="12" name="Shape 9"/>
+          <p:cNvSpPr/>
+          <p:nvPr/>
+        </p:nvSpPr>
+        <p:spPr>
+          <a:xfrm>
+            <a:off x="3474720" y="2880360"/>
+            <a:ext cx="2450592" cy="2514600"/>
           </a:xfrm>
           <a:prstGeom prst="roundRect">
             <a:avLst>
-              <a:gd name="adj" fmla="val 10000"/>
+              <a:gd name="adj" fmla="val 3731"/>
             </a:avLst>
           </a:prstGeom>
           <a:solidFill>
@@ -2886,27 +3031,66 @@
       </p:sp>
       <p:sp>
         <p:nvSpPr>
-          <p:cNvPr id="11" name="Shape 8"/>
-          <p:cNvSpPr/>
-          <p:nvPr/>
-        </p:nvSpPr>
-        <p:spPr>
-          <a:xfrm>
-            <a:off x="3803904" y="4023360"/>
-            <a:ext cx="548640" cy="548640"/>
+          <p:cNvPr id="13" name="Text 10"/>
+          <p:cNvSpPr/>
+          <p:nvPr/>
+        </p:nvSpPr>
+        <p:spPr>
+          <a:xfrm>
+            <a:off x="3657600" y="3081528"/>
+            <a:ext cx="914400" cy="365760"/>
+          </a:xfrm>
+          <a:prstGeom prst="rect">
+            <a:avLst/>
+          </a:prstGeom>
+          <a:noFill/>
+          <a:ln/>
+        </p:spPr>
+        <p:txBody>
+          <a:bodyPr wrap="square" lIns="0" tIns="0" rIns="0" bIns="0" rtlCol="0" anchor="ctr"/>
+          <a:lstStyle/>
+          <a:p>
+            <a:pPr indent="0" marL="0">
+              <a:buNone/>
+            </a:pPr>
+            <a:r>
+              <a:rPr lang="en-US" sz="1500" b="1" dirty="0">
+                <a:solidFill>
+                  <a:srgbClr val="6366F1"/>
+                </a:solidFill>
+                <a:latin typeface="Pretendard" pitchFamily="34" charset="0"/>
+                <a:ea typeface="Pretendard" pitchFamily="34" charset="-122"/>
+                <a:cs typeface="Pretendard" pitchFamily="34" charset="-120"/>
+              </a:rPr>
+              <a:t>02</a:t>
+            </a:r>
+            <a:endParaRPr lang="en-US" sz="1500" dirty="0"/>
+          </a:p>
+        </p:txBody>
+      </p:sp>
+      <p:sp>
+        <p:nvSpPr>
+          <p:cNvPr id="14" name="Shape 11"/>
+          <p:cNvSpPr/>
+          <p:nvPr/>
+        </p:nvSpPr>
+        <p:spPr>
+          <a:xfrm>
+            <a:off x="4288536" y="3520440"/>
+            <a:ext cx="822960" cy="822960"/>
           </a:xfrm>
           <a:prstGeom prst="ellipse">
             <a:avLst/>
           </a:prstGeom>
           <a:solidFill>
-            <a:srgbClr val="EEF0FF"/>
+            <a:srgbClr val="4F46E5"/>
           </a:solidFill>
           <a:ln/>
         </p:spPr>
       </p:sp>
       <p:pic>
         <p:nvPicPr>
-          <p:cNvPr id="12" name="Image 1" descr="preencoded.png">    </p:cNvPr>
+          <p:cNvPr id="15" name="Image 1" descr="preencoded.png">    </p:cNvPr>
           <p:cNvPicPr>
             <a:picLocks noChangeAspect="1"/>
           </p:cNvPicPr>
@@ -2920,8 +3104,8 @@
         </p:blipFill>
         <p:spPr>
           <a:xfrm>
-            <a:off x="3941064" y="4160520"/>
-            <a:ext cx="274320" cy="274320"/>
+            <a:off x="4494276" y="3726180"/>
+            <a:ext cx="411480" cy="411480"/>
           </a:xfrm>
           <a:prstGeom prst="rect">
             <a:avLst/>
@@ -2930,30 +3114,30 @@
       </p:pic>
       <p:sp>
         <p:nvSpPr>
-          <p:cNvPr id="13" name="Text 9"/>
-          <p:cNvSpPr/>
-          <p:nvPr/>
-        </p:nvSpPr>
-        <p:spPr>
-          <a:xfrm>
-            <a:off x="4626864" y="3968496"/>
-            <a:ext cx="6665976" cy="438912"/>
-          </a:xfrm>
-          <a:prstGeom prst="rect">
-            <a:avLst/>
-          </a:prstGeom>
-          <a:noFill/>
-          <a:ln/>
-        </p:spPr>
-        <p:txBody>
-          <a:bodyPr wrap="square" lIns="0" tIns="0" rIns="0" bIns="0" rtlCol="0" anchor="ctr"/>
-          <a:lstStyle/>
-          <a:p>
-            <a:pPr indent="0" marL="0">
-              <a:buNone/>
-            </a:pPr>
-            <a:r>
-              <a:rPr lang="en-US" sz="1650" b="1" dirty="0">
+          <p:cNvPr id="16" name="Text 12"/>
+          <p:cNvSpPr/>
+          <p:nvPr/>
+        </p:nvSpPr>
+        <p:spPr>
+          <a:xfrm>
+            <a:off x="3474720" y="4453128"/>
+            <a:ext cx="2450592" cy="365760"/>
+          </a:xfrm>
+          <a:prstGeom prst="rect">
+            <a:avLst/>
+          </a:prstGeom>
+          <a:noFill/>
+          <a:ln/>
+        </p:spPr>
+        <p:txBody>
+          <a:bodyPr wrap="square" lIns="0" tIns="0" rIns="0" bIns="0" rtlCol="0" anchor="ctr"/>
+          <a:lstStyle/>
+          <a:p>
+            <a:pPr algn="ctr" indent="0" marL="0">
+              <a:buNone/>
+            </a:pPr>
+            <a:r>
+              <a:rPr lang="en-US" sz="1500" b="1" dirty="0">
                 <a:solidFill>
                   <a:srgbClr val="1E293B"/>
                 </a:solidFill>
@@ -2961,38 +3145,41 @@
                 <a:ea typeface="Pretendard" pitchFamily="34" charset="-122"/>
                 <a:cs typeface="Pretendard" pitchFamily="34" charset="-120"/>
               </a:rPr>
-              <a:t>팀원끼리 익명으로 평가합니다</a:t>
-            </a:r>
-            <a:endParaRPr lang="en-US" sz="1650" dirty="0"/>
-          </a:p>
-        </p:txBody>
-      </p:sp>
-      <p:sp>
-        <p:nvSpPr>
-          <p:cNvPr id="14" name="Text 10"/>
-          <p:cNvSpPr/>
-          <p:nvPr/>
-        </p:nvSpPr>
-        <p:spPr>
-          <a:xfrm>
-            <a:off x="4626864" y="4206240"/>
-            <a:ext cx="6665976" cy="402336"/>
-          </a:xfrm>
-          <a:prstGeom prst="rect">
-            <a:avLst/>
-          </a:prstGeom>
-          <a:noFill/>
-          <a:ln/>
-        </p:spPr>
-        <p:txBody>
-          <a:bodyPr wrap="square" lIns="0" tIns="0" rIns="0" bIns="0" rtlCol="0" anchor="ctr"/>
-          <a:lstStyle/>
-          <a:p>
-            <a:pPr indent="0" marL="0">
-              <a:buNone/>
-            </a:pPr>
-            <a:r>
-              <a:rPr lang="en-US" sz="1250" dirty="0">
+              <a:t>익명 동료평가</a:t>
+            </a:r>
+            <a:endParaRPr lang="en-US" sz="1500" dirty="0"/>
+          </a:p>
+        </p:txBody>
+      </p:sp>
+      <p:sp>
+        <p:nvSpPr>
+          <p:cNvPr id="17" name="Text 13"/>
+          <p:cNvSpPr/>
+          <p:nvPr/>
+        </p:nvSpPr>
+        <p:spPr>
+          <a:xfrm>
+            <a:off x="3566160" y="4818888"/>
+            <a:ext cx="2267712" cy="512064"/>
+          </a:xfrm>
+          <a:prstGeom prst="rect">
+            <a:avLst/>
+          </a:prstGeom>
+          <a:noFill/>
+          <a:ln/>
+        </p:spPr>
+        <p:txBody>
+          <a:bodyPr wrap="square" lIns="0" tIns="0" rIns="0" bIns="0" rtlCol="0" anchor="ctr"/>
+          <a:lstStyle/>
+          <a:p>
+            <a:pPr algn="ctr" indent="0" marL="0">
+              <a:lnSpc>
+                <a:spcPct val="110000"/>
+              </a:lnSpc>
+              <a:buNone/>
+            </a:pPr>
+            <a:r>
+              <a:rPr lang="en-US" sz="1100" dirty="0">
                 <a:solidFill>
                   <a:srgbClr val="64748B"/>
                 </a:solidFill>
@@ -3000,26 +3187,85 @@
                 <a:ea typeface="Pretendard" pitchFamily="34" charset="-122"/>
                 <a:cs typeface="Pretendard" pitchFamily="34" charset="-120"/>
               </a:rPr>
-              <a:t>기여도·책임감·협업·소통 4개 항목</a:t>
-            </a:r>
-            <a:endParaRPr lang="en-US" sz="1250" dirty="0"/>
-          </a:p>
-        </p:txBody>
-      </p:sp>
-      <p:sp>
-        <p:nvSpPr>
-          <p:cNvPr id="15" name="Shape 11"/>
-          <p:cNvSpPr/>
-          <p:nvPr/>
-        </p:nvSpPr>
-        <p:spPr>
-          <a:xfrm>
-            <a:off x="3566160" y="4937760"/>
-            <a:ext cx="8001000" cy="914400"/>
+              <a:t>기여·책임·협업·소통</a:t>
+            </a:r>
+            <a:endParaRPr lang="en-US" sz="1100" dirty="0"/>
+          </a:p>
+          <a:p>
+            <a:pPr algn="ctr" indent="0" marL="0">
+              <a:lnSpc>
+                <a:spcPct val="110000"/>
+              </a:lnSpc>
+              <a:buNone/>
+            </a:pPr>
+            <a:r>
+              <a:rPr lang="en-US" sz="1100" dirty="0">
+                <a:solidFill>
+                  <a:srgbClr val="64748B"/>
+                </a:solidFill>
+                <a:latin typeface="Pretendard" pitchFamily="34" charset="0"/>
+                <a:ea typeface="Pretendard" pitchFamily="34" charset="-122"/>
+                <a:cs typeface="Pretendard" pitchFamily="34" charset="-120"/>
+              </a:rPr>
+              <a:t>4개 항목 평가</a:t>
+            </a:r>
+            <a:endParaRPr lang="en-US" sz="1100" dirty="0"/>
+          </a:p>
+        </p:txBody>
+      </p:sp>
+      <p:sp>
+        <p:nvSpPr>
+          <p:cNvPr id="18" name="Text 14"/>
+          <p:cNvSpPr/>
+          <p:nvPr/>
+        </p:nvSpPr>
+        <p:spPr>
+          <a:xfrm>
+            <a:off x="5879592" y="2880360"/>
+            <a:ext cx="548640" cy="2514600"/>
+          </a:xfrm>
+          <a:prstGeom prst="rect">
+            <a:avLst/>
+          </a:prstGeom>
+          <a:noFill/>
+          <a:ln/>
+        </p:spPr>
+        <p:txBody>
+          <a:bodyPr wrap="square" lIns="0" tIns="0" rIns="0" bIns="0" rtlCol="0" anchor="ctr"/>
+          <a:lstStyle/>
+          <a:p>
+            <a:pPr algn="ctr" indent="0" marL="0">
+              <a:buNone/>
+            </a:pPr>
+            <a:r>
+              <a:rPr lang="en-US" sz="3400" b="1" dirty="0">
+                <a:solidFill>
+                  <a:srgbClr val="6366F1"/>
+                </a:solidFill>
+                <a:latin typeface="Pretendard" pitchFamily="34" charset="0"/>
+                <a:ea typeface="Pretendard" pitchFamily="34" charset="-122"/>
+                <a:cs typeface="Pretendard" pitchFamily="34" charset="-120"/>
+              </a:rPr>
+              <a:t>›</a:t>
+            </a:r>
+            <a:endParaRPr lang="en-US" sz="3400" dirty="0"/>
+          </a:p>
+        </p:txBody>
+      </p:sp>
+      <p:sp>
+        <p:nvSpPr>
+          <p:cNvPr id="19" name="Shape 15"/>
+          <p:cNvSpPr/>
+          <p:nvPr/>
+        </p:nvSpPr>
+        <p:spPr>
+          <a:xfrm>
+            <a:off x="6382512" y="2880360"/>
+            <a:ext cx="2450592" cy="2514600"/>
           </a:xfrm>
           <a:prstGeom prst="roundRect">
             <a:avLst>
-              <a:gd name="adj" fmla="val 10000"/>
+              <a:gd name="adj" fmla="val 3731"/>
             </a:avLst>
           </a:prstGeom>
           <a:solidFill>
@@ -3037,27 +3283,66 @@
       </p:sp>
       <p:sp>
         <p:nvSpPr>
-          <p:cNvPr id="16" name="Shape 12"/>
-          <p:cNvSpPr/>
-          <p:nvPr/>
-        </p:nvSpPr>
-        <p:spPr>
-          <a:xfrm>
-            <a:off x="3803904" y="5120640"/>
-            <a:ext cx="548640" cy="548640"/>
+          <p:cNvPr id="20" name="Text 16"/>
+          <p:cNvSpPr/>
+          <p:nvPr/>
+        </p:nvSpPr>
+        <p:spPr>
+          <a:xfrm>
+            <a:off x="6565392" y="3081528"/>
+            <a:ext cx="914400" cy="365760"/>
+          </a:xfrm>
+          <a:prstGeom prst="rect">
+            <a:avLst/>
+          </a:prstGeom>
+          <a:noFill/>
+          <a:ln/>
+        </p:spPr>
+        <p:txBody>
+          <a:bodyPr wrap="square" lIns="0" tIns="0" rIns="0" bIns="0" rtlCol="0" anchor="ctr"/>
+          <a:lstStyle/>
+          <a:p>
+            <a:pPr indent="0" marL="0">
+              <a:buNone/>
+            </a:pPr>
+            <a:r>
+              <a:rPr lang="en-US" sz="1500" b="1" dirty="0">
+                <a:solidFill>
+                  <a:srgbClr val="6366F1"/>
+                </a:solidFill>
+                <a:latin typeface="Pretendard" pitchFamily="34" charset="0"/>
+                <a:ea typeface="Pretendard" pitchFamily="34" charset="-122"/>
+                <a:cs typeface="Pretendard" pitchFamily="34" charset="-120"/>
+              </a:rPr>
+              <a:t>03</a:t>
+            </a:r>
+            <a:endParaRPr lang="en-US" sz="1500" dirty="0"/>
+          </a:p>
+        </p:txBody>
+      </p:sp>
+      <p:sp>
+        <p:nvSpPr>
+          <p:cNvPr id="21" name="Shape 17"/>
+          <p:cNvSpPr/>
+          <p:nvPr/>
+        </p:nvSpPr>
+        <p:spPr>
+          <a:xfrm>
+            <a:off x="7196328" y="3520440"/>
+            <a:ext cx="822960" cy="822960"/>
           </a:xfrm>
           <a:prstGeom prst="ellipse">
             <a:avLst/>
           </a:prstGeom>
           <a:solidFill>
-            <a:srgbClr val="EEF0FF"/>
+            <a:srgbClr val="4F46E5"/>
           </a:solidFill>
           <a:ln/>
         </p:spPr>
       </p:sp>
       <p:pic>
         <p:nvPicPr>
-          <p:cNvPr id="17" name="Image 2" descr="preencoded.png">    </p:cNvPr>
+          <p:cNvPr id="22" name="Image 2" descr="preencoded.png">    </p:cNvPr>
           <p:cNvPicPr>
             <a:picLocks noChangeAspect="1"/>
           </p:cNvPicPr>
@@ -3071,8 +3356,8 @@
         </p:blipFill>
         <p:spPr>
           <a:xfrm>
-            <a:off x="3941064" y="5257800"/>
-            <a:ext cx="274320" cy="274320"/>
+            <a:off x="7402068" y="3726180"/>
+            <a:ext cx="411480" cy="411480"/>
           </a:xfrm>
           <a:prstGeom prst="rect">
             <a:avLst/>
@@ -3081,30 +3366,30 @@
       </p:pic>
       <p:sp>
         <p:nvSpPr>
-          <p:cNvPr id="18" name="Text 13"/>
-          <p:cNvSpPr/>
-          <p:nvPr/>
-        </p:nvSpPr>
-        <p:spPr>
-          <a:xfrm>
-            <a:off x="4626864" y="5065776"/>
-            <a:ext cx="6665976" cy="438912"/>
-          </a:xfrm>
-          <a:prstGeom prst="rect">
-            <a:avLst/>
-          </a:prstGeom>
-          <a:noFill/>
-          <a:ln/>
-        </p:spPr>
-        <p:txBody>
-          <a:bodyPr wrap="square" lIns="0" tIns="0" rIns="0" bIns="0" rtlCol="0" anchor="ctr"/>
-          <a:lstStyle/>
-          <a:p>
-            <a:pPr indent="0" marL="0">
-              <a:buNone/>
-            </a:pPr>
-            <a:r>
-              <a:rPr lang="en-US" sz="1650" b="1" dirty="0">
+          <p:cNvPr id="23" name="Text 18"/>
+          <p:cNvSpPr/>
+          <p:nvPr/>
+        </p:nvSpPr>
+        <p:spPr>
+          <a:xfrm>
+            <a:off x="6382512" y="4453128"/>
+            <a:ext cx="2450592" cy="365760"/>
+          </a:xfrm>
+          <a:prstGeom prst="rect">
+            <a:avLst/>
+          </a:prstGeom>
+          <a:noFill/>
+          <a:ln/>
+        </p:spPr>
+        <p:txBody>
+          <a:bodyPr wrap="square" lIns="0" tIns="0" rIns="0" bIns="0" rtlCol="0" anchor="ctr"/>
+          <a:lstStyle/>
+          <a:p>
+            <a:pPr algn="ctr" indent="0" marL="0">
+              <a:buNone/>
+            </a:pPr>
+            <a:r>
+              <a:rPr lang="en-US" sz="1500" b="1" dirty="0">
                 <a:solidFill>
                   <a:srgbClr val="1E293B"/>
                 </a:solidFill>
@@ -3112,38 +3397,41 @@
                 <a:ea typeface="Pretendard" pitchFamily="34" charset="-122"/>
                 <a:cs typeface="Pretendard" pitchFamily="34" charset="-120"/>
               </a:rPr>
-              <a:t>AI가 교차검증해 리포트를 만듭니다</a:t>
-            </a:r>
-            <a:endParaRPr lang="en-US" sz="1650" dirty="0"/>
-          </a:p>
-        </p:txBody>
-      </p:sp>
-      <p:sp>
-        <p:nvSpPr>
-          <p:cNvPr id="19" name="Text 14"/>
-          <p:cNvSpPr/>
-          <p:nvPr/>
-        </p:nvSpPr>
-        <p:spPr>
-          <a:xfrm>
-            <a:off x="4626864" y="5303520"/>
-            <a:ext cx="6665976" cy="402336"/>
-          </a:xfrm>
-          <a:prstGeom prst="rect">
-            <a:avLst/>
-          </a:prstGeom>
-          <a:noFill/>
-          <a:ln/>
-        </p:spPr>
-        <p:txBody>
-          <a:bodyPr wrap="square" lIns="0" tIns="0" rIns="0" bIns="0" rtlCol="0" anchor="ctr"/>
-          <a:lstStyle/>
-          <a:p>
-            <a:pPr indent="0" marL="0">
-              <a:buNone/>
-            </a:pPr>
-            <a:r>
-              <a:rPr lang="en-US" sz="1250" dirty="0">
+              <a:t>AI 교차검증</a:t>
+            </a:r>
+            <a:endParaRPr lang="en-US" sz="1500" dirty="0"/>
+          </a:p>
+        </p:txBody>
+      </p:sp>
+      <p:sp>
+        <p:nvSpPr>
+          <p:cNvPr id="24" name="Text 19"/>
+          <p:cNvSpPr/>
+          <p:nvPr/>
+        </p:nvSpPr>
+        <p:spPr>
+          <a:xfrm>
+            <a:off x="6473952" y="4818888"/>
+            <a:ext cx="2267712" cy="512064"/>
+          </a:xfrm>
+          <a:prstGeom prst="rect">
+            <a:avLst/>
+          </a:prstGeom>
+          <a:noFill/>
+          <a:ln/>
+        </p:spPr>
+        <p:txBody>
+          <a:bodyPr wrap="square" lIns="0" tIns="0" rIns="0" bIns="0" rtlCol="0" anchor="ctr"/>
+          <a:lstStyle/>
+          <a:p>
+            <a:pPr algn="ctr" indent="0" marL="0">
+              <a:lnSpc>
+                <a:spcPct val="110000"/>
+              </a:lnSpc>
+              <a:buNone/>
+            </a:pPr>
+            <a:r>
+              <a:rPr lang="en-US" sz="1100" dirty="0">
                 <a:solidFill>
                   <a:srgbClr val="64748B"/>
                 </a:solidFill>
@@ -3151,27 +3439,152 @@
                 <a:ea typeface="Pretendard" pitchFamily="34" charset="-122"/>
                 <a:cs typeface="Pretendard" pitchFamily="34" charset="-120"/>
               </a:rPr>
-              <a:t>본인 기록과 동료평가를 대조해 근거 문서 생성</a:t>
-            </a:r>
-            <a:endParaRPr lang="en-US" sz="1250" dirty="0"/>
-          </a:p>
-        </p:txBody>
-      </p:sp>
-      <p:sp>
-        <p:nvSpPr>
-          <p:cNvPr id="20" name="Shape 15"/>
-          <p:cNvSpPr/>
-          <p:nvPr/>
-        </p:nvSpPr>
-        <p:spPr>
-          <a:xfrm>
-            <a:off x="3566160" y="6071616"/>
-            <a:ext cx="8001000" cy="475488"/>
+              <a:t>기록 vs 평가를</a:t>
+            </a:r>
+            <a:endParaRPr lang="en-US" sz="1100" dirty="0"/>
+          </a:p>
+          <a:p>
+            <a:pPr algn="ctr" indent="0" marL="0">
+              <a:lnSpc>
+                <a:spcPct val="110000"/>
+              </a:lnSpc>
+              <a:buNone/>
+            </a:pPr>
+            <a:r>
+              <a:rPr lang="en-US" sz="1100" dirty="0">
+                <a:solidFill>
+                  <a:srgbClr val="64748B"/>
+                </a:solidFill>
+                <a:latin typeface="Pretendard" pitchFamily="34" charset="0"/>
+                <a:ea typeface="Pretendard" pitchFamily="34" charset="-122"/>
+                <a:cs typeface="Pretendard" pitchFamily="34" charset="-120"/>
+              </a:rPr>
+              <a:t>대조·분석</a:t>
+            </a:r>
+            <a:endParaRPr lang="en-US" sz="1100" dirty="0"/>
+          </a:p>
+        </p:txBody>
+      </p:sp>
+      <p:sp>
+        <p:nvSpPr>
+          <p:cNvPr id="25" name="Text 20"/>
+          <p:cNvSpPr/>
+          <p:nvPr/>
+        </p:nvSpPr>
+        <p:spPr>
+          <a:xfrm>
+            <a:off x="8787384" y="2880360"/>
+            <a:ext cx="548640" cy="2514600"/>
+          </a:xfrm>
+          <a:prstGeom prst="rect">
+            <a:avLst/>
+          </a:prstGeom>
+          <a:noFill/>
+          <a:ln/>
+        </p:spPr>
+        <p:txBody>
+          <a:bodyPr wrap="square" lIns="0" tIns="0" rIns="0" bIns="0" rtlCol="0" anchor="ctr"/>
+          <a:lstStyle/>
+          <a:p>
+            <a:pPr algn="ctr" indent="0" marL="0">
+              <a:buNone/>
+            </a:pPr>
+            <a:r>
+              <a:rPr lang="en-US" sz="3400" b="1" dirty="0">
+                <a:solidFill>
+                  <a:srgbClr val="6366F1"/>
+                </a:solidFill>
+                <a:latin typeface="Pretendard" pitchFamily="34" charset="0"/>
+                <a:ea typeface="Pretendard" pitchFamily="34" charset="-122"/>
+                <a:cs typeface="Pretendard" pitchFamily="34" charset="-120"/>
+              </a:rPr>
+              <a:t>›</a:t>
+            </a:r>
+            <a:endParaRPr lang="en-US" sz="3400" dirty="0"/>
+          </a:p>
+        </p:txBody>
+      </p:sp>
+      <p:sp>
+        <p:nvSpPr>
+          <p:cNvPr id="26" name="Shape 21"/>
+          <p:cNvSpPr/>
+          <p:nvPr/>
+        </p:nvSpPr>
+        <p:spPr>
+          <a:xfrm>
+            <a:off x="9290304" y="2880360"/>
+            <a:ext cx="2450592" cy="2514600"/>
           </a:xfrm>
           <a:prstGeom prst="roundRect">
             <a:avLst>
-              <a:gd name="adj" fmla="val 19231"/>
+              <a:gd name="adj" fmla="val 3731"/>
             </a:avLst>
+          </a:prstGeom>
+          <a:solidFill>
+            <a:srgbClr val="FFFFFF"/>
+          </a:solidFill>
+          <a:ln/>
+          <a:effectLst>
+            <a:outerShdw sx="100000" sy="100000" kx="0" ky="0" algn="bl" rotWithShape="0" blurRad="101600" dist="25400" dir="5400000">
+              <a:srgbClr val="000000">
+                <a:alpha val="10000"/>
+              </a:srgbClr>
+            </a:outerShdw>
+          </a:effectLst>
+        </p:spPr>
+      </p:sp>
+      <p:sp>
+        <p:nvSpPr>
+          <p:cNvPr id="27" name="Text 22"/>
+          <p:cNvSpPr/>
+          <p:nvPr/>
+        </p:nvSpPr>
+        <p:spPr>
+          <a:xfrm>
+            <a:off x="9473184" y="3081528"/>
+            <a:ext cx="914400" cy="365760"/>
+          </a:xfrm>
+          <a:prstGeom prst="rect">
+            <a:avLst/>
+          </a:prstGeom>
+          <a:noFill/>
+          <a:ln/>
+        </p:spPr>
+        <p:txBody>
+          <a:bodyPr wrap="square" lIns="0" tIns="0" rIns="0" bIns="0" rtlCol="0" anchor="ctr"/>
+          <a:lstStyle/>
+          <a:p>
+            <a:pPr indent="0" marL="0">
+              <a:buNone/>
+            </a:pPr>
+            <a:r>
+              <a:rPr lang="en-US" sz="1500" b="1" dirty="0">
+                <a:solidFill>
+                  <a:srgbClr val="6366F1"/>
+                </a:solidFill>
+                <a:latin typeface="Pretendard" pitchFamily="34" charset="0"/>
+                <a:ea typeface="Pretendard" pitchFamily="34" charset="-122"/>
+                <a:cs typeface="Pretendard" pitchFamily="34" charset="-120"/>
+              </a:rPr>
+              <a:t>04</a:t>
+            </a:r>
+            <a:endParaRPr lang="en-US" sz="1500" dirty="0"/>
+          </a:p>
+        </p:txBody>
+      </p:sp>
+      <p:sp>
+        <p:nvSpPr>
+          <p:cNvPr id="28" name="Shape 23"/>
+          <p:cNvSpPr/>
+          <p:nvPr/>
+        </p:nvSpPr>
+        <p:spPr>
+          <a:xfrm>
+            <a:off x="10104120" y="3520440"/>
+            <a:ext cx="822960" cy="822960"/>
+          </a:xfrm>
+          <a:prstGeom prst="ellipse">
+            <a:avLst/>
           </a:prstGeom>
           <a:solidFill>
             <a:srgbClr val="4F46E5"/>
@@ -3179,77 +3592,9 @@
           <a:ln/>
         </p:spPr>
       </p:sp>
-      <p:sp>
-        <p:nvSpPr>
-          <p:cNvPr id="21" name="Text 16"/>
-          <p:cNvSpPr/>
-          <p:nvPr/>
-        </p:nvSpPr>
-        <p:spPr>
-          <a:xfrm>
-            <a:off x="3566160" y="6071616"/>
-            <a:ext cx="8001000" cy="475488"/>
-          </a:xfrm>
-          <a:prstGeom prst="rect">
-            <a:avLst/>
-          </a:prstGeom>
-          <a:noFill/>
-          <a:ln/>
-        </p:spPr>
-        <p:txBody>
-          <a:bodyPr wrap="square" lIns="0" tIns="0" rIns="0" bIns="0" rtlCol="0" anchor="ctr"/>
-          <a:lstStyle/>
-          <a:p>
-            <a:pPr algn="ctr" indent="0" marL="0">
-              <a:buNone/>
-            </a:pPr>
-            <a:r>
-              <a:rPr lang="en-US" sz="1450" b="1" dirty="0">
-                <a:solidFill>
-                  <a:srgbClr val="FFFFFF"/>
-                </a:solidFill>
-                <a:latin typeface="Pretendard" pitchFamily="34" charset="0"/>
-                <a:ea typeface="Pretendard" pitchFamily="34" charset="-122"/>
-                <a:cs typeface="Pretendard" pitchFamily="34" charset="-120"/>
-              </a:rPr>
-              <a:t>정리된 근거가 교수님 대시보드에 표시됩니다</a:t>
-            </a:r>
-            <a:endParaRPr lang="en-US" sz="1450" dirty="0"/>
-          </a:p>
-        </p:txBody>
-      </p:sp>
-      <p:sp>
-        <p:nvSpPr>
-          <p:cNvPr id="22" name="Shape 17"/>
-          <p:cNvSpPr/>
-          <p:nvPr/>
-        </p:nvSpPr>
-        <p:spPr>
-          <a:xfrm>
-            <a:off x="566928" y="502920"/>
-            <a:ext cx="2715672" cy="5806440"/>
-          </a:xfrm>
-          <a:prstGeom prst="roundRect">
-            <a:avLst>
-              <a:gd name="adj" fmla="val 12795"/>
-            </a:avLst>
-          </a:prstGeom>
-          <a:solidFill>
-            <a:srgbClr val="0B0B11"/>
-          </a:solidFill>
-          <a:ln/>
-          <a:effectLst>
-            <a:outerShdw sx="100000" sy="100000" kx="0" ky="0" algn="bl" rotWithShape="0" blurRad="165100" dist="63500" dir="5400000">
-              <a:srgbClr val="000000">
-                <a:alpha val="28000"/>
-              </a:srgbClr>
-            </a:outerShdw>
-          </a:effectLst>
-        </p:spPr>
-      </p:sp>
       <p:pic>
         <p:nvPicPr>
-          <p:cNvPr id="23" name="Image 3" descr="C:/Users/HP15~1/AppData/Local/Temp/claude/C--Users-HP-15-Desktop-Hackathon/e11a162a-fd90-4cff-922b-c82073c29db3/scratchpad/deck/assets/dev_home.png">    </p:cNvPr>
+          <p:cNvPr id="29" name="Image 3" descr="preencoded.png">    </p:cNvPr>
           <p:cNvPicPr>
             <a:picLocks noChangeAspect="1"/>
           </p:cNvPicPr>
@@ -3263,8 +3608,8 @@
         </p:blipFill>
         <p:spPr>
           <a:xfrm>
-            <a:off x="566928" y="502920"/>
-            <a:ext cx="2715672" cy="5806440"/>
+            <a:off x="10309860" y="3726180"/>
+            <a:ext cx="411480" cy="411480"/>
           </a:xfrm>
           <a:prstGeom prst="rect">
             <a:avLst/>
@@ -3273,7 +3618,169 @@
       </p:pic>
       <p:sp>
         <p:nvSpPr>
-          <p:cNvPr id="24" name="Text 18"/>
+          <p:cNvPr id="30" name="Text 24"/>
+          <p:cNvSpPr/>
+          <p:nvPr/>
+        </p:nvSpPr>
+        <p:spPr>
+          <a:xfrm>
+            <a:off x="9290304" y="4453128"/>
+            <a:ext cx="2450592" cy="365760"/>
+          </a:xfrm>
+          <a:prstGeom prst="rect">
+            <a:avLst/>
+          </a:prstGeom>
+          <a:noFill/>
+          <a:ln/>
+        </p:spPr>
+        <p:txBody>
+          <a:bodyPr wrap="square" lIns="0" tIns="0" rIns="0" bIns="0" rtlCol="0" anchor="ctr"/>
+          <a:lstStyle/>
+          <a:p>
+            <a:pPr algn="ctr" indent="0" marL="0">
+              <a:buNone/>
+            </a:pPr>
+            <a:r>
+              <a:rPr lang="en-US" sz="1500" b="1" dirty="0">
+                <a:solidFill>
+                  <a:srgbClr val="1E293B"/>
+                </a:solidFill>
+                <a:latin typeface="Pretendard" pitchFamily="34" charset="0"/>
+                <a:ea typeface="Pretendard" pitchFamily="34" charset="-122"/>
+                <a:cs typeface="Pretendard" pitchFamily="34" charset="-120"/>
+              </a:rPr>
+              <a:t>교수 대시보드</a:t>
+            </a:r>
+            <a:endParaRPr lang="en-US" sz="1500" dirty="0"/>
+          </a:p>
+        </p:txBody>
+      </p:sp>
+      <p:sp>
+        <p:nvSpPr>
+          <p:cNvPr id="31" name="Text 25"/>
+          <p:cNvSpPr/>
+          <p:nvPr/>
+        </p:nvSpPr>
+        <p:spPr>
+          <a:xfrm>
+            <a:off x="9381744" y="4818888"/>
+            <a:ext cx="2267712" cy="512064"/>
+          </a:xfrm>
+          <a:prstGeom prst="rect">
+            <a:avLst/>
+          </a:prstGeom>
+          <a:noFill/>
+          <a:ln/>
+        </p:spPr>
+        <p:txBody>
+          <a:bodyPr wrap="square" lIns="0" tIns="0" rIns="0" bIns="0" rtlCol="0" anchor="ctr"/>
+          <a:lstStyle/>
+          <a:p>
+            <a:pPr algn="ctr" indent="0" marL="0">
+              <a:lnSpc>
+                <a:spcPct val="110000"/>
+              </a:lnSpc>
+              <a:buNone/>
+            </a:pPr>
+            <a:r>
+              <a:rPr lang="en-US" sz="1100" dirty="0">
+                <a:solidFill>
+                  <a:srgbClr val="64748B"/>
+                </a:solidFill>
+                <a:latin typeface="Pretendard" pitchFamily="34" charset="0"/>
+                <a:ea typeface="Pretendard" pitchFamily="34" charset="-122"/>
+                <a:cs typeface="Pretendard" pitchFamily="34" charset="-120"/>
+              </a:rPr>
+              <a:t>근거·플래그로</a:t>
+            </a:r>
+            <a:endParaRPr lang="en-US" sz="1100" dirty="0"/>
+          </a:p>
+          <a:p>
+            <a:pPr algn="ctr" indent="0" marL="0">
+              <a:lnSpc>
+                <a:spcPct val="110000"/>
+              </a:lnSpc>
+              <a:buNone/>
+            </a:pPr>
+            <a:r>
+              <a:rPr lang="en-US" sz="1100" dirty="0">
+                <a:solidFill>
+                  <a:srgbClr val="64748B"/>
+                </a:solidFill>
+                <a:latin typeface="Pretendard" pitchFamily="34" charset="0"/>
+                <a:ea typeface="Pretendard" pitchFamily="34" charset="-122"/>
+                <a:cs typeface="Pretendard" pitchFamily="34" charset="-120"/>
+              </a:rPr>
+              <a:t>공정하게 평가</a:t>
+            </a:r>
+            <a:endParaRPr lang="en-US" sz="1100" dirty="0"/>
+          </a:p>
+        </p:txBody>
+      </p:sp>
+      <p:sp>
+        <p:nvSpPr>
+          <p:cNvPr id="32" name="Shape 26"/>
+          <p:cNvSpPr/>
+          <p:nvPr/>
+        </p:nvSpPr>
+        <p:spPr>
+          <a:xfrm>
+            <a:off x="566928" y="5650992"/>
+            <a:ext cx="11064240" cy="566928"/>
+          </a:xfrm>
+          <a:prstGeom prst="roundRect">
+            <a:avLst>
+              <a:gd name="adj" fmla="val 16129"/>
+            </a:avLst>
+          </a:prstGeom>
+          <a:solidFill>
+            <a:srgbClr val="4F46E5"/>
+          </a:solidFill>
+          <a:ln/>
+        </p:spPr>
+      </p:sp>
+      <p:sp>
+        <p:nvSpPr>
+          <p:cNvPr id="33" name="Text 27"/>
+          <p:cNvSpPr/>
+          <p:nvPr/>
+        </p:nvSpPr>
+        <p:spPr>
+          <a:xfrm>
+            <a:off x="566928" y="5650992"/>
+            <a:ext cx="11064240" cy="566928"/>
+          </a:xfrm>
+          <a:prstGeom prst="rect">
+            <a:avLst/>
+          </a:prstGeom>
+          <a:noFill/>
+          <a:ln/>
+        </p:spPr>
+        <p:txBody>
+          <a:bodyPr wrap="square" lIns="0" tIns="0" rIns="0" bIns="0" rtlCol="0" anchor="ctr"/>
+          <a:lstStyle/>
+          <a:p>
+            <a:pPr algn="ctr" indent="0" marL="0">
+              <a:buNone/>
+            </a:pPr>
+            <a:r>
+              <a:rPr lang="en-US" sz="1400" b="1" dirty="0">
+                <a:solidFill>
+                  <a:srgbClr val="FFFFFF"/>
+                </a:solidFill>
+                <a:latin typeface="Pretendard" pitchFamily="34" charset="0"/>
+                <a:ea typeface="Pretendard" pitchFamily="34" charset="-122"/>
+                <a:cs typeface="Pretendard" pitchFamily="34" charset="-120"/>
+              </a:rPr>
+              <a:t>말이 아닌 '데이터'로 기여를 증명합니다 — 정리된 근거가 교수님 대시보드에 그대로 표시됩니다</a:t>
+            </a:r>
+            <a:endParaRPr lang="en-US" sz="1400" dirty="0"/>
+          </a:p>
+        </p:txBody>
+      </p:sp>
+      <p:sp>
+        <p:nvSpPr>
+          <p:cNvPr id="34" name="Text 28"/>
           <p:cNvSpPr/>
           <p:nvPr/>
         </p:nvSpPr>
@@ -3312,7 +3819,7 @@
       </p:sp>
       <p:sp>
         <p:nvSpPr>
-          <p:cNvPr id="25" name="Text 19"/>
+          <p:cNvPr id="35" name="Text 29"/>
           <p:cNvSpPr/>
           <p:nvPr/>
         </p:nvSpPr>
@@ -3389,8 +3896,8 @@
         </p:nvSpPr>
         <p:spPr>
           <a:xfrm>
-            <a:off x="3566160" y="566928"/>
-            <a:ext cx="8229600" cy="310896"/>
+            <a:off x="3566160" y="548640"/>
+            <a:ext cx="9144000" cy="310896"/>
           </a:xfrm>
           <a:prstGeom prst="rect">
             <a:avLst/>
@@ -3428,7 +3935,7 @@
                 <a:ea typeface="Pretendard" pitchFamily="34" charset="-122"/>
                 <a:cs typeface="Pretendard" pitchFamily="34" charset="-120"/>
               </a:rPr>
-              <a:t>FEATURES · 주요 기능</a:t>
+              <a:t>KEY FEATURES · 주요 기능</a:t>
             </a:r>
             <a:endParaRPr lang="en-US" sz="1100" dirty="0"/>
           </a:p>
@@ -3442,7 +3949,7 @@
         </p:nvSpPr>
         <p:spPr>
           <a:xfrm>
-            <a:off x="3566160" y="914400"/>
+            <a:off x="3566160" y="896112"/>
             <a:ext cx="8001000" cy="1371600"/>
           </a:xfrm>
           <a:prstGeom prst="rect">
@@ -3462,7 +3969,7 @@
               <a:buNone/>
             </a:pPr>
             <a:r>
-              <a:rPr lang="en-US" sz="3200" b="1" spc="-30" kern="0" dirty="0">
+              <a:rPr lang="en-US" sz="3000" b="1" spc="-30" kern="0" dirty="0">
                 <a:solidFill>
                   <a:srgbClr val="1E293B"/>
                 </a:solidFill>
@@ -3470,11 +3977,8 @@
                 <a:ea typeface="Pretendard" pitchFamily="34" charset="-122"/>
                 <a:cs typeface="Pretendard" pitchFamily="34" charset="-120"/>
               </a:rPr>
-              <a:t>학생의 기록부터</a:t>
-            </a:r>
-            <a:endParaRPr lang="en-US" sz="3200" dirty="0"/>
-          </a:p>
-          <a:p>
+              <a:t>무임승차는 앱이 </a:t>
+            </a:r>
             <a:pPr algn="l" indent="0" marL="0">
               <a:lnSpc>
                 <a:spcPct val="103000"/>
@@ -3482,51 +3986,73 @@
               <a:buNone/>
             </a:pPr>
             <a:r>
-              <a:rPr lang="en-US" sz="3200" b="1" spc="-30" kern="0" dirty="0">
-                <a:solidFill>
-                  <a:srgbClr val="4F46E5"/>
-                </a:solidFill>
-                <a:latin typeface="Pretendard" pitchFamily="34" charset="0"/>
-                <a:ea typeface="Pretendard" pitchFamily="34" charset="-122"/>
-                <a:cs typeface="Pretendard" pitchFamily="34" charset="-120"/>
-              </a:rPr>
-              <a:t>교수의 평가까지</a:t>
-            </a:r>
-            <a:pPr algn="l" indent="0" marL="0">
-              <a:lnSpc>
-                <a:spcPct val="103000"/>
-              </a:lnSpc>
-              <a:buNone/>
-            </a:pPr>
-            <a:r>
-              <a:rPr lang="en-US" sz="3200" b="1" spc="-30" kern="0" dirty="0">
-                <a:solidFill>
-                  <a:srgbClr val="1E293B"/>
-                </a:solidFill>
-                <a:latin typeface="Pretendard" pitchFamily="34" charset="0"/>
-                <a:ea typeface="Pretendard" pitchFamily="34" charset="-122"/>
-                <a:cs typeface="Pretendard" pitchFamily="34" charset="-120"/>
-              </a:rPr>
-              <a:t>, 한 앱에서</a:t>
-            </a:r>
-            <a:endParaRPr lang="en-US" sz="3200" dirty="0"/>
-          </a:p>
-        </p:txBody>
-      </p:sp>
-      <p:sp>
-        <p:nvSpPr>
-          <p:cNvPr id="4" name="Shape 2"/>
-          <p:cNvSpPr/>
-          <p:nvPr/>
-        </p:nvSpPr>
-        <p:spPr>
-          <a:xfrm>
-            <a:off x="3566160" y="2286000"/>
-            <a:ext cx="8001000" cy="1700784"/>
+              <a:rPr lang="en-US" sz="3000" b="1" spc="-30" kern="0" dirty="0">
+                <a:solidFill>
+                  <a:srgbClr val="DC2626"/>
+                </a:solidFill>
+                <a:latin typeface="Pretendard" pitchFamily="34" charset="0"/>
+                <a:ea typeface="Pretendard" pitchFamily="34" charset="-122"/>
+                <a:cs typeface="Pretendard" pitchFamily="34" charset="-120"/>
+              </a:rPr>
+              <a:t>먼저 찾아냅니다</a:t>
+            </a:r>
+            <a:endParaRPr lang="en-US" sz="3000" dirty="0"/>
+          </a:p>
+        </p:txBody>
+      </p:sp>
+      <p:sp>
+        <p:nvSpPr>
+          <p:cNvPr id="4" name="Text 2"/>
+          <p:cNvSpPr/>
+          <p:nvPr/>
+        </p:nvSpPr>
+        <p:spPr>
+          <a:xfrm>
+            <a:off x="3566160" y="1536192"/>
+            <a:ext cx="8001000" cy="365760"/>
+          </a:xfrm>
+          <a:prstGeom prst="rect">
+            <a:avLst/>
+          </a:prstGeom>
+          <a:noFill/>
+          <a:ln/>
+        </p:spPr>
+        <p:txBody>
+          <a:bodyPr wrap="square" lIns="0" tIns="0" rIns="0" bIns="0" rtlCol="0" anchor="ctr"/>
+          <a:lstStyle/>
+          <a:p>
+            <a:pPr indent="0" marL="0">
+              <a:buNone/>
+            </a:pPr>
+            <a:r>
+              <a:rPr lang="en-US" sz="1400" dirty="0">
+                <a:solidFill>
+                  <a:srgbClr val="64748B"/>
+                </a:solidFill>
+                <a:latin typeface="Pretendard" pitchFamily="34" charset="0"/>
+                <a:ea typeface="Pretendard" pitchFamily="34" charset="-122"/>
+                <a:cs typeface="Pretendard" pitchFamily="34" charset="-120"/>
+              </a:rPr>
+              <a:t>기록과 평가를 교차검증해 자동으로 잡아냅니다</a:t>
+            </a:r>
+            <a:endParaRPr lang="en-US" sz="1400" dirty="0"/>
+          </a:p>
+        </p:txBody>
+      </p:sp>
+      <p:sp>
+        <p:nvSpPr>
+          <p:cNvPr id="5" name="Shape 3"/>
+          <p:cNvSpPr/>
+          <p:nvPr/>
+        </p:nvSpPr>
+        <p:spPr>
+          <a:xfrm>
+            <a:off x="3566160" y="2084832"/>
+            <a:ext cx="8001000" cy="859536"/>
           </a:xfrm>
           <a:prstGeom prst="roundRect">
             <a:avLst>
-              <a:gd name="adj" fmla="val 5376"/>
+              <a:gd name="adj" fmla="val 10638"/>
             </a:avLst>
           </a:prstGeom>
           <a:solidFill>
@@ -3544,27 +4070,27 @@
       </p:sp>
       <p:sp>
         <p:nvSpPr>
-          <p:cNvPr id="5" name="Shape 3"/>
-          <p:cNvSpPr/>
-          <p:nvPr/>
-        </p:nvSpPr>
-        <p:spPr>
-          <a:xfrm>
-            <a:off x="3822192" y="2523744"/>
-            <a:ext cx="512064" cy="512064"/>
+          <p:cNvPr id="6" name="Shape 4"/>
+          <p:cNvSpPr/>
+          <p:nvPr/>
+        </p:nvSpPr>
+        <p:spPr>
+          <a:xfrm>
+            <a:off x="3785616" y="2249424"/>
+            <a:ext cx="530352" cy="530352"/>
           </a:xfrm>
           <a:prstGeom prst="ellipse">
             <a:avLst/>
           </a:prstGeom>
           <a:solidFill>
-            <a:srgbClr val="EEF0FF"/>
+            <a:srgbClr val="FEE2E2"/>
           </a:solidFill>
           <a:ln/>
         </p:spPr>
       </p:sp>
       <p:pic>
         <p:nvPicPr>
-          <p:cNvPr id="6" name="Image 0" descr="preencoded.png">    </p:cNvPr>
+          <p:cNvPr id="7" name="Image 0" descr="preencoded.png">    </p:cNvPr>
           <p:cNvPicPr>
             <a:picLocks noChangeAspect="1"/>
           </p:cNvPicPr>
@@ -3578,8 +4104,8 @@
         </p:blipFill>
         <p:spPr>
           <a:xfrm>
-            <a:off x="3950208" y="2651760"/>
-            <a:ext cx="256032" cy="256032"/>
+            <a:off x="3918204" y="2382012"/>
+            <a:ext cx="265176" cy="265176"/>
           </a:xfrm>
           <a:prstGeom prst="rect">
             <a:avLst/>
@@ -3588,14 +4114,14 @@
       </p:pic>
       <p:sp>
         <p:nvSpPr>
-          <p:cNvPr id="7" name="Text 4"/>
-          <p:cNvSpPr/>
-          <p:nvPr/>
-        </p:nvSpPr>
-        <p:spPr>
-          <a:xfrm>
-            <a:off x="4535424" y="2487168"/>
-            <a:ext cx="6720840" cy="457200"/>
+          <p:cNvPr id="8" name="Text 5"/>
+          <p:cNvSpPr/>
+          <p:nvPr/>
+        </p:nvSpPr>
+        <p:spPr>
+          <a:xfrm>
+            <a:off x="4553712" y="2203704"/>
+            <a:ext cx="6739128" cy="402336"/>
           </a:xfrm>
           <a:prstGeom prst="rect">
             <a:avLst/>
@@ -3611,7 +4137,7 @@
               <a:buNone/>
             </a:pPr>
             <a:r>
-              <a:rPr lang="en-US" sz="1600" b="1" dirty="0">
+              <a:rPr lang="en-US" sz="1550" b="1" dirty="0">
                 <a:solidFill>
                   <a:srgbClr val="1E293B"/>
                 </a:solidFill>
@@ -3619,42 +4145,52 @@
                 <a:ea typeface="Pretendard" pitchFamily="34" charset="-122"/>
                 <a:cs typeface="Pretendard" pitchFamily="34" charset="-120"/>
               </a:rPr>
-              <a:t>학생 화면</a:t>
-            </a:r>
-            <a:endParaRPr lang="en-US" sz="1600" dirty="0"/>
-          </a:p>
-        </p:txBody>
-      </p:sp>
-      <p:sp>
-        <p:nvSpPr>
-          <p:cNvPr id="8" name="Text 5"/>
-          <p:cNvSpPr/>
-          <p:nvPr/>
-        </p:nvSpPr>
-        <p:spPr>
-          <a:xfrm>
-            <a:off x="3886200" y="3072384"/>
-            <a:ext cx="7360920" cy="786384"/>
-          </a:xfrm>
-          <a:prstGeom prst="rect">
-            <a:avLst/>
-          </a:prstGeom>
-          <a:noFill/>
-          <a:ln/>
-        </p:spPr>
-        <p:txBody>
-          <a:bodyPr wrap="square" lIns="0" tIns="0" rIns="0" bIns="0" rtlCol="0" anchor="t"/>
-          <a:lstStyle/>
-          <a:p>
-            <a:pPr marL="177800" indent="-177800">
-              <a:spcAft>
-                <a:spcPts val="400"/>
-              </a:spcAft>
-              <a:buSzPct val="100000"/>
-              <a:buChar char="•"/>
-            </a:pPr>
-            <a:r>
-              <a:rPr lang="en-US" sz="1300" dirty="0">
+              <a:t>교차검증 플래그</a:t>
+            </a:r>
+            <a:pPr indent="0" marL="0">
+              <a:buNone/>
+            </a:pPr>
+            <a:r>
+              <a:rPr lang="en-US" sz="1100" b="1" dirty="0">
+                <a:solidFill>
+                  <a:srgbClr val="DC2626"/>
+                </a:solidFill>
+                <a:latin typeface="Pretendard" pitchFamily="34" charset="0"/>
+                <a:ea typeface="Pretendard" pitchFamily="34" charset="-122"/>
+                <a:cs typeface="Pretendard" pitchFamily="34" charset="-120"/>
+              </a:rPr>
+              <a:t>   핵심 기능</a:t>
+            </a:r>
+            <a:endParaRPr lang="en-US" sz="1550" dirty="0"/>
+          </a:p>
+        </p:txBody>
+      </p:sp>
+      <p:sp>
+        <p:nvSpPr>
+          <p:cNvPr id="9" name="Text 6"/>
+          <p:cNvSpPr/>
+          <p:nvPr/>
+        </p:nvSpPr>
+        <p:spPr>
+          <a:xfrm>
+            <a:off x="4553712" y="2450592"/>
+            <a:ext cx="6739128" cy="365760"/>
+          </a:xfrm>
+          <a:prstGeom prst="rect">
+            <a:avLst/>
+          </a:prstGeom>
+          <a:noFill/>
+          <a:ln/>
+        </p:spPr>
+        <p:txBody>
+          <a:bodyPr wrap="square" lIns="0" tIns="0" rIns="0" bIns="0" rtlCol="0" anchor="ctr"/>
+          <a:lstStyle/>
+          <a:p>
+            <a:pPr indent="0" marL="0">
+              <a:buNone/>
+            </a:pPr>
+            <a:r>
+              <a:rPr lang="en-US" sz="1200" dirty="0">
                 <a:solidFill>
                   <a:srgbClr val="64748B"/>
                 </a:solidFill>
@@ -3662,47 +4198,26 @@
                 <a:ea typeface="Pretendard" pitchFamily="34" charset="-122"/>
                 <a:cs typeface="Pretendard" pitchFamily="34" charset="-120"/>
               </a:rPr>
-              <a:t>활동 기록 — 기여 잔디·연속기록으로 시각화</a:t>
-            </a:r>
-            <a:endParaRPr lang="en-US" sz="1300" dirty="0"/>
-          </a:p>
-          <a:p>
-            <a:pPr marL="177800" indent="-177800">
-              <a:spcAft>
-                <a:spcPts val="400"/>
-              </a:spcAft>
-              <a:buSzPct val="100000"/>
-              <a:buChar char="•"/>
-            </a:pPr>
-            <a:r>
-              <a:rPr lang="en-US" sz="1300" dirty="0">
-                <a:solidFill>
-                  <a:srgbClr val="64748B"/>
-                </a:solidFill>
-                <a:latin typeface="Pretendard" pitchFamily="34" charset="0"/>
-                <a:ea typeface="Pretendard" pitchFamily="34" charset="-122"/>
-                <a:cs typeface="Pretendard" pitchFamily="34" charset="-120"/>
-              </a:rPr>
-              <a:t>익명 동료평가 · 산출물(발표자료·코드) 업로드</a:t>
-            </a:r>
-            <a:endParaRPr lang="en-US" sz="1300" dirty="0"/>
-          </a:p>
-        </p:txBody>
-      </p:sp>
-      <p:sp>
-        <p:nvSpPr>
-          <p:cNvPr id="9" name="Shape 6"/>
-          <p:cNvSpPr/>
-          <p:nvPr/>
-        </p:nvSpPr>
-        <p:spPr>
-          <a:xfrm>
-            <a:off x="3566160" y="4114800"/>
-            <a:ext cx="8001000" cy="2121408"/>
+              <a:t>기록·평가가 어긋나면 무임승차·불일치 자동 감지</a:t>
+            </a:r>
+            <a:endParaRPr lang="en-US" sz="1200" dirty="0"/>
+          </a:p>
+        </p:txBody>
+      </p:sp>
+      <p:sp>
+        <p:nvSpPr>
+          <p:cNvPr id="10" name="Shape 7"/>
+          <p:cNvSpPr/>
+          <p:nvPr/>
+        </p:nvSpPr>
+        <p:spPr>
+          <a:xfrm>
+            <a:off x="3566160" y="3090672"/>
+            <a:ext cx="8001000" cy="859536"/>
           </a:xfrm>
           <a:prstGeom prst="roundRect">
             <a:avLst>
-              <a:gd name="adj" fmla="val 4310"/>
+              <a:gd name="adj" fmla="val 10638"/>
             </a:avLst>
           </a:prstGeom>
           <a:solidFill>
@@ -3720,14 +4235,14 @@
       </p:sp>
       <p:sp>
         <p:nvSpPr>
-          <p:cNvPr id="10" name="Shape 7"/>
-          <p:cNvSpPr/>
-          <p:nvPr/>
-        </p:nvSpPr>
-        <p:spPr>
-          <a:xfrm>
-            <a:off x="3822192" y="4352544"/>
-            <a:ext cx="512064" cy="512064"/>
+          <p:cNvPr id="11" name="Shape 8"/>
+          <p:cNvSpPr/>
+          <p:nvPr/>
+        </p:nvSpPr>
+        <p:spPr>
+          <a:xfrm>
+            <a:off x="3785616" y="3255264"/>
+            <a:ext cx="530352" cy="530352"/>
           </a:xfrm>
           <a:prstGeom prst="ellipse">
             <a:avLst/>
@@ -3740,7 +4255,7 @@
       </p:sp>
       <p:pic>
         <p:nvPicPr>
-          <p:cNvPr id="11" name="Image 1" descr="preencoded.png">    </p:cNvPr>
+          <p:cNvPr id="12" name="Image 1" descr="preencoded.png">    </p:cNvPr>
           <p:cNvPicPr>
             <a:picLocks noChangeAspect="1"/>
           </p:cNvPicPr>
@@ -3754,8 +4269,8 @@
         </p:blipFill>
         <p:spPr>
           <a:xfrm>
-            <a:off x="3950208" y="4480560"/>
-            <a:ext cx="256032" cy="256032"/>
+            <a:off x="3918204" y="3387852"/>
+            <a:ext cx="265176" cy="265176"/>
           </a:xfrm>
           <a:prstGeom prst="rect">
             <a:avLst/>
@@ -3764,14 +4279,14 @@
       </p:pic>
       <p:sp>
         <p:nvSpPr>
-          <p:cNvPr id="12" name="Text 8"/>
-          <p:cNvSpPr/>
-          <p:nvPr/>
-        </p:nvSpPr>
-        <p:spPr>
-          <a:xfrm>
-            <a:off x="4535424" y="4315968"/>
-            <a:ext cx="6720840" cy="457200"/>
+          <p:cNvPr id="13" name="Text 9"/>
+          <p:cNvSpPr/>
+          <p:nvPr/>
+        </p:nvSpPr>
+        <p:spPr>
+          <a:xfrm>
+            <a:off x="4553712" y="3209544"/>
+            <a:ext cx="6739128" cy="402336"/>
           </a:xfrm>
           <a:prstGeom prst="rect">
             <a:avLst/>
@@ -3787,7 +4302,7 @@
               <a:buNone/>
             </a:pPr>
             <a:r>
-              <a:rPr lang="en-US" sz="1600" b="1" dirty="0">
+              <a:rPr lang="en-US" sz="1550" b="1" dirty="0">
                 <a:solidFill>
                   <a:srgbClr val="1E293B"/>
                 </a:solidFill>
@@ -3795,42 +4310,38 @@
                 <a:ea typeface="Pretendard" pitchFamily="34" charset="-122"/>
                 <a:cs typeface="Pretendard" pitchFamily="34" charset="-120"/>
               </a:rPr>
-              <a:t>교수 화면</a:t>
-            </a:r>
-            <a:endParaRPr lang="en-US" sz="1600" dirty="0"/>
-          </a:p>
-        </p:txBody>
-      </p:sp>
-      <p:sp>
-        <p:nvSpPr>
-          <p:cNvPr id="13" name="Text 9"/>
-          <p:cNvSpPr/>
-          <p:nvPr/>
-        </p:nvSpPr>
-        <p:spPr>
-          <a:xfrm>
-            <a:off x="3886200" y="4901184"/>
-            <a:ext cx="7360920" cy="1207008"/>
-          </a:xfrm>
-          <a:prstGeom prst="rect">
-            <a:avLst/>
-          </a:prstGeom>
-          <a:noFill/>
-          <a:ln/>
-        </p:spPr>
-        <p:txBody>
-          <a:bodyPr wrap="square" lIns="0" tIns="0" rIns="0" bIns="0" rtlCol="0" anchor="t"/>
-          <a:lstStyle/>
-          <a:p>
-            <a:pPr marL="177800" indent="-177800">
-              <a:spcAft>
-                <a:spcPts val="400"/>
-              </a:spcAft>
-              <a:buSzPct val="100000"/>
-              <a:buChar char="•"/>
-            </a:pPr>
-            <a:r>
-              <a:rPr lang="en-US" sz="1300" dirty="0">
+              <a:t>기여도 대시보드</a:t>
+            </a:r>
+            <a:endParaRPr lang="en-US" sz="1550" dirty="0"/>
+          </a:p>
+        </p:txBody>
+      </p:sp>
+      <p:sp>
+        <p:nvSpPr>
+          <p:cNvPr id="14" name="Text 10"/>
+          <p:cNvSpPr/>
+          <p:nvPr/>
+        </p:nvSpPr>
+        <p:spPr>
+          <a:xfrm>
+            <a:off x="4553712" y="3456432"/>
+            <a:ext cx="6739128" cy="365760"/>
+          </a:xfrm>
+          <a:prstGeom prst="rect">
+            <a:avLst/>
+          </a:prstGeom>
+          <a:noFill/>
+          <a:ln/>
+        </p:spPr>
+        <p:txBody>
+          <a:bodyPr wrap="square" lIns="0" tIns="0" rIns="0" bIns="0" rtlCol="0" anchor="ctr"/>
+          <a:lstStyle/>
+          <a:p>
+            <a:pPr indent="0" marL="0">
+              <a:buNone/>
+            </a:pPr>
+            <a:r>
+              <a:rPr lang="en-US" sz="1200" dirty="0">
                 <a:solidFill>
                   <a:srgbClr val="64748B"/>
                 </a:solidFill>
@@ -3838,20 +4349,150 @@
                 <a:ea typeface="Pretendard" pitchFamily="34" charset="-122"/>
                 <a:cs typeface="Pretendard" pitchFamily="34" charset="-120"/>
               </a:rPr>
-              <a:t>팀·개인별 기여도 대시보드 (차트로 한눈에)</a:t>
-            </a:r>
-            <a:endParaRPr lang="en-US" sz="1300" dirty="0"/>
-          </a:p>
-          <a:p>
-            <a:pPr marL="177800" indent="-177800">
-              <a:spcAft>
-                <a:spcPts val="400"/>
-              </a:spcAft>
-              <a:buSzPct val="100000"/>
-              <a:buChar char="•"/>
-            </a:pPr>
-            <a:r>
-              <a:rPr lang="en-US" sz="1300" dirty="0">
+              <a:t>팀·개인별 기여를 차트로 한눈에</a:t>
+            </a:r>
+            <a:endParaRPr lang="en-US" sz="1200" dirty="0"/>
+          </a:p>
+        </p:txBody>
+      </p:sp>
+      <p:sp>
+        <p:nvSpPr>
+          <p:cNvPr id="15" name="Shape 11"/>
+          <p:cNvSpPr/>
+          <p:nvPr/>
+        </p:nvSpPr>
+        <p:spPr>
+          <a:xfrm>
+            <a:off x="3566160" y="4096512"/>
+            <a:ext cx="8001000" cy="859536"/>
+          </a:xfrm>
+          <a:prstGeom prst="roundRect">
+            <a:avLst>
+              <a:gd name="adj" fmla="val 10638"/>
+            </a:avLst>
+          </a:prstGeom>
+          <a:solidFill>
+            <a:srgbClr val="FFFFFF"/>
+          </a:solidFill>
+          <a:ln/>
+          <a:effectLst>
+            <a:outerShdw sx="100000" sy="100000" kx="0" ky="0" algn="bl" rotWithShape="0" blurRad="101600" dist="25400" dir="5400000">
+              <a:srgbClr val="000000">
+                <a:alpha val="10000"/>
+              </a:srgbClr>
+            </a:outerShdw>
+          </a:effectLst>
+        </p:spPr>
+      </p:sp>
+      <p:sp>
+        <p:nvSpPr>
+          <p:cNvPr id="16" name="Shape 12"/>
+          <p:cNvSpPr/>
+          <p:nvPr/>
+        </p:nvSpPr>
+        <p:spPr>
+          <a:xfrm>
+            <a:off x="3785616" y="4261104"/>
+            <a:ext cx="530352" cy="530352"/>
+          </a:xfrm>
+          <a:prstGeom prst="ellipse">
+            <a:avLst/>
+          </a:prstGeom>
+          <a:solidFill>
+            <a:srgbClr val="EEF0FF"/>
+          </a:solidFill>
+          <a:ln/>
+        </p:spPr>
+      </p:sp>
+      <p:pic>
+        <p:nvPicPr>
+          <p:cNvPr id="17" name="Image 2" descr="preencoded.png">    </p:cNvPr>
+          <p:cNvPicPr>
+            <a:picLocks noChangeAspect="1"/>
+          </p:cNvPicPr>
+          <p:nvPr/>
+        </p:nvPicPr>
+        <p:blipFill>
+          <a:blip r:embed="rId3"/>
+          <a:stretch>
+            <a:fillRect/>
+          </a:stretch>
+        </p:blipFill>
+        <p:spPr>
+          <a:xfrm>
+            <a:off x="3918204" y="4393692"/>
+            <a:ext cx="265176" cy="265176"/>
+          </a:xfrm>
+          <a:prstGeom prst="rect">
+            <a:avLst/>
+          </a:prstGeom>
+        </p:spPr>
+      </p:pic>
+      <p:sp>
+        <p:nvSpPr>
+          <p:cNvPr id="18" name="Text 13"/>
+          <p:cNvSpPr/>
+          <p:nvPr/>
+        </p:nvSpPr>
+        <p:spPr>
+          <a:xfrm>
+            <a:off x="4553712" y="4215384"/>
+            <a:ext cx="6739128" cy="402336"/>
+          </a:xfrm>
+          <a:prstGeom prst="rect">
+            <a:avLst/>
+          </a:prstGeom>
+          <a:noFill/>
+          <a:ln/>
+        </p:spPr>
+        <p:txBody>
+          <a:bodyPr wrap="square" lIns="0" tIns="0" rIns="0" bIns="0" rtlCol="0" anchor="ctr"/>
+          <a:lstStyle/>
+          <a:p>
+            <a:pPr indent="0" marL="0">
+              <a:buNone/>
+            </a:pPr>
+            <a:r>
+              <a:rPr lang="en-US" sz="1550" b="1" dirty="0">
+                <a:solidFill>
+                  <a:srgbClr val="1E293B"/>
+                </a:solidFill>
+                <a:latin typeface="Pretendard" pitchFamily="34" charset="0"/>
+                <a:ea typeface="Pretendard" pitchFamily="34" charset="-122"/>
+                <a:cs typeface="Pretendard" pitchFamily="34" charset="-120"/>
+              </a:rPr>
+              <a:t>AI 기여도 리포트</a:t>
+            </a:r>
+            <a:endParaRPr lang="en-US" sz="1550" dirty="0"/>
+          </a:p>
+        </p:txBody>
+      </p:sp>
+      <p:sp>
+        <p:nvSpPr>
+          <p:cNvPr id="19" name="Text 14"/>
+          <p:cNvSpPr/>
+          <p:nvPr/>
+        </p:nvSpPr>
+        <p:spPr>
+          <a:xfrm>
+            <a:off x="4553712" y="4462272"/>
+            <a:ext cx="6739128" cy="365760"/>
+          </a:xfrm>
+          <a:prstGeom prst="rect">
+            <a:avLst/>
+          </a:prstGeom>
+          <a:noFill/>
+          <a:ln/>
+        </p:spPr>
+        <p:txBody>
+          <a:bodyPr wrap="square" lIns="0" tIns="0" rIns="0" bIns="0" rtlCol="0" anchor="ctr"/>
+          <a:lstStyle/>
+          <a:p>
+            <a:pPr indent="0" marL="0">
+              <a:buNone/>
+            </a:pPr>
+            <a:r>
+              <a:rPr lang="en-US" sz="1200" dirty="0">
                 <a:solidFill>
                   <a:srgbClr val="64748B"/>
                 </a:solidFill>
@@ -3859,20 +4500,150 @@
                 <a:ea typeface="Pretendard" pitchFamily="34" charset="-122"/>
                 <a:cs typeface="Pretendard" pitchFamily="34" charset="-120"/>
               </a:rPr>
-              <a:t>교차검증 플래그 — 무임승차·불일치 자동 감지</a:t>
-            </a:r>
-            <a:endParaRPr lang="en-US" sz="1300" dirty="0"/>
-          </a:p>
-          <a:p>
-            <a:pPr marL="177800" indent="-177800">
-              <a:spcAft>
-                <a:spcPts val="400"/>
-              </a:spcAft>
-              <a:buSzPct val="100000"/>
-              <a:buChar char="•"/>
-            </a:pPr>
-            <a:r>
-              <a:rPr lang="en-US" sz="1300" dirty="0">
+              <a:t>기록+평가를 종합해 성적 근거 문서 자동 생성</a:t>
+            </a:r>
+            <a:endParaRPr lang="en-US" sz="1200" dirty="0"/>
+          </a:p>
+        </p:txBody>
+      </p:sp>
+      <p:sp>
+        <p:nvSpPr>
+          <p:cNvPr id="20" name="Shape 15"/>
+          <p:cNvSpPr/>
+          <p:nvPr/>
+        </p:nvSpPr>
+        <p:spPr>
+          <a:xfrm>
+            <a:off x="3566160" y="5102352"/>
+            <a:ext cx="8001000" cy="859536"/>
+          </a:xfrm>
+          <a:prstGeom prst="roundRect">
+            <a:avLst>
+              <a:gd name="adj" fmla="val 10638"/>
+            </a:avLst>
+          </a:prstGeom>
+          <a:solidFill>
+            <a:srgbClr val="FFFFFF"/>
+          </a:solidFill>
+          <a:ln/>
+          <a:effectLst>
+            <a:outerShdw sx="100000" sy="100000" kx="0" ky="0" algn="bl" rotWithShape="0" blurRad="101600" dist="25400" dir="5400000">
+              <a:srgbClr val="000000">
+                <a:alpha val="10000"/>
+              </a:srgbClr>
+            </a:outerShdw>
+          </a:effectLst>
+        </p:spPr>
+      </p:sp>
+      <p:sp>
+        <p:nvSpPr>
+          <p:cNvPr id="21" name="Shape 16"/>
+          <p:cNvSpPr/>
+          <p:nvPr/>
+        </p:nvSpPr>
+        <p:spPr>
+          <a:xfrm>
+            <a:off x="3785616" y="5266944"/>
+            <a:ext cx="530352" cy="530352"/>
+          </a:xfrm>
+          <a:prstGeom prst="ellipse">
+            <a:avLst/>
+          </a:prstGeom>
+          <a:solidFill>
+            <a:srgbClr val="D1FAE5"/>
+          </a:solidFill>
+          <a:ln/>
+        </p:spPr>
+      </p:sp>
+      <p:pic>
+        <p:nvPicPr>
+          <p:cNvPr id="22" name="Image 3" descr="preencoded.png">    </p:cNvPr>
+          <p:cNvPicPr>
+            <a:picLocks noChangeAspect="1"/>
+          </p:cNvPicPr>
+          <p:nvPr/>
+        </p:nvPicPr>
+        <p:blipFill>
+          <a:blip r:embed="rId4"/>
+          <a:stretch>
+            <a:fillRect/>
+          </a:stretch>
+        </p:blipFill>
+        <p:spPr>
+          <a:xfrm>
+            <a:off x="3918204" y="5399532"/>
+            <a:ext cx="265176" cy="265176"/>
+          </a:xfrm>
+          <a:prstGeom prst="rect">
+            <a:avLst/>
+          </a:prstGeom>
+        </p:spPr>
+      </p:pic>
+      <p:sp>
+        <p:nvSpPr>
+          <p:cNvPr id="23" name="Text 17"/>
+          <p:cNvSpPr/>
+          <p:nvPr/>
+        </p:nvSpPr>
+        <p:spPr>
+          <a:xfrm>
+            <a:off x="4553712" y="5221224"/>
+            <a:ext cx="6739128" cy="402336"/>
+          </a:xfrm>
+          <a:prstGeom prst="rect">
+            <a:avLst/>
+          </a:prstGeom>
+          <a:noFill/>
+          <a:ln/>
+        </p:spPr>
+        <p:txBody>
+          <a:bodyPr wrap="square" lIns="0" tIns="0" rIns="0" bIns="0" rtlCol="0" anchor="ctr"/>
+          <a:lstStyle/>
+          <a:p>
+            <a:pPr indent="0" marL="0">
+              <a:buNone/>
+            </a:pPr>
+            <a:r>
+              <a:rPr lang="en-US" sz="1550" b="1" dirty="0">
+                <a:solidFill>
+                  <a:srgbClr val="1E293B"/>
+                </a:solidFill>
+                <a:latin typeface="Pretendard" pitchFamily="34" charset="0"/>
+                <a:ea typeface="Pretendard" pitchFamily="34" charset="-122"/>
+                <a:cs typeface="Pretendard" pitchFamily="34" charset="-120"/>
+              </a:rPr>
+              <a:t>활동 기록 · 미니 LMS</a:t>
+            </a:r>
+            <a:endParaRPr lang="en-US" sz="1550" dirty="0"/>
+          </a:p>
+        </p:txBody>
+      </p:sp>
+      <p:sp>
+        <p:nvSpPr>
+          <p:cNvPr id="24" name="Text 18"/>
+          <p:cNvSpPr/>
+          <p:nvPr/>
+        </p:nvSpPr>
+        <p:spPr>
+          <a:xfrm>
+            <a:off x="4553712" y="5468112"/>
+            <a:ext cx="6739128" cy="365760"/>
+          </a:xfrm>
+          <a:prstGeom prst="rect">
+            <a:avLst/>
+          </a:prstGeom>
+          <a:noFill/>
+          <a:ln/>
+        </p:spPr>
+        <p:txBody>
+          <a:bodyPr wrap="square" lIns="0" tIns="0" rIns="0" bIns="0" rtlCol="0" anchor="ctr"/>
+          <a:lstStyle/>
+          <a:p>
+            <a:pPr indent="0" marL="0">
+              <a:buNone/>
+            </a:pPr>
+            <a:r>
+              <a:rPr lang="en-US" sz="1200" dirty="0">
                 <a:solidFill>
                   <a:srgbClr val="64748B"/>
                 </a:solidFill>
@@ -3880,20 +4651,38 @@
                 <a:ea typeface="Pretendard" pitchFamily="34" charset="-122"/>
                 <a:cs typeface="Pretendard" pitchFamily="34" charset="-120"/>
               </a:rPr>
-              <a:t>AI 기여도 리포트 자동 생성 (성적 근거)</a:t>
-            </a:r>
-            <a:endParaRPr lang="en-US" sz="1300" dirty="0"/>
-          </a:p>
-          <a:p>
-            <a:pPr marL="177800" indent="-177800">
-              <a:spcAft>
-                <a:spcPts val="400"/>
-              </a:spcAft>
-              <a:buSzPct val="100000"/>
-              <a:buChar char="•"/>
-            </a:pPr>
-            <a:r>
-              <a:rPr lang="en-US" sz="1300" dirty="0">
+              <a:t>잔디·스트릭 + 과목·마일스톤·제출 관리</a:t>
+            </a:r>
+            <a:endParaRPr lang="en-US" sz="1200" dirty="0"/>
+          </a:p>
+        </p:txBody>
+      </p:sp>
+      <p:sp>
+        <p:nvSpPr>
+          <p:cNvPr id="25" name="Text 19"/>
+          <p:cNvSpPr/>
+          <p:nvPr/>
+        </p:nvSpPr>
+        <p:spPr>
+          <a:xfrm>
+            <a:off x="3584448" y="6153912"/>
+            <a:ext cx="8001000" cy="365760"/>
+          </a:xfrm>
+          <a:prstGeom prst="rect">
+            <a:avLst/>
+          </a:prstGeom>
+          <a:noFill/>
+          <a:ln/>
+        </p:spPr>
+        <p:txBody>
+          <a:bodyPr wrap="square" lIns="0" tIns="0" rIns="0" bIns="0" rtlCol="0" anchor="ctr"/>
+          <a:lstStyle/>
+          <a:p>
+            <a:pPr indent="0" marL="0">
+              <a:buNone/>
+            </a:pPr>
+            <a:r>
+              <a:rPr lang="en-US" sz="1200" b="1" dirty="0">
                 <a:solidFill>
                   <a:srgbClr val="64748B"/>
                 </a:solidFill>
@@ -3901,15 +4690,29 @@
                 <a:ea typeface="Pretendard" pitchFamily="34" charset="-122"/>
                 <a:cs typeface="Pretendard" pitchFamily="34" charset="-120"/>
               </a:rPr>
-              <a:t>미니 LMS — 과목·마일스톤·제출 관리</a:t>
-            </a:r>
-            <a:endParaRPr lang="en-US" sz="1300" dirty="0"/>
-          </a:p>
-        </p:txBody>
-      </p:sp>
-      <p:sp>
-        <p:nvSpPr>
-          <p:cNvPr id="14" name="Shape 10"/>
+              <a:t>Built with   </a:t>
+            </a:r>
+            <a:pPr indent="0" marL="0">
+              <a:buNone/>
+            </a:pPr>
+            <a:r>
+              <a:rPr lang="en-US" sz="1200" b="1" dirty="0">
+                <a:solidFill>
+                  <a:srgbClr val="1E293B"/>
+                </a:solidFill>
+                <a:latin typeface="Pretendard" pitchFamily="34" charset="0"/>
+                <a:ea typeface="Pretendard" pitchFamily="34" charset="-122"/>
+                <a:cs typeface="Pretendard" pitchFamily="34" charset="-120"/>
+              </a:rPr>
+              <a:t>Kotlin · Jetpack Compose · Claude AI · 온디바이스 저장</a:t>
+            </a:r>
+            <a:endParaRPr lang="en-US" sz="1200" dirty="0"/>
+          </a:p>
+        </p:txBody>
+      </p:sp>
+      <p:sp>
+        <p:nvSpPr>
+          <p:cNvPr id="26" name="Shape 20"/>
           <p:cNvSpPr/>
           <p:nvPr/>
         </p:nvSpPr>
@@ -3938,14 +4741,14 @@
       </p:sp>
       <p:pic>
         <p:nvPicPr>
-          <p:cNvPr id="15" name="Image 2" descr="C:/Users/HP15~1/AppData/Local/Temp/claude/C--Users-HP-15-Desktop-Hackathon/e11a162a-fd90-4cff-922b-c82073c29db3/scratchpad/deck/assets/dev_prof.png">    </p:cNvPr>
+          <p:cNvPr id="27" name="Image 4" descr="C:/Users/HP15~1/AppData/Local/Temp/claude/C--Users-HP-15-Desktop-Hackathon/e11a162a-fd90-4cff-922b-c82073c29db3/scratchpad/deck/assets/dev_teamflags.png">    </p:cNvPr>
           <p:cNvPicPr>
             <a:picLocks noChangeAspect="1"/>
           </p:cNvPicPr>
           <p:nvPr/>
         </p:nvPicPr>
         <p:blipFill>
-          <a:blip r:embed="rId3"/>
+          <a:blip r:embed="rId5"/>
           <a:stretch>
             <a:fillRect/>
           </a:stretch>
@@ -3962,7 +4765,7 @@
       </p:pic>
       <p:sp>
         <p:nvSpPr>
-          <p:cNvPr id="16" name="Text 11"/>
+          <p:cNvPr id="28" name="Text 21"/>
           <p:cNvSpPr/>
           <p:nvPr/>
         </p:nvSpPr>
@@ -4001,7 +4804,7 @@
       </p:sp>
       <p:sp>
         <p:nvSpPr>
-          <p:cNvPr id="17" name="Text 12"/>
+          <p:cNvPr id="29" name="Text 22"/>
           <p:cNvSpPr/>
           <p:nvPr/>
         </p:nvSpPr>
@@ -4085,8 +4888,8 @@
         </p:nvSpPr>
         <p:spPr>
           <a:xfrm>
-            <a:off x="3566160" y="603504"/>
-            <a:ext cx="8229600" cy="310896"/>
+            <a:off x="3566160" y="585216"/>
+            <a:ext cx="9144000" cy="310896"/>
           </a:xfrm>
           <a:prstGeom prst="rect">
             <a:avLst/>
@@ -4124,7 +4927,7 @@
                 <a:ea typeface="Pretendard" pitchFamily="34" charset="-122"/>
                 <a:cs typeface="Pretendard" pitchFamily="34" charset="-120"/>
               </a:rPr>
-              <a:t>FOR PROFESSORS · 교수님께</a:t>
+              <a:t>IMPACT · 기대 효과</a:t>
             </a:r>
             <a:endParaRPr lang="en-US" sz="1100" dirty="0"/>
           </a:p>
@@ -4138,7 +4941,7 @@
         </p:nvSpPr>
         <p:spPr>
           <a:xfrm>
-            <a:off x="3566160" y="969264"/>
+            <a:off x="3566160" y="932688"/>
             <a:ext cx="8001000" cy="1371600"/>
           </a:xfrm>
           <a:prstGeom prst="rect">
@@ -4158,7 +4961,7 @@
               <a:buNone/>
             </a:pPr>
             <a:r>
-              <a:rPr lang="en-US" sz="3300" b="1" spc="-30" kern="0" dirty="0">
+              <a:rPr lang="en-US" sz="3200" b="1" spc="-30" kern="0" dirty="0">
                 <a:solidFill>
                   <a:srgbClr val="FFFFFF"/>
                 </a:solidFill>
@@ -4166,9 +4969,9 @@
                 <a:ea typeface="Pretendard" pitchFamily="34" charset="-122"/>
                 <a:cs typeface="Pretendard" pitchFamily="34" charset="-120"/>
               </a:rPr>
-              <a:t>근거를 바탕으로,</a:t>
-            </a:r>
-            <a:endParaRPr lang="en-US" sz="3300" dirty="0"/>
+              <a:t>감시가 아닌 증명으로,</a:t>
+            </a:r>
+            <a:endParaRPr lang="en-US" sz="3200" dirty="0"/>
           </a:p>
           <a:p>
             <a:pPr algn="l" indent="0" marL="0">
@@ -4178,7 +4981,7 @@
               <a:buNone/>
             </a:pPr>
             <a:r>
-              <a:rPr lang="en-US" sz="3300" b="1" spc="-30" kern="0" dirty="0">
+              <a:rPr lang="en-US" sz="3200" b="1" spc="-30" kern="0" dirty="0">
                 <a:solidFill>
                   <a:srgbClr val="FCD34D"/>
                 </a:solidFill>
@@ -4186,7 +4989,7 @@
                 <a:ea typeface="Pretendard" pitchFamily="34" charset="-122"/>
                 <a:cs typeface="Pretendard" pitchFamily="34" charset="-120"/>
               </a:rPr>
-              <a:t>더 공정한 평가</a:t>
+              <a:t>공정한 팀플</a:t>
             </a:r>
             <a:pPr algn="l" indent="0" marL="0">
               <a:lnSpc>
@@ -4195,7 +4998,7 @@
               <a:buNone/>
             </a:pPr>
             <a:r>
-              <a:rPr lang="en-US" sz="3300" b="1" spc="-30" kern="0" dirty="0">
+              <a:rPr lang="en-US" sz="3200" b="1" spc="-30" kern="0" dirty="0">
                 <a:solidFill>
                   <a:srgbClr val="FFFFFF"/>
                 </a:solidFill>
@@ -4203,9 +5006,9 @@
                 <a:ea typeface="Pretendard" pitchFamily="34" charset="-122"/>
                 <a:cs typeface="Pretendard" pitchFamily="34" charset="-120"/>
               </a:rPr>
-              <a:t>를</a:t>
-            </a:r>
-            <a:endParaRPr lang="en-US" sz="3300" dirty="0"/>
+              <a:t>의 시작</a:t>
+            </a:r>
+            <a:endParaRPr lang="en-US" sz="3200" dirty="0"/>
           </a:p>
         </p:txBody>
       </p:sp>
@@ -4217,8 +5020,8 @@
         </p:nvSpPr>
         <p:spPr>
           <a:xfrm>
-            <a:off x="3566160" y="2331720"/>
-            <a:ext cx="8001000" cy="411480"/>
+            <a:off x="3566160" y="2286000"/>
+            <a:ext cx="8001000" cy="365760"/>
           </a:xfrm>
           <a:prstGeom prst="rect">
             <a:avLst/>
@@ -4234,7 +5037,7 @@
               <a:buNone/>
             </a:pPr>
             <a:r>
-              <a:rPr lang="en-US" sz="1550" dirty="0">
+              <a:rPr lang="en-US" sz="1400" dirty="0">
                 <a:solidFill>
                   <a:srgbClr val="C7D2FE"/>
                 </a:solidFill>
@@ -4242,9 +5045,9 @@
                 <a:ea typeface="Pretendard" pitchFamily="34" charset="-122"/>
                 <a:cs typeface="Pretendard" pitchFamily="34" charset="-120"/>
               </a:rPr>
-              <a:t>N분의1이 교수님께 드리는 것</a:t>
-            </a:r>
-            <a:endParaRPr lang="en-US" sz="1550" dirty="0"/>
+              <a:t>모든 팀 프로젝트에 — 일반 팀플부터 졸업작품까지</a:t>
+            </a:r>
+            <a:endParaRPr lang="en-US" sz="1400" dirty="0"/>
           </a:p>
         </p:txBody>
       </p:sp>
@@ -4256,7 +5059,190 @@
         </p:nvSpPr>
         <p:spPr>
           <a:xfrm>
-            <a:off x="3566160" y="2880360"/>
+            <a:off x="3566160" y="2743200"/>
+            <a:ext cx="1371600" cy="512064"/>
+          </a:xfrm>
+          <a:prstGeom prst="roundRect">
+            <a:avLst>
+              <a:gd name="adj" fmla="val 50000"/>
+            </a:avLst>
+          </a:prstGeom>
+          <a:solidFill>
+            <a:srgbClr val="413C9A"/>
+          </a:solidFill>
+          <a:ln/>
+        </p:spPr>
+      </p:sp>
+      <p:sp>
+        <p:nvSpPr>
+          <p:cNvPr id="6" name="Text 4"/>
+          <p:cNvSpPr/>
+          <p:nvPr/>
+        </p:nvSpPr>
+        <p:spPr>
+          <a:xfrm>
+            <a:off x="3566160" y="2743200"/>
+            <a:ext cx="1371600" cy="512064"/>
+          </a:xfrm>
+          <a:prstGeom prst="rect">
+            <a:avLst/>
+          </a:prstGeom>
+          <a:noFill/>
+          <a:ln/>
+        </p:spPr>
+        <p:txBody>
+          <a:bodyPr wrap="square" lIns="0" tIns="0" rIns="0" bIns="0" rtlCol="0" anchor="ctr"/>
+          <a:lstStyle/>
+          <a:p>
+            <a:pPr algn="ctr" indent="0" marL="0">
+              <a:buNone/>
+            </a:pPr>
+            <a:r>
+              <a:rPr lang="en-US" sz="1300" b="1" dirty="0">
+                <a:solidFill>
+                  <a:srgbClr val="FFFFFF"/>
+                </a:solidFill>
+                <a:latin typeface="Pretendard" pitchFamily="34" charset="0"/>
+                <a:ea typeface="Pretendard" pitchFamily="34" charset="-122"/>
+                <a:cs typeface="Pretendard" pitchFamily="34" charset="-120"/>
+              </a:rPr>
+              <a:t>일반 팀플</a:t>
+            </a:r>
+            <a:endParaRPr lang="en-US" sz="1300" dirty="0"/>
+          </a:p>
+        </p:txBody>
+      </p:sp>
+      <p:sp>
+        <p:nvSpPr>
+          <p:cNvPr id="7" name="Shape 5"/>
+          <p:cNvSpPr/>
+          <p:nvPr/>
+        </p:nvSpPr>
+        <p:spPr>
+          <a:xfrm>
+            <a:off x="5120640" y="2743200"/>
+            <a:ext cx="2240280" cy="512064"/>
+          </a:xfrm>
+          <a:prstGeom prst="roundRect">
+            <a:avLst>
+              <a:gd name="adj" fmla="val 50000"/>
+            </a:avLst>
+          </a:prstGeom>
+          <a:solidFill>
+            <a:srgbClr val="413C9A"/>
+          </a:solidFill>
+          <a:ln/>
+        </p:spPr>
+      </p:sp>
+      <p:sp>
+        <p:nvSpPr>
+          <p:cNvPr id="8" name="Text 6"/>
+          <p:cNvSpPr/>
+          <p:nvPr/>
+        </p:nvSpPr>
+        <p:spPr>
+          <a:xfrm>
+            <a:off x="5120640" y="2743200"/>
+            <a:ext cx="2240280" cy="512064"/>
+          </a:xfrm>
+          <a:prstGeom prst="rect">
+            <a:avLst/>
+          </a:prstGeom>
+          <a:noFill/>
+          <a:ln/>
+        </p:spPr>
+        <p:txBody>
+          <a:bodyPr wrap="square" lIns="0" tIns="0" rIns="0" bIns="0" rtlCol="0" anchor="ctr"/>
+          <a:lstStyle/>
+          <a:p>
+            <a:pPr algn="ctr" indent="0" marL="0">
+              <a:buNone/>
+            </a:pPr>
+            <a:r>
+              <a:rPr lang="en-US" sz="1300" b="1" dirty="0">
+                <a:solidFill>
+                  <a:srgbClr val="FFFFFF"/>
+                </a:solidFill>
+                <a:latin typeface="Pretendard" pitchFamily="34" charset="0"/>
+                <a:ea typeface="Pretendard" pitchFamily="34" charset="-122"/>
+                <a:cs typeface="Pretendard" pitchFamily="34" charset="-120"/>
+              </a:rPr>
+              <a:t>중간·기말 프로젝트</a:t>
+            </a:r>
+            <a:endParaRPr lang="en-US" sz="1300" dirty="0"/>
+          </a:p>
+        </p:txBody>
+      </p:sp>
+      <p:sp>
+        <p:nvSpPr>
+          <p:cNvPr id="9" name="Shape 7"/>
+          <p:cNvSpPr/>
+          <p:nvPr/>
+        </p:nvSpPr>
+        <p:spPr>
+          <a:xfrm>
+            <a:off x="7543800" y="2743200"/>
+            <a:ext cx="2066544" cy="512064"/>
+          </a:xfrm>
+          <a:prstGeom prst="roundRect">
+            <a:avLst>
+              <a:gd name="adj" fmla="val 50000"/>
+            </a:avLst>
+          </a:prstGeom>
+          <a:solidFill>
+            <a:srgbClr val="413C9A"/>
+          </a:solidFill>
+          <a:ln/>
+        </p:spPr>
+      </p:sp>
+      <p:sp>
+        <p:nvSpPr>
+          <p:cNvPr id="10" name="Text 8"/>
+          <p:cNvSpPr/>
+          <p:nvPr/>
+        </p:nvSpPr>
+        <p:spPr>
+          <a:xfrm>
+            <a:off x="7543800" y="2743200"/>
+            <a:ext cx="2066544" cy="512064"/>
+          </a:xfrm>
+          <a:prstGeom prst="rect">
+            <a:avLst/>
+          </a:prstGeom>
+          <a:noFill/>
+          <a:ln/>
+        </p:spPr>
+        <p:txBody>
+          <a:bodyPr wrap="square" lIns="0" tIns="0" rIns="0" bIns="0" rtlCol="0" anchor="ctr"/>
+          <a:lstStyle/>
+          <a:p>
+            <a:pPr algn="ctr" indent="0" marL="0">
+              <a:buNone/>
+            </a:pPr>
+            <a:r>
+              <a:rPr lang="en-US" sz="1300" b="1" dirty="0">
+                <a:solidFill>
+                  <a:srgbClr val="FFFFFF"/>
+                </a:solidFill>
+                <a:latin typeface="Pretendard" pitchFamily="34" charset="0"/>
+                <a:ea typeface="Pretendard" pitchFamily="34" charset="-122"/>
+                <a:cs typeface="Pretendard" pitchFamily="34" charset="-120"/>
+              </a:rPr>
+              <a:t>졸업작품(캡스톤)</a:t>
+            </a:r>
+            <a:endParaRPr lang="en-US" sz="1300" dirty="0"/>
+          </a:p>
+        </p:txBody>
+      </p:sp>
+      <p:sp>
+        <p:nvSpPr>
+          <p:cNvPr id="11" name="Shape 9"/>
+          <p:cNvSpPr/>
+          <p:nvPr/>
+        </p:nvSpPr>
+        <p:spPr>
+          <a:xfrm>
+            <a:off x="3566160" y="3566160"/>
             <a:ext cx="8001000" cy="877824"/>
           </a:xfrm>
           <a:prstGeom prst="roundRect">
@@ -4272,13 +5258,13 @@
       </p:sp>
       <p:sp>
         <p:nvSpPr>
-          <p:cNvPr id="6" name="Shape 4"/>
-          <p:cNvSpPr/>
-          <p:nvPr/>
-        </p:nvSpPr>
-        <p:spPr>
-          <a:xfrm>
-            <a:off x="3822192" y="3063240"/>
+          <p:cNvPr id="12" name="Shape 10"/>
+          <p:cNvSpPr/>
+          <p:nvPr/>
+        </p:nvSpPr>
+        <p:spPr>
+          <a:xfrm>
+            <a:off x="3822192" y="3749040"/>
             <a:ext cx="512064" cy="512064"/>
           </a:xfrm>
           <a:prstGeom prst="ellipse">
@@ -4292,7 +5278,7 @@
       </p:sp>
       <p:pic>
         <p:nvPicPr>
-          <p:cNvPr id="7" name="Image 0" descr="preencoded.png">    </p:cNvPr>
+          <p:cNvPr id="13" name="Image 0" descr="preencoded.png">    </p:cNvPr>
           <p:cNvPicPr>
             <a:picLocks noChangeAspect="1"/>
           </p:cNvPicPr>
@@ -4306,7 +5292,7 @@
         </p:blipFill>
         <p:spPr>
           <a:xfrm>
-            <a:off x="3950208" y="3191256"/>
+            <a:off x="3950208" y="3877056"/>
             <a:ext cx="256032" cy="256032"/>
           </a:xfrm>
           <a:prstGeom prst="rect">
@@ -4316,14 +5302,14 @@
       </p:pic>
       <p:sp>
         <p:nvSpPr>
-          <p:cNvPr id="8" name="Text 5"/>
-          <p:cNvSpPr/>
-          <p:nvPr/>
-        </p:nvSpPr>
-        <p:spPr>
-          <a:xfrm>
-            <a:off x="4553712" y="2880360"/>
-            <a:ext cx="2468880" cy="877824"/>
+          <p:cNvPr id="14" name="Text 11"/>
+          <p:cNvSpPr/>
+          <p:nvPr/>
+        </p:nvSpPr>
+        <p:spPr>
+          <a:xfrm>
+            <a:off x="4553712" y="3566160"/>
+            <a:ext cx="1371600" cy="877824"/>
           </a:xfrm>
           <a:prstGeom prst="rect">
             <a:avLst/>
@@ -4339,7 +5325,7 @@
               <a:buNone/>
             </a:pPr>
             <a:r>
-              <a:rPr lang="en-US" sz="1450" b="1" dirty="0">
+              <a:rPr lang="en-US" sz="1500" b="1" dirty="0">
                 <a:solidFill>
                   <a:srgbClr val="C7D2FE"/>
                 </a:solidFill>
@@ -4347,22 +5333,22 @@
                 <a:ea typeface="Pretendard" pitchFamily="34" charset="-122"/>
                 <a:cs typeface="Pretendard" pitchFamily="34" charset="-120"/>
               </a:rPr>
-              <a:t>기여도를 한눈에</a:t>
-            </a:r>
-            <a:endParaRPr lang="en-US" sz="1450" dirty="0"/>
-          </a:p>
-        </p:txBody>
-      </p:sp>
-      <p:sp>
-        <p:nvSpPr>
-          <p:cNvPr id="9" name="Text 6"/>
-          <p:cNvSpPr/>
-          <p:nvPr/>
-        </p:nvSpPr>
-        <p:spPr>
-          <a:xfrm>
-            <a:off x="6766560" y="2880360"/>
-            <a:ext cx="4572000" cy="877824"/>
+              <a:t>학생</a:t>
+            </a:r>
+            <a:endParaRPr lang="en-US" sz="1500" dirty="0"/>
+          </a:p>
+        </p:txBody>
+      </p:sp>
+      <p:sp>
+        <p:nvSpPr>
+          <p:cNvPr id="15" name="Text 12"/>
+          <p:cNvSpPr/>
+          <p:nvPr/>
+        </p:nvSpPr>
+        <p:spPr>
+          <a:xfrm>
+            <a:off x="5852160" y="3566160"/>
+            <a:ext cx="5486400" cy="877824"/>
           </a:xfrm>
           <a:prstGeom prst="rect">
             <a:avLst/>
@@ -4386,7 +5372,7 @@
                 <a:ea typeface="Pretendard" pitchFamily="34" charset="-122"/>
                 <a:cs typeface="Pretendard" pitchFamily="34" charset="-120"/>
               </a:rPr>
-              <a:t>팀·개인별 근거와 함께 → 성적 부여 근거 확보</a:t>
+              <a:t>노력한 만큼 인정받습니다</a:t>
             </a:r>
             <a:endParaRPr lang="en-US" sz="1350" dirty="0"/>
           </a:p>
@@ -4394,13 +5380,13 @@
       </p:sp>
       <p:sp>
         <p:nvSpPr>
-          <p:cNvPr id="10" name="Shape 7"/>
-          <p:cNvSpPr/>
-          <p:nvPr/>
-        </p:nvSpPr>
-        <p:spPr>
-          <a:xfrm>
-            <a:off x="3566160" y="3941064"/>
+          <p:cNvPr id="16" name="Shape 13"/>
+          <p:cNvSpPr/>
+          <p:nvPr/>
+        </p:nvSpPr>
+        <p:spPr>
+          <a:xfrm>
+            <a:off x="3566160" y="4590288"/>
             <a:ext cx="8001000" cy="877824"/>
           </a:xfrm>
           <a:prstGeom prst="roundRect">
@@ -4416,13 +5402,13 @@
       </p:sp>
       <p:sp>
         <p:nvSpPr>
-          <p:cNvPr id="11" name="Shape 8"/>
-          <p:cNvSpPr/>
-          <p:nvPr/>
-        </p:nvSpPr>
-        <p:spPr>
-          <a:xfrm>
-            <a:off x="3822192" y="4123944"/>
+          <p:cNvPr id="17" name="Shape 14"/>
+          <p:cNvSpPr/>
+          <p:nvPr/>
+        </p:nvSpPr>
+        <p:spPr>
+          <a:xfrm>
+            <a:off x="3822192" y="4773168"/>
             <a:ext cx="512064" cy="512064"/>
           </a:xfrm>
           <a:prstGeom prst="ellipse">
@@ -4436,7 +5422,7 @@
       </p:sp>
       <p:pic>
         <p:nvPicPr>
-          <p:cNvPr id="12" name="Image 1" descr="preencoded.png">    </p:cNvPr>
+          <p:cNvPr id="18" name="Image 1" descr="preencoded.png">    </p:cNvPr>
           <p:cNvPicPr>
             <a:picLocks noChangeAspect="1"/>
           </p:cNvPicPr>
@@ -4450,7 +5436,7 @@
         </p:blipFill>
         <p:spPr>
           <a:xfrm>
-            <a:off x="3950208" y="4251960"/>
+            <a:off x="3950208" y="4901184"/>
             <a:ext cx="256032" cy="256032"/>
           </a:xfrm>
           <a:prstGeom prst="rect">
@@ -4460,14 +5446,14 @@
       </p:pic>
       <p:sp>
         <p:nvSpPr>
-          <p:cNvPr id="13" name="Text 9"/>
-          <p:cNvSpPr/>
-          <p:nvPr/>
-        </p:nvSpPr>
-        <p:spPr>
-          <a:xfrm>
-            <a:off x="4553712" y="3941064"/>
-            <a:ext cx="2468880" cy="877824"/>
+          <p:cNvPr id="19" name="Text 15"/>
+          <p:cNvSpPr/>
+          <p:nvPr/>
+        </p:nvSpPr>
+        <p:spPr>
+          <a:xfrm>
+            <a:off x="4553712" y="4590288"/>
+            <a:ext cx="1371600" cy="877824"/>
           </a:xfrm>
           <a:prstGeom prst="rect">
             <a:avLst/>
@@ -4483,7 +5469,7 @@
               <a:buNone/>
             </a:pPr>
             <a:r>
-              <a:rPr lang="en-US" sz="1450" b="1" dirty="0">
+              <a:rPr lang="en-US" sz="1500" b="1" dirty="0">
                 <a:solidFill>
                   <a:srgbClr val="C7D2FE"/>
                 </a:solidFill>
@@ -4491,22 +5477,22 @@
                 <a:ea typeface="Pretendard" pitchFamily="34" charset="-122"/>
                 <a:cs typeface="Pretendard" pitchFamily="34" charset="-120"/>
               </a:rPr>
-              <a:t>문제를 조기에</a:t>
-            </a:r>
-            <a:endParaRPr lang="en-US" sz="1450" dirty="0"/>
-          </a:p>
-        </p:txBody>
-      </p:sp>
-      <p:sp>
-        <p:nvSpPr>
-          <p:cNvPr id="14" name="Text 10"/>
-          <p:cNvSpPr/>
-          <p:nvPr/>
-        </p:nvSpPr>
-        <p:spPr>
-          <a:xfrm>
-            <a:off x="6766560" y="3941064"/>
-            <a:ext cx="4572000" cy="877824"/>
+              <a:t>교수님</a:t>
+            </a:r>
+            <a:endParaRPr lang="en-US" sz="1500" dirty="0"/>
+          </a:p>
+        </p:txBody>
+      </p:sp>
+      <p:sp>
+        <p:nvSpPr>
+          <p:cNvPr id="20" name="Text 16"/>
+          <p:cNvSpPr/>
+          <p:nvPr/>
+        </p:nvSpPr>
+        <p:spPr>
+          <a:xfrm>
+            <a:off x="5852160" y="4590288"/>
+            <a:ext cx="5486400" cy="877824"/>
           </a:xfrm>
           <a:prstGeom prst="rect">
             <a:avLst/>
@@ -4530,7 +5516,7 @@
                 <a:ea typeface="Pretendard" pitchFamily="34" charset="-122"/>
                 <a:cs typeface="Pretendard" pitchFamily="34" charset="-120"/>
               </a:rPr>
-              <a:t>무임승차·기록평가 불일치를 자동 감지</a:t>
+              <a:t>이의제기에도 근거로 방어합니다</a:t>
             </a:r>
             <a:endParaRPr lang="en-US" sz="1350" dirty="0"/>
           </a:p>
@@ -4538,49 +5524,46 @@
       </p:sp>
       <p:sp>
         <p:nvSpPr>
-          <p:cNvPr id="15" name="Shape 11"/>
-          <p:cNvSpPr/>
-          <p:nvPr/>
-        </p:nvSpPr>
-        <p:spPr>
-          <a:xfrm>
-            <a:off x="3566160" y="5001768"/>
-            <a:ext cx="8001000" cy="877824"/>
-          </a:xfrm>
-          <a:prstGeom prst="roundRect">
-            <a:avLst>
-              <a:gd name="adj" fmla="val 10417"/>
-            </a:avLst>
-          </a:prstGeom>
-          <a:solidFill>
-            <a:srgbClr val="413C9A"/>
-          </a:solidFill>
-          <a:ln/>
-        </p:spPr>
-      </p:sp>
-      <p:sp>
-        <p:nvSpPr>
-          <p:cNvPr id="16" name="Shape 12"/>
-          <p:cNvSpPr/>
-          <p:nvPr/>
-        </p:nvSpPr>
-        <p:spPr>
-          <a:xfrm>
-            <a:off x="3822192" y="5184648"/>
-            <a:ext cx="512064" cy="512064"/>
-          </a:xfrm>
-          <a:prstGeom prst="ellipse">
-            <a:avLst/>
-          </a:prstGeom>
-          <a:solidFill>
-            <a:srgbClr val="5B54C9"/>
-          </a:solidFill>
-          <a:ln/>
-        </p:spPr>
+          <p:cNvPr id="21" name="Text 17"/>
+          <p:cNvSpPr/>
+          <p:nvPr/>
+        </p:nvSpPr>
+        <p:spPr>
+          <a:xfrm>
+            <a:off x="3566160" y="5760720"/>
+            <a:ext cx="8001000" cy="457200"/>
+          </a:xfrm>
+          <a:prstGeom prst="rect">
+            <a:avLst/>
+          </a:prstGeom>
+          <a:noFill/>
+          <a:ln/>
+        </p:spPr>
+        <p:txBody>
+          <a:bodyPr wrap="square" lIns="0" tIns="0" rIns="0" bIns="0" rtlCol="0" anchor="ctr"/>
+          <a:lstStyle/>
+          <a:p>
+            <a:pPr indent="0" marL="0">
+              <a:buNone/>
+            </a:pPr>
+            <a:r>
+              <a:rPr lang="en-US" sz="1700" b="1" dirty="0">
+                <a:solidFill>
+                  <a:srgbClr val="FFFFFF"/>
+                </a:solidFill>
+                <a:latin typeface="Pretendard" pitchFamily="34" charset="0"/>
+                <a:ea typeface="Pretendard" pitchFamily="34" charset="-122"/>
+                <a:cs typeface="Pretendard" pitchFamily="34" charset="-120"/>
+              </a:rPr>
+              <a:t>감시가 아닌 증명 — N분의1  ·  감사합니다</a:t>
+            </a:r>
+            <a:endParaRPr lang="en-US" sz="1700" dirty="0"/>
+          </a:p>
+        </p:txBody>
       </p:sp>
       <p:pic>
         <p:nvPicPr>
-          <p:cNvPr id="17" name="Image 2" descr="preencoded.png">    </p:cNvPr>
+          <p:cNvPr id="22" name="Image 2" descr="C:/Users/HP15~1/AppData/Local/Temp/claude/C--Users-HP-15-Desktop-Hackathon/e11a162a-fd90-4cff-922b-c82073c29db3/scratchpad/deck/assets/dev_prof.png">    </p:cNvPr>
           <p:cNvPicPr>
             <a:picLocks noChangeAspect="1"/>
           </p:cNvPicPr>
@@ -4594,147 +5577,6 @@
         </p:blipFill>
         <p:spPr>
           <a:xfrm>
-            <a:off x="3950208" y="5312664"/>
-            <a:ext cx="256032" cy="256032"/>
-          </a:xfrm>
-          <a:prstGeom prst="rect">
-            <a:avLst/>
-          </a:prstGeom>
-        </p:spPr>
-      </p:pic>
-      <p:sp>
-        <p:nvSpPr>
-          <p:cNvPr id="18" name="Text 13"/>
-          <p:cNvSpPr/>
-          <p:nvPr/>
-        </p:nvSpPr>
-        <p:spPr>
-          <a:xfrm>
-            <a:off x="4553712" y="5001768"/>
-            <a:ext cx="2468880" cy="877824"/>
-          </a:xfrm>
-          <a:prstGeom prst="rect">
-            <a:avLst/>
-          </a:prstGeom>
-          <a:noFill/>
-          <a:ln/>
-        </p:spPr>
-        <p:txBody>
-          <a:bodyPr wrap="square" lIns="0" tIns="0" rIns="0" bIns="0" rtlCol="0" anchor="ctr"/>
-          <a:lstStyle/>
-          <a:p>
-            <a:pPr indent="0" marL="0">
-              <a:buNone/>
-            </a:pPr>
-            <a:r>
-              <a:rPr lang="en-US" sz="1450" b="1" dirty="0">
-                <a:solidFill>
-                  <a:srgbClr val="C7D2FE"/>
-                </a:solidFill>
-                <a:latin typeface="Pretendard" pitchFamily="34" charset="0"/>
-                <a:ea typeface="Pretendard" pitchFamily="34" charset="-122"/>
-                <a:cs typeface="Pretendard" pitchFamily="34" charset="-120"/>
-              </a:rPr>
-              <a:t>일정까지 통합</a:t>
-            </a:r>
-            <a:endParaRPr lang="en-US" sz="1450" dirty="0"/>
-          </a:p>
-        </p:txBody>
-      </p:sp>
-      <p:sp>
-        <p:nvSpPr>
-          <p:cNvPr id="19" name="Text 14"/>
-          <p:cNvSpPr/>
-          <p:nvPr/>
-        </p:nvSpPr>
-        <p:spPr>
-          <a:xfrm>
-            <a:off x="6766560" y="5001768"/>
-            <a:ext cx="4572000" cy="877824"/>
-          </a:xfrm>
-          <a:prstGeom prst="rect">
-            <a:avLst/>
-          </a:prstGeom>
-          <a:noFill/>
-          <a:ln/>
-        </p:spPr>
-        <p:txBody>
-          <a:bodyPr wrap="square" lIns="0" tIns="0" rIns="0" bIns="0" rtlCol="0" anchor="ctr"/>
-          <a:lstStyle/>
-          <a:p>
-            <a:pPr indent="0" marL="0">
-              <a:buNone/>
-            </a:pPr>
-            <a:r>
-              <a:rPr lang="en-US" sz="1350" dirty="0">
-                <a:solidFill>
-                  <a:srgbClr val="FFFFFF"/>
-                </a:solidFill>
-                <a:latin typeface="Pretendard" pitchFamily="34" charset="0"/>
-                <a:ea typeface="Pretendard" pitchFamily="34" charset="-122"/>
-                <a:cs typeface="Pretendard" pitchFamily="34" charset="-120"/>
-              </a:rPr>
-              <a:t>졸업작품 · 중간 · 기말 프로젝트 관리</a:t>
-            </a:r>
-            <a:endParaRPr lang="en-US" sz="1350" dirty="0"/>
-          </a:p>
-        </p:txBody>
-      </p:sp>
-      <p:sp>
-        <p:nvSpPr>
-          <p:cNvPr id="20" name="Text 15"/>
-          <p:cNvSpPr/>
-          <p:nvPr/>
-        </p:nvSpPr>
-        <p:spPr>
-          <a:xfrm>
-            <a:off x="3566160" y="6108192"/>
-            <a:ext cx="8001000" cy="457200"/>
-          </a:xfrm>
-          <a:prstGeom prst="rect">
-            <a:avLst/>
-          </a:prstGeom>
-          <a:noFill/>
-          <a:ln/>
-        </p:spPr>
-        <p:txBody>
-          <a:bodyPr wrap="square" lIns="0" tIns="0" rIns="0" bIns="0" rtlCol="0" anchor="ctr"/>
-          <a:lstStyle/>
-          <a:p>
-            <a:pPr indent="0" marL="0">
-              <a:buNone/>
-            </a:pPr>
-            <a:r>
-              <a:rPr lang="en-US" sz="1800" b="1" dirty="0">
-                <a:solidFill>
-                  <a:srgbClr val="FFFFFF"/>
-                </a:solidFill>
-                <a:latin typeface="Pretendard" pitchFamily="34" charset="0"/>
-                <a:ea typeface="Pretendard" pitchFamily="34" charset="-122"/>
-                <a:cs typeface="Pretendard" pitchFamily="34" charset="-120"/>
-              </a:rPr>
-              <a:t>감시가 아닌 증명 — N분의1</a:t>
-            </a:r>
-            <a:endParaRPr lang="en-US" sz="1800" dirty="0"/>
-          </a:p>
-        </p:txBody>
-      </p:sp>
-      <p:pic>
-        <p:nvPicPr>
-          <p:cNvPr id="21" name="Image 3" descr="C:/Users/HP15~1/AppData/Local/Temp/claude/C--Users-HP-15-Desktop-Hackathon/e11a162a-fd90-4cff-922b-c82073c29db3/scratchpad/deck/assets/dev_prof.png">    </p:cNvPr>
-          <p:cNvPicPr>
-            <a:picLocks noChangeAspect="1"/>
-          </p:cNvPicPr>
-          <p:nvPr/>
-        </p:nvPicPr>
-        <p:blipFill>
-          <a:blip r:embed="rId5"/>
-          <a:stretch>
-            <a:fillRect/>
-          </a:stretch>
-        </p:blipFill>
-        <p:spPr>
-          <a:xfrm>
             <a:off x="566928" y="502920"/>
             <a:ext cx="2715672" cy="5806440"/>
           </a:xfrm>
@@ -4745,7 +5587,7 @@
       </p:pic>
       <p:sp>
         <p:nvSpPr>
-          <p:cNvPr id="22" name="Text 16"/>
+          <p:cNvPr id="23" name="Text 18"/>
           <p:cNvSpPr/>
           <p:nvPr/>
         </p:nvSpPr>
@@ -4784,7 +5626,7 @@
       </p:sp>
       <p:sp>
         <p:nvSpPr>
-          <p:cNvPr id="23" name="Text 17"/>
+          <p:cNvPr id="24" name="Text 19"/>
           <p:cNvSpPr/>
           <p:nvPr/>
         </p:nvSpPr>
